--- a/docs/presentation/II2202-final-presentation.pptx
+++ b/docs/presentation/II2202-final-presentation.pptx
@@ -1041,7 +1041,7 @@
           </a:p>
           <a:p xmlns:a="http://schemas.openxmlformats.org/drawingml/2006/main">
             <a:r>
-              <a:t>[Cue: Point to T2, then T3. Explain the pictures without listing every link.]</a:t>
+              <a:t>[Cue: Point across T0–T4, then pause at T2 and T3. Explain the diagrams without listing every link.]</a:t>
             </a:r>
           </a:p>
           <a:p xmlns:a="http://schemas.openxmlformats.org/drawingml/2006/main">
@@ -1051,7 +1051,7 @@
           </a:p>
           <a:p xmlns:a="http://schemas.openxmlformats.org/drawingml/2006/main">
             <a:r>
-              <a:t>These two examples show the main problems we wanted to test.</a:t>
+              <a:t>We tested five configurations. Solid lines are working connections, dashed lines have failed, and blue paths show forwarding.</a:t>
             </a:r>
           </a:p>
           <a:p xmlns:a="http://schemas.openxmlformats.org/drawingml/2006/main">
@@ -1061,7 +1061,7 @@
           </a:p>
           <a:p xmlns:a="http://schemas.openxmlformats.org/drawingml/2006/main">
             <a:r>
-              <a:t>In T2, on the left, leader C loses its direct connection to a majority. Node A can still reach the other nodes, so forwarding through A gives the leader another path.</a:t>
+              <a:t>T0 is our healthy baseline, with every direct connection working.</a:t>
             </a:r>
           </a:p>
           <a:p xmlns:a="http://schemas.openxmlformats.org/drawingml/2006/main">
@@ -1071,7 +1071,7 @@
           </a:p>
           <a:p xmlns:a="http://schemas.openxmlformats.org/drawingml/2006/main">
             <a:r>
-              <a:t>T3 adds a complication: the nodes have stored different histories of updates. We call these histories logs. A node will reject a candidate whose log is less up to date than its own.</a:t>
+              <a:t>T1 removes one link, while the leader still has a direct majority.</a:t>
             </a:r>
           </a:p>
           <a:p xmlns:a="http://schemas.openxmlformats.org/drawingml/2006/main">
@@ -1081,7 +1081,7 @@
           </a:p>
           <a:p xmlns:a="http://schemas.openxmlformats.org/drawingml/2006/main">
             <a:r>
-              <a:t>Here, C is isolated, and A has an older log. With direct communication, the remaining candidates cannot get enough votes. Forwarding allows an eligible candidate, such as B, to reach a majority through A.</a:t>
+              <a:t>T2 removes the leader's direct majority. Forwarding through A gives it another path to enough nodes.</a:t>
             </a:r>
           </a:p>
           <a:p xmlns:a="http://schemas.openxmlformats.org/drawingml/2006/main">
@@ -1091,7 +1091,7 @@
           </a:p>
           <a:p xmlns:a="http://schemas.openxmlformats.org/drawingml/2006/main">
             <a:r>
-              <a:t>We also tested a healthy network, T0. In T1 and T4, we need to consider whether the client can reach the leader, even when that leader still has a majority.</a:t>
+              <a:t>T3 also tests the election rules. Each node keeps a history of updates, called a log. Here, C is isolated, and A's log is older. A can reach enough nodes, but other nodes can reject its election request because its log is behind. Forwarding lets an eligible candidate reach a majority.</a:t>
             </a:r>
           </a:p>
           <a:p xmlns:a="http://schemas.openxmlformats.org/drawingml/2006/main">
@@ -1101,7 +1101,7 @@
           </a:p>
           <a:p xmlns:a="http://schemas.openxmlformats.org/drawingml/2006/main">
             <a:r>
-              <a:t>With that setup in mind, I'll hand over to Juozas for the results.</a:t>
+              <a:t>Finally, T4 is a three-node chain. B and C can communicate through A. A leader can still have a direct majority, but client access can be affected, as in T1.</a:t>
             </a:r>
           </a:p>
           <a:p xmlns:a="http://schemas.openxmlformats.org/drawingml/2006/main">
@@ -1111,7 +1111,17 @@
           </a:p>
           <a:p xmlns:a="http://schemas.openxmlformats.org/drawingml/2006/main">
             <a:r>
-              <a:t>Source: docs/presentation/presentation-script.md</a:t>
+              <a:t>I'll hand over to Juozas for the results.</a:t>
+            </a:r>
+          </a:p>
+          <a:p xmlns:a="http://schemas.openxmlformats.org/drawingml/2006/main">
+            <a:r>
+              <a:t/>
+            </a:r>
+          </a:p>
+          <a:p xmlns:a="http://schemas.openxmlformats.org/drawingml/2006/main">
+            <a:r>
+              <a:t>Sources: docs/presentation/presentation-script.md; docs/final-report/figures/topology-scenarios.png; docs/final-report/II2202-report.tex</a:t>
             </a:r>
           </a:p>
         </p:txBody>
@@ -13012,165 +13022,6 @@
       </p:grpSpPr>
       <p:sp>
         <p:nvSpPr>
-          <p:cNvPr id="15" name="slide-title">
-            <a:extLst xmlns:a="http://schemas.openxmlformats.org/drawingml/2006/main">
-              <a:ext uri="{FF2B5EF4-FFF2-40B4-BE49-F238E27FC236}">
-                <a16:creationId xmlns:a16="http://schemas.microsoft.com/office/drawing/2014/main" id="{57A1FED6-7AEC-44C2-94F7-87B652044D22}"/>
-              </a:ext>
-            </a:extLst>
-          </p:cNvPr>
-          <p:cNvSpPr>
-            <a:spLocks xmlns:a="http://schemas.openxmlformats.org/drawingml/2006/main" noGrp="1"/>
-          </p:cNvSpPr>
-          <p:nvPr/>
-        </p:nvSpPr>
-        <p:spPr>
-          <a:xfrm xmlns:a="http://schemas.openxmlformats.org/drawingml/2006/main">
-            <a:off x="685800" y="495300"/>
-            <a:ext cx="10820400" cy="1000125"/>
-          </a:xfrm>
-          <a:prstGeom xmlns:a="http://schemas.openxmlformats.org/drawingml/2006/main" prst="rect">
-            <a:avLst/>
-          </a:prstGeom>
-          <a:noFill xmlns:a="http://schemas.openxmlformats.org/drawingml/2006/main"/>
-          <a:ln xmlns:a="http://schemas.openxmlformats.org/drawingml/2006/main" w="0">
-            <a:noFill/>
-          </a:ln>
-        </p:spPr>
-        <p:txBody>
-          <a:bodyPr xmlns:a="http://schemas.openxmlformats.org/drawingml/2006/main" wrap="square" lIns="0" tIns="0" rIns="0" bIns="0" anchor="t">
-            <a:noAutofit/>
-          </a:bodyPr>
-          <a:lstStyle xmlns:a="http://schemas.openxmlformats.org/drawingml/2006/main">
-            <a:defPPr algn="l">
-              <a:defRPr sz="3300" b="1">
-                <a:solidFill>
-                  <a:srgbClr val="173247"/>
-                </a:solidFill>
-                <a:latin typeface="Arial"/>
-                <a:ea typeface="Arial"/>
-                <a:cs typeface="Arial"/>
-              </a:defRPr>
-            </a:defPPr>
-            <a:lvl1pPr algn="l">
-              <a:defRPr sz="3300" b="1">
-                <a:solidFill>
-                  <a:srgbClr val="173247"/>
-                </a:solidFill>
-                <a:latin typeface="Arial"/>
-                <a:ea typeface="Arial"/>
-                <a:cs typeface="Arial"/>
-              </a:defRPr>
-            </a:lvl1pPr>
-            <a:lvl2pPr algn="l">
-              <a:defRPr sz="3300" b="1">
-                <a:solidFill>
-                  <a:srgbClr val="173247"/>
-                </a:solidFill>
-                <a:latin typeface="Arial"/>
-                <a:ea typeface="Arial"/>
-                <a:cs typeface="Arial"/>
-              </a:defRPr>
-            </a:lvl2pPr>
-            <a:lvl3pPr algn="l">
-              <a:defRPr sz="3300" b="1">
-                <a:solidFill>
-                  <a:srgbClr val="173247"/>
-                </a:solidFill>
-                <a:latin typeface="Arial"/>
-                <a:ea typeface="Arial"/>
-                <a:cs typeface="Arial"/>
-              </a:defRPr>
-            </a:lvl3pPr>
-            <a:lvl4pPr algn="l">
-              <a:defRPr sz="3300" b="1">
-                <a:solidFill>
-                  <a:srgbClr val="173247"/>
-                </a:solidFill>
-                <a:latin typeface="Arial"/>
-                <a:ea typeface="Arial"/>
-                <a:cs typeface="Arial"/>
-              </a:defRPr>
-            </a:lvl4pPr>
-            <a:lvl5pPr algn="l">
-              <a:defRPr sz="3300" b="1">
-                <a:solidFill>
-                  <a:srgbClr val="173247"/>
-                </a:solidFill>
-                <a:latin typeface="Arial"/>
-                <a:ea typeface="Arial"/>
-                <a:cs typeface="Arial"/>
-              </a:defRPr>
-            </a:lvl5pPr>
-            <a:lvl6pPr algn="l">
-              <a:defRPr sz="3300" b="1">
-                <a:solidFill>
-                  <a:srgbClr val="173247"/>
-                </a:solidFill>
-                <a:latin typeface="Arial"/>
-                <a:ea typeface="Arial"/>
-                <a:cs typeface="Arial"/>
-              </a:defRPr>
-            </a:lvl6pPr>
-            <a:lvl7pPr algn="l">
-              <a:defRPr sz="3300" b="1">
-                <a:solidFill>
-                  <a:srgbClr val="173247"/>
-                </a:solidFill>
-                <a:latin typeface="Arial"/>
-                <a:ea typeface="Arial"/>
-                <a:cs typeface="Arial"/>
-              </a:defRPr>
-            </a:lvl7pPr>
-            <a:lvl8pPr algn="l">
-              <a:defRPr sz="3300" b="1">
-                <a:solidFill>
-                  <a:srgbClr val="173247"/>
-                </a:solidFill>
-                <a:latin typeface="Arial"/>
-                <a:ea typeface="Arial"/>
-                <a:cs typeface="Arial"/>
-              </a:defRPr>
-            </a:lvl8pPr>
-            <a:lvl9pPr algn="l">
-              <a:defRPr sz="3300" b="1">
-                <a:solidFill>
-                  <a:srgbClr val="173247"/>
-                </a:solidFill>
-                <a:latin typeface="Arial"/>
-                <a:ea typeface="Arial"/>
-                <a:cs typeface="Arial"/>
-              </a:defRPr>
-            </a:lvl9pPr>
-          </a:lstStyle>
-          <a:p xmlns:a="http://schemas.openxmlformats.org/drawingml/2006/main">
-            <a:pPr algn="l">
-              <a:buNone/>
-              <a:defRPr sz="3300" b="1">
-                <a:solidFill>
-                  <a:srgbClr val="173247"/>
-                </a:solidFill>
-                <a:latin typeface="Arial"/>
-                <a:ea typeface="Arial"/>
-                <a:cs typeface="Arial"/>
-              </a:defRPr>
-            </a:pPr>
-            <a:r>
-              <a:rPr sz="3300" b="1">
-                <a:solidFill>
-                  <a:srgbClr val="173247"/>
-                </a:solidFill>
-                <a:latin typeface="Arial"/>
-                <a:ea typeface="Arial"/>
-                <a:cs typeface="Arial"/>
-              </a:rPr>
-              <a:t>Partitions test quorum access and elections</a:t>
-            </a:r>
-          </a:p>
-        </p:txBody>
-      </p:sp>
-      <p:sp>
-        <p:nvSpPr>
           <p:cNvPr id="2" name="slide-number">
             <a:extLst xmlns:a="http://schemas.openxmlformats.org/drawingml/2006/main">
               <a:ext uri="{FF2B5EF4-FFF2-40B4-BE49-F238E27FC236}">
@@ -13212,6 +13063,7 @@
               </a:defRPr>
             </a:defPPr>
             <a:lvl1pPr algn="r">
+              <a:buNone/>
               <a:defRPr sz="1500" b="0">
                 <a:solidFill>
                   <a:srgbClr val="556570"/>
@@ -13222,6 +13074,7 @@
               </a:defRPr>
             </a:lvl1pPr>
             <a:lvl2pPr algn="r">
+              <a:buNone/>
               <a:defRPr sz="1500" b="0">
                 <a:solidFill>
                   <a:srgbClr val="556570"/>
@@ -13232,6 +13085,7 @@
               </a:defRPr>
             </a:lvl2pPr>
             <a:lvl3pPr algn="r">
+              <a:buNone/>
               <a:defRPr sz="1500" b="0">
                 <a:solidFill>
                   <a:srgbClr val="556570"/>
@@ -13242,6 +13096,7 @@
               </a:defRPr>
             </a:lvl3pPr>
             <a:lvl4pPr algn="r">
+              <a:buNone/>
               <a:defRPr sz="1500" b="0">
                 <a:solidFill>
                   <a:srgbClr val="556570"/>
@@ -13252,6 +13107,7 @@
               </a:defRPr>
             </a:lvl4pPr>
             <a:lvl5pPr algn="r">
+              <a:buNone/>
               <a:defRPr sz="1500" b="0">
                 <a:solidFill>
                   <a:srgbClr val="556570"/>
@@ -13262,6 +13118,7 @@
               </a:defRPr>
             </a:lvl5pPr>
             <a:lvl6pPr algn="r">
+              <a:buNone/>
               <a:defRPr sz="1500" b="0">
                 <a:solidFill>
                   <a:srgbClr val="556570"/>
@@ -13272,6 +13129,7 @@
               </a:defRPr>
             </a:lvl6pPr>
             <a:lvl7pPr algn="r">
+              <a:buNone/>
               <a:defRPr sz="1500" b="0">
                 <a:solidFill>
                   <a:srgbClr val="556570"/>
@@ -13282,6 +13140,7 @@
               </a:defRPr>
             </a:lvl7pPr>
             <a:lvl8pPr algn="r">
+              <a:buNone/>
               <a:defRPr sz="1500" b="0">
                 <a:solidFill>
                   <a:srgbClr val="556570"/>
@@ -13292,6 +13151,7 @@
               </a:defRPr>
             </a:lvl8pPr>
             <a:lvl9pPr algn="r">
+              <a:buNone/>
               <a:defRPr sz="1500" b="0">
                 <a:solidFill>
                   <a:srgbClr val="556570"/>
@@ -13330,10 +13190,10 @@
       </p:sp>
       <p:sp>
         <p:nvSpPr>
-          <p:cNvPr id="3" name="T2  Quorum loss">
+          <p:cNvPr id="3" name="Network configurations T0–T4">
             <a:extLst xmlns:a="http://schemas.openxmlformats.org/drawingml/2006/main">
               <a:ext uri="{FF2B5EF4-FFF2-40B4-BE49-F238E27FC236}">
-                <a16:creationId xmlns:a16="http://schemas.microsoft.com/office/drawing/2014/main" id="{D5361AAC-24A2-4B4B-8194-111292FB3001}"/>
+                <a16:creationId xmlns:a16="http://schemas.microsoft.com/office/drawing/2014/main" id="{7652F4A5-4160-42C9-964A-65C9A4E5C06C}"/>
               </a:ext>
             </a:extLst>
           </p:cNvPr>
@@ -13344,8 +13204,8 @@
         </p:nvSpPr>
         <p:spPr>
           <a:xfrm xmlns:a="http://schemas.openxmlformats.org/drawingml/2006/main">
-            <a:off x="685800" y="1762125"/>
-            <a:ext cx="4857750" cy="457200"/>
+            <a:off x="685800" y="495300"/>
+            <a:ext cx="10820400" cy="1000125"/>
           </a:xfrm>
           <a:prstGeom xmlns:a="http://schemas.openxmlformats.org/drawingml/2006/main" prst="rect">
             <a:avLst/>
@@ -13361,9 +13221,9 @@
           </a:bodyPr>
           <a:lstStyle xmlns:a="http://schemas.openxmlformats.org/drawingml/2006/main">
             <a:defPPr algn="l">
-              <a:defRPr sz="2100" b="1">
-                <a:solidFill>
-                  <a:srgbClr val="007E87"/>
+              <a:defRPr sz="3300" b="1">
+                <a:solidFill>
+                  <a:srgbClr val="173247"/>
                 </a:solidFill>
                 <a:latin typeface="Arial"/>
                 <a:ea typeface="Arial"/>
@@ -13371,9 +13231,10 @@
               </a:defRPr>
             </a:defPPr>
             <a:lvl1pPr algn="l">
-              <a:defRPr sz="2100" b="1">
-                <a:solidFill>
-                  <a:srgbClr val="007E87"/>
+              <a:buNone/>
+              <a:defRPr sz="3300" b="1">
+                <a:solidFill>
+                  <a:srgbClr val="173247"/>
                 </a:solidFill>
                 <a:latin typeface="Arial"/>
                 <a:ea typeface="Arial"/>
@@ -13381,9 +13242,10 @@
               </a:defRPr>
             </a:lvl1pPr>
             <a:lvl2pPr algn="l">
-              <a:defRPr sz="2100" b="1">
-                <a:solidFill>
-                  <a:srgbClr val="007E87"/>
+              <a:buNone/>
+              <a:defRPr sz="3300" b="1">
+                <a:solidFill>
+                  <a:srgbClr val="173247"/>
                 </a:solidFill>
                 <a:latin typeface="Arial"/>
                 <a:ea typeface="Arial"/>
@@ -13391,9 +13253,10 @@
               </a:defRPr>
             </a:lvl2pPr>
             <a:lvl3pPr algn="l">
-              <a:defRPr sz="2100" b="1">
-                <a:solidFill>
-                  <a:srgbClr val="007E87"/>
+              <a:buNone/>
+              <a:defRPr sz="3300" b="1">
+                <a:solidFill>
+                  <a:srgbClr val="173247"/>
                 </a:solidFill>
                 <a:latin typeface="Arial"/>
                 <a:ea typeface="Arial"/>
@@ -13401,9 +13264,10 @@
               </a:defRPr>
             </a:lvl3pPr>
             <a:lvl4pPr algn="l">
-              <a:defRPr sz="2100" b="1">
-                <a:solidFill>
-                  <a:srgbClr val="007E87"/>
+              <a:buNone/>
+              <a:defRPr sz="3300" b="1">
+                <a:solidFill>
+                  <a:srgbClr val="173247"/>
                 </a:solidFill>
                 <a:latin typeface="Arial"/>
                 <a:ea typeface="Arial"/>
@@ -13411,9 +13275,10 @@
               </a:defRPr>
             </a:lvl4pPr>
             <a:lvl5pPr algn="l">
-              <a:defRPr sz="2100" b="1">
-                <a:solidFill>
-                  <a:srgbClr val="007E87"/>
+              <a:buNone/>
+              <a:defRPr sz="3300" b="1">
+                <a:solidFill>
+                  <a:srgbClr val="173247"/>
                 </a:solidFill>
                 <a:latin typeface="Arial"/>
                 <a:ea typeface="Arial"/>
@@ -13421,9 +13286,10 @@
               </a:defRPr>
             </a:lvl5pPr>
             <a:lvl6pPr algn="l">
-              <a:defRPr sz="2100" b="1">
-                <a:solidFill>
-                  <a:srgbClr val="007E87"/>
+              <a:buNone/>
+              <a:defRPr sz="3300" b="1">
+                <a:solidFill>
+                  <a:srgbClr val="173247"/>
                 </a:solidFill>
                 <a:latin typeface="Arial"/>
                 <a:ea typeface="Arial"/>
@@ -13431,9 +13297,10 @@
               </a:defRPr>
             </a:lvl6pPr>
             <a:lvl7pPr algn="l">
-              <a:defRPr sz="2100" b="1">
-                <a:solidFill>
-                  <a:srgbClr val="007E87"/>
+              <a:buNone/>
+              <a:defRPr sz="3300" b="1">
+                <a:solidFill>
+                  <a:srgbClr val="173247"/>
                 </a:solidFill>
                 <a:latin typeface="Arial"/>
                 <a:ea typeface="Arial"/>
@@ -13441,9 +13308,10 @@
               </a:defRPr>
             </a:lvl7pPr>
             <a:lvl8pPr algn="l">
-              <a:defRPr sz="2100" b="1">
-                <a:solidFill>
-                  <a:srgbClr val="007E87"/>
+              <a:buNone/>
+              <a:defRPr sz="3300" b="1">
+                <a:solidFill>
+                  <a:srgbClr val="173247"/>
                 </a:solidFill>
                 <a:latin typeface="Arial"/>
                 <a:ea typeface="Arial"/>
@@ -13451,9 +13319,10 @@
               </a:defRPr>
             </a:lvl8pPr>
             <a:lvl9pPr algn="l">
-              <a:defRPr sz="2100" b="1">
-                <a:solidFill>
-                  <a:srgbClr val="007E87"/>
+              <a:buNone/>
+              <a:defRPr sz="3300" b="1">
+                <a:solidFill>
+                  <a:srgbClr val="173247"/>
                 </a:solidFill>
                 <a:latin typeface="Arial"/>
                 <a:ea typeface="Arial"/>
@@ -13464,9 +13333,9 @@
           <a:p xmlns:a="http://schemas.openxmlformats.org/drawingml/2006/main">
             <a:pPr algn="l">
               <a:buNone/>
-              <a:defRPr sz="2100" b="1">
-                <a:solidFill>
-                  <a:srgbClr val="007E87"/>
+              <a:defRPr sz="3300" b="1">
+                <a:solidFill>
+                  <a:srgbClr val="173247"/>
                 </a:solidFill>
                 <a:latin typeface="Arial"/>
                 <a:ea typeface="Arial"/>
@@ -13474,25 +13343,25 @@
               </a:defRPr>
             </a:pPr>
             <a:r>
-              <a:rPr sz="2100" b="1">
-                <a:solidFill>
-                  <a:srgbClr val="007E87"/>
+              <a:rPr sz="3300" b="1">
+                <a:solidFill>
+                  <a:srgbClr val="173247"/>
                 </a:solidFill>
                 <a:latin typeface="Arial"/>
                 <a:ea typeface="Arial"/>
                 <a:cs typeface="Arial"/>
               </a:rPr>
-              <a:t>T2  Quorum loss</a:t>
+              <a:t>Network configurations</a:t>
             </a:r>
           </a:p>
         </p:txBody>
       </p:sp>
       <p:sp>
         <p:nvSpPr>
-          <p:cNvPr id="4" name="T3  Constrained election">
+          <p:cNvPr id="5" name="T0">
             <a:extLst xmlns:a="http://schemas.openxmlformats.org/drawingml/2006/main">
               <a:ext uri="{FF2B5EF4-FFF2-40B4-BE49-F238E27FC236}">
-                <a16:creationId xmlns:a16="http://schemas.microsoft.com/office/drawing/2014/main" id="{F042C7B9-B304-4FCB-9318-BA67C1C2FDF2}"/>
+                <a16:creationId xmlns:a16="http://schemas.microsoft.com/office/drawing/2014/main" id="{18E10180-33F2-4D5B-93F2-FB7FE53BFE43}"/>
               </a:ext>
             </a:extLst>
           </p:cNvPr>
@@ -13503,8 +13372,8 @@
         </p:nvSpPr>
         <p:spPr>
           <a:xfrm xmlns:a="http://schemas.openxmlformats.org/drawingml/2006/main">
-            <a:off x="6324600" y="1762125"/>
-            <a:ext cx="4857750" cy="457200"/>
+            <a:off x="685800" y="1971675"/>
+            <a:ext cx="1981200" cy="361950"/>
           </a:xfrm>
           <a:prstGeom xmlns:a="http://schemas.openxmlformats.org/drawingml/2006/main" prst="rect">
             <a:avLst/>
@@ -13520,7 +13389,7 @@
           </a:bodyPr>
           <a:lstStyle xmlns:a="http://schemas.openxmlformats.org/drawingml/2006/main">
             <a:defPPr algn="l">
-              <a:defRPr sz="2100" b="1">
+              <a:defRPr sz="2250" b="1">
                 <a:solidFill>
                   <a:srgbClr val="007E87"/>
                 </a:solidFill>
@@ -13530,7 +13399,8 @@
               </a:defRPr>
             </a:defPPr>
             <a:lvl1pPr algn="l">
-              <a:defRPr sz="2100" b="1">
+              <a:buNone/>
+              <a:defRPr sz="2250" b="1">
                 <a:solidFill>
                   <a:srgbClr val="007E87"/>
                 </a:solidFill>
@@ -13540,7 +13410,8 @@
               </a:defRPr>
             </a:lvl1pPr>
             <a:lvl2pPr algn="l">
-              <a:defRPr sz="2100" b="1">
+              <a:buNone/>
+              <a:defRPr sz="2250" b="1">
                 <a:solidFill>
                   <a:srgbClr val="007E87"/>
                 </a:solidFill>
@@ -13550,7 +13421,8 @@
               </a:defRPr>
             </a:lvl2pPr>
             <a:lvl3pPr algn="l">
-              <a:defRPr sz="2100" b="1">
+              <a:buNone/>
+              <a:defRPr sz="2250" b="1">
                 <a:solidFill>
                   <a:srgbClr val="007E87"/>
                 </a:solidFill>
@@ -13560,7 +13432,8 @@
               </a:defRPr>
             </a:lvl3pPr>
             <a:lvl4pPr algn="l">
-              <a:defRPr sz="2100" b="1">
+              <a:buNone/>
+              <a:defRPr sz="2250" b="1">
                 <a:solidFill>
                   <a:srgbClr val="007E87"/>
                 </a:solidFill>
@@ -13570,7 +13443,8 @@
               </a:defRPr>
             </a:lvl4pPr>
             <a:lvl5pPr algn="l">
-              <a:defRPr sz="2100" b="1">
+              <a:buNone/>
+              <a:defRPr sz="2250" b="1">
                 <a:solidFill>
                   <a:srgbClr val="007E87"/>
                 </a:solidFill>
@@ -13580,7 +13454,8 @@
               </a:defRPr>
             </a:lvl5pPr>
             <a:lvl6pPr algn="l">
-              <a:defRPr sz="2100" b="1">
+              <a:buNone/>
+              <a:defRPr sz="2250" b="1">
                 <a:solidFill>
                   <a:srgbClr val="007E87"/>
                 </a:solidFill>
@@ -13590,7 +13465,8 @@
               </a:defRPr>
             </a:lvl6pPr>
             <a:lvl7pPr algn="l">
-              <a:defRPr sz="2100" b="1">
+              <a:buNone/>
+              <a:defRPr sz="2250" b="1">
                 <a:solidFill>
                   <a:srgbClr val="007E87"/>
                 </a:solidFill>
@@ -13600,7 +13476,8 @@
               </a:defRPr>
             </a:lvl7pPr>
             <a:lvl8pPr algn="l">
-              <a:defRPr sz="2100" b="1">
+              <a:buNone/>
+              <a:defRPr sz="2250" b="1">
                 <a:solidFill>
                   <a:srgbClr val="007E87"/>
                 </a:solidFill>
@@ -13610,7 +13487,8 @@
               </a:defRPr>
             </a:lvl8pPr>
             <a:lvl9pPr algn="l">
-              <a:defRPr sz="2100" b="1">
+              <a:buNone/>
+              <a:defRPr sz="2250" b="1">
                 <a:solidFill>
                   <a:srgbClr val="007E87"/>
                 </a:solidFill>
@@ -13623,7 +13501,7 @@
           <a:p xmlns:a="http://schemas.openxmlformats.org/drawingml/2006/main">
             <a:pPr algn="l">
               <a:buNone/>
-              <a:defRPr sz="2100" b="1">
+              <a:defRPr sz="2250" b="1">
                 <a:solidFill>
                   <a:srgbClr val="007E87"/>
                 </a:solidFill>
@@ -13633,7 +13511,7 @@
               </a:defRPr>
             </a:pPr>
             <a:r>
-              <a:rPr sz="2100" b="1">
+              <a:rPr sz="2250" b="1">
                 <a:solidFill>
                   <a:srgbClr val="007E87"/>
                 </a:solidFill>
@@ -13641,45 +13519,17 @@
                 <a:ea typeface="Arial"/>
                 <a:cs typeface="Arial"/>
               </a:rPr>
-              <a:t>T3  Constrained election</a:t>
+              <a:t>T0</a:t>
             </a:r>
           </a:p>
         </p:txBody>
       </p:sp>
-      <p:pic>
-        <p:nvPicPr>
-          <p:cNvPr id="5" name="">
+      <p:sp>
+        <p:nvSpPr>
+          <p:cNvPr id="6" name="Healthy network">
             <a:extLst xmlns:a="http://schemas.openxmlformats.org/drawingml/2006/main">
               <a:ext uri="{FF2B5EF4-FFF2-40B4-BE49-F238E27FC236}">
-                <a16:creationId xmlns:a16="http://schemas.microsoft.com/office/drawing/2014/main" id="{76262DE0-3696-41F4-9616-460966120855}"/>
-              </a:ext>
-            </a:extLst>
-          </p:cNvPr>
-          <p:cNvPicPr>
-            <a:picLocks xmlns:a="http://schemas.openxmlformats.org/drawingml/2006/main" noChangeAspect="1"/>
-          </p:cNvPicPr>
-          <p:nvPr/>
-        </p:nvPicPr>
-        <p:blipFill>
-          <a:blip xmlns:r="http://schemas.openxmlformats.org/officeDocument/2006/relationships" xmlns:a="http://schemas.openxmlformats.org/drawingml/2006/main" r:embed="R05dc6a6167094edd"/>
-          <a:stretch xmlns:a="http://schemas.openxmlformats.org/drawingml/2006/main"/>
-        </p:blipFill>
-        <p:spPr>
-          <a:xfrm xmlns:a="http://schemas.openxmlformats.org/drawingml/2006/main">
-            <a:off x="685800" y="2501993"/>
-            <a:ext cx="5143500" cy="1739713"/>
-          </a:xfrm>
-          <a:prstGeom xmlns:a="http://schemas.openxmlformats.org/drawingml/2006/main" prst="rect">
-            <a:avLst/>
-          </a:prstGeom>
-        </p:spPr>
-      </p:pic>
-      <p:sp>
-        <p:nvSpPr>
-          <p:cNvPr id="6" name="Direct">
-            <a:extLst xmlns:a="http://schemas.openxmlformats.org/drawingml/2006/main">
-              <a:ext uri="{FF2B5EF4-FFF2-40B4-BE49-F238E27FC236}">
-                <a16:creationId xmlns:a16="http://schemas.microsoft.com/office/drawing/2014/main" id="{3701AD3D-A3FB-487D-B321-4268188E968A}"/>
+                <a16:creationId xmlns:a16="http://schemas.microsoft.com/office/drawing/2014/main" id="{DB00001A-EB7D-4C0B-A716-72660E6661F7}"/>
               </a:ext>
             </a:extLst>
           </p:cNvPr>
@@ -13690,672 +13540,8 @@
         </p:nvSpPr>
         <p:spPr>
           <a:xfrm xmlns:a="http://schemas.openxmlformats.org/drawingml/2006/main">
-            <a:off x="685800" y="2305050"/>
-            <a:ext cx="2457450" cy="285750"/>
-          </a:xfrm>
-          <a:prstGeom xmlns:a="http://schemas.openxmlformats.org/drawingml/2006/main" prst="rect">
-            <a:avLst/>
-          </a:prstGeom>
-          <a:noFill xmlns:a="http://schemas.openxmlformats.org/drawingml/2006/main"/>
-          <a:ln xmlns:a="http://schemas.openxmlformats.org/drawingml/2006/main" w="0">
-            <a:noFill/>
-          </a:ln>
-        </p:spPr>
-        <p:txBody>
-          <a:bodyPr xmlns:a="http://schemas.openxmlformats.org/drawingml/2006/main" wrap="square" lIns="0" tIns="0" rIns="0" bIns="0" anchor="t">
-            <a:noAutofit/>
-          </a:bodyPr>
-          <a:lstStyle xmlns:a="http://schemas.openxmlformats.org/drawingml/2006/main">
-            <a:defPPr algn="ctr">
-              <a:defRPr sz="1725" b="0">
-                <a:solidFill>
-                  <a:srgbClr val="556570"/>
-                </a:solidFill>
-                <a:latin typeface="Arial"/>
-                <a:ea typeface="Arial"/>
-                <a:cs typeface="Arial"/>
-              </a:defRPr>
-            </a:defPPr>
-            <a:lvl1pPr algn="ctr">
-              <a:defRPr sz="1725" b="0">
-                <a:solidFill>
-                  <a:srgbClr val="556570"/>
-                </a:solidFill>
-                <a:latin typeface="Arial"/>
-                <a:ea typeface="Arial"/>
-                <a:cs typeface="Arial"/>
-              </a:defRPr>
-            </a:lvl1pPr>
-            <a:lvl2pPr algn="ctr">
-              <a:defRPr sz="1725" b="0">
-                <a:solidFill>
-                  <a:srgbClr val="556570"/>
-                </a:solidFill>
-                <a:latin typeface="Arial"/>
-                <a:ea typeface="Arial"/>
-                <a:cs typeface="Arial"/>
-              </a:defRPr>
-            </a:lvl2pPr>
-            <a:lvl3pPr algn="ctr">
-              <a:defRPr sz="1725" b="0">
-                <a:solidFill>
-                  <a:srgbClr val="556570"/>
-                </a:solidFill>
-                <a:latin typeface="Arial"/>
-                <a:ea typeface="Arial"/>
-                <a:cs typeface="Arial"/>
-              </a:defRPr>
-            </a:lvl3pPr>
-            <a:lvl4pPr algn="ctr">
-              <a:defRPr sz="1725" b="0">
-                <a:solidFill>
-                  <a:srgbClr val="556570"/>
-                </a:solidFill>
-                <a:latin typeface="Arial"/>
-                <a:ea typeface="Arial"/>
-                <a:cs typeface="Arial"/>
-              </a:defRPr>
-            </a:lvl4pPr>
-            <a:lvl5pPr algn="ctr">
-              <a:defRPr sz="1725" b="0">
-                <a:solidFill>
-                  <a:srgbClr val="556570"/>
-                </a:solidFill>
-                <a:latin typeface="Arial"/>
-                <a:ea typeface="Arial"/>
-                <a:cs typeface="Arial"/>
-              </a:defRPr>
-            </a:lvl5pPr>
-            <a:lvl6pPr algn="ctr">
-              <a:defRPr sz="1725" b="0">
-                <a:solidFill>
-                  <a:srgbClr val="556570"/>
-                </a:solidFill>
-                <a:latin typeface="Arial"/>
-                <a:ea typeface="Arial"/>
-                <a:cs typeface="Arial"/>
-              </a:defRPr>
-            </a:lvl6pPr>
-            <a:lvl7pPr algn="ctr">
-              <a:defRPr sz="1725" b="0">
-                <a:solidFill>
-                  <a:srgbClr val="556570"/>
-                </a:solidFill>
-                <a:latin typeface="Arial"/>
-                <a:ea typeface="Arial"/>
-                <a:cs typeface="Arial"/>
-              </a:defRPr>
-            </a:lvl7pPr>
-            <a:lvl8pPr algn="ctr">
-              <a:defRPr sz="1725" b="0">
-                <a:solidFill>
-                  <a:srgbClr val="556570"/>
-                </a:solidFill>
-                <a:latin typeface="Arial"/>
-                <a:ea typeface="Arial"/>
-                <a:cs typeface="Arial"/>
-              </a:defRPr>
-            </a:lvl8pPr>
-            <a:lvl9pPr algn="ctr">
-              <a:defRPr sz="1725" b="0">
-                <a:solidFill>
-                  <a:srgbClr val="556570"/>
-                </a:solidFill>
-                <a:latin typeface="Arial"/>
-                <a:ea typeface="Arial"/>
-                <a:cs typeface="Arial"/>
-              </a:defRPr>
-            </a:lvl9pPr>
-          </a:lstStyle>
-          <a:p xmlns:a="http://schemas.openxmlformats.org/drawingml/2006/main">
-            <a:pPr algn="ctr">
-              <a:buNone/>
-              <a:defRPr sz="1725" b="0">
-                <a:solidFill>
-                  <a:srgbClr val="556570"/>
-                </a:solidFill>
-                <a:latin typeface="Arial"/>
-                <a:ea typeface="Arial"/>
-                <a:cs typeface="Arial"/>
-              </a:defRPr>
-            </a:pPr>
-            <a:r>
-              <a:rPr sz="1725" b="0">
-                <a:solidFill>
-                  <a:srgbClr val="556570"/>
-                </a:solidFill>
-                <a:latin typeface="Arial"/>
-                <a:ea typeface="Arial"/>
-                <a:cs typeface="Arial"/>
-              </a:rPr>
-              <a:t>Direct</a:t>
-            </a:r>
-          </a:p>
-        </p:txBody>
-      </p:sp>
-      <p:sp>
-        <p:nvSpPr>
-          <p:cNvPr id="7" name="Forwarding">
-            <a:extLst xmlns:a="http://schemas.openxmlformats.org/drawingml/2006/main">
-              <a:ext uri="{FF2B5EF4-FFF2-40B4-BE49-F238E27FC236}">
-                <a16:creationId xmlns:a16="http://schemas.microsoft.com/office/drawing/2014/main" id="{21F96D39-DE67-4E09-B5F7-381B4BC54D0F}"/>
-              </a:ext>
-            </a:extLst>
-          </p:cNvPr>
-          <p:cNvSpPr>
-            <a:spLocks xmlns:a="http://schemas.openxmlformats.org/drawingml/2006/main" noGrp="1"/>
-          </p:cNvSpPr>
-          <p:nvPr/>
-        </p:nvSpPr>
-        <p:spPr>
-          <a:xfrm xmlns:a="http://schemas.openxmlformats.org/drawingml/2006/main">
-            <a:off x="3371850" y="2305050"/>
-            <a:ext cx="2457450" cy="285750"/>
-          </a:xfrm>
-          <a:prstGeom xmlns:a="http://schemas.openxmlformats.org/drawingml/2006/main" prst="rect">
-            <a:avLst/>
-          </a:prstGeom>
-          <a:noFill xmlns:a="http://schemas.openxmlformats.org/drawingml/2006/main"/>
-          <a:ln xmlns:a="http://schemas.openxmlformats.org/drawingml/2006/main" w="0">
-            <a:noFill/>
-          </a:ln>
-        </p:spPr>
-        <p:txBody>
-          <a:bodyPr xmlns:a="http://schemas.openxmlformats.org/drawingml/2006/main" wrap="square" lIns="0" tIns="0" rIns="0" bIns="0" anchor="t">
-            <a:noAutofit/>
-          </a:bodyPr>
-          <a:lstStyle xmlns:a="http://schemas.openxmlformats.org/drawingml/2006/main">
-            <a:defPPr algn="ctr">
-              <a:defRPr sz="1725" b="0">
-                <a:solidFill>
-                  <a:srgbClr val="556570"/>
-                </a:solidFill>
-                <a:latin typeface="Arial"/>
-                <a:ea typeface="Arial"/>
-                <a:cs typeface="Arial"/>
-              </a:defRPr>
-            </a:defPPr>
-            <a:lvl1pPr algn="ctr">
-              <a:defRPr sz="1725" b="0">
-                <a:solidFill>
-                  <a:srgbClr val="556570"/>
-                </a:solidFill>
-                <a:latin typeface="Arial"/>
-                <a:ea typeface="Arial"/>
-                <a:cs typeface="Arial"/>
-              </a:defRPr>
-            </a:lvl1pPr>
-            <a:lvl2pPr algn="ctr">
-              <a:defRPr sz="1725" b="0">
-                <a:solidFill>
-                  <a:srgbClr val="556570"/>
-                </a:solidFill>
-                <a:latin typeface="Arial"/>
-                <a:ea typeface="Arial"/>
-                <a:cs typeface="Arial"/>
-              </a:defRPr>
-            </a:lvl2pPr>
-            <a:lvl3pPr algn="ctr">
-              <a:defRPr sz="1725" b="0">
-                <a:solidFill>
-                  <a:srgbClr val="556570"/>
-                </a:solidFill>
-                <a:latin typeface="Arial"/>
-                <a:ea typeface="Arial"/>
-                <a:cs typeface="Arial"/>
-              </a:defRPr>
-            </a:lvl3pPr>
-            <a:lvl4pPr algn="ctr">
-              <a:defRPr sz="1725" b="0">
-                <a:solidFill>
-                  <a:srgbClr val="556570"/>
-                </a:solidFill>
-                <a:latin typeface="Arial"/>
-                <a:ea typeface="Arial"/>
-                <a:cs typeface="Arial"/>
-              </a:defRPr>
-            </a:lvl4pPr>
-            <a:lvl5pPr algn="ctr">
-              <a:defRPr sz="1725" b="0">
-                <a:solidFill>
-                  <a:srgbClr val="556570"/>
-                </a:solidFill>
-                <a:latin typeface="Arial"/>
-                <a:ea typeface="Arial"/>
-                <a:cs typeface="Arial"/>
-              </a:defRPr>
-            </a:lvl5pPr>
-            <a:lvl6pPr algn="ctr">
-              <a:defRPr sz="1725" b="0">
-                <a:solidFill>
-                  <a:srgbClr val="556570"/>
-                </a:solidFill>
-                <a:latin typeface="Arial"/>
-                <a:ea typeface="Arial"/>
-                <a:cs typeface="Arial"/>
-              </a:defRPr>
-            </a:lvl6pPr>
-            <a:lvl7pPr algn="ctr">
-              <a:defRPr sz="1725" b="0">
-                <a:solidFill>
-                  <a:srgbClr val="556570"/>
-                </a:solidFill>
-                <a:latin typeface="Arial"/>
-                <a:ea typeface="Arial"/>
-                <a:cs typeface="Arial"/>
-              </a:defRPr>
-            </a:lvl7pPr>
-            <a:lvl8pPr algn="ctr">
-              <a:defRPr sz="1725" b="0">
-                <a:solidFill>
-                  <a:srgbClr val="556570"/>
-                </a:solidFill>
-                <a:latin typeface="Arial"/>
-                <a:ea typeface="Arial"/>
-                <a:cs typeface="Arial"/>
-              </a:defRPr>
-            </a:lvl8pPr>
-            <a:lvl9pPr algn="ctr">
-              <a:defRPr sz="1725" b="0">
-                <a:solidFill>
-                  <a:srgbClr val="556570"/>
-                </a:solidFill>
-                <a:latin typeface="Arial"/>
-                <a:ea typeface="Arial"/>
-                <a:cs typeface="Arial"/>
-              </a:defRPr>
-            </a:lvl9pPr>
-          </a:lstStyle>
-          <a:p xmlns:a="http://schemas.openxmlformats.org/drawingml/2006/main">
-            <a:pPr algn="ctr">
-              <a:buNone/>
-              <a:defRPr sz="1725" b="0">
-                <a:solidFill>
-                  <a:srgbClr val="556570"/>
-                </a:solidFill>
-                <a:latin typeface="Arial"/>
-                <a:ea typeface="Arial"/>
-                <a:cs typeface="Arial"/>
-              </a:defRPr>
-            </a:pPr>
-            <a:r>
-              <a:rPr sz="1725" b="0">
-                <a:solidFill>
-                  <a:srgbClr val="556570"/>
-                </a:solidFill>
-                <a:latin typeface="Arial"/>
-                <a:ea typeface="Arial"/>
-                <a:cs typeface="Arial"/>
-              </a:rPr>
-              <a:t>Forwarding</a:t>
-            </a:r>
-          </a:p>
-        </p:txBody>
-      </p:sp>
-      <p:pic>
-        <p:nvPicPr>
-          <p:cNvPr id="8" name="">
-            <a:extLst xmlns:a="http://schemas.openxmlformats.org/drawingml/2006/main">
-              <a:ext uri="{FF2B5EF4-FFF2-40B4-BE49-F238E27FC236}">
-                <a16:creationId xmlns:a16="http://schemas.microsoft.com/office/drawing/2014/main" id="{9DC600BA-3F22-49EE-9A91-11E18F2E249A}"/>
-              </a:ext>
-            </a:extLst>
-          </p:cNvPr>
-          <p:cNvPicPr>
-            <a:picLocks xmlns:a="http://schemas.openxmlformats.org/drawingml/2006/main" noChangeAspect="1"/>
-          </p:cNvPicPr>
-          <p:nvPr/>
-        </p:nvPicPr>
-        <p:blipFill>
-          <a:blip xmlns:r="http://schemas.openxmlformats.org/officeDocument/2006/relationships" xmlns:a="http://schemas.openxmlformats.org/drawingml/2006/main" r:embed="Rdd614cfcb04346df"/>
-          <a:stretch xmlns:a="http://schemas.openxmlformats.org/drawingml/2006/main"/>
-        </p:blipFill>
-        <p:spPr>
-          <a:xfrm xmlns:a="http://schemas.openxmlformats.org/drawingml/2006/main">
-            <a:off x="6324600" y="2487811"/>
-            <a:ext cx="5143500" cy="1768078"/>
-          </a:xfrm>
-          <a:prstGeom xmlns:a="http://schemas.openxmlformats.org/drawingml/2006/main" prst="rect">
-            <a:avLst/>
-          </a:prstGeom>
-        </p:spPr>
-      </p:pic>
-      <p:sp>
-        <p:nvSpPr>
-          <p:cNvPr id="9" name="Direct">
-            <a:extLst xmlns:a="http://schemas.openxmlformats.org/drawingml/2006/main">
-              <a:ext uri="{FF2B5EF4-FFF2-40B4-BE49-F238E27FC236}">
-                <a16:creationId xmlns:a16="http://schemas.microsoft.com/office/drawing/2014/main" id="{4F200F03-6775-472D-9534-B2EE21092F7C}"/>
-              </a:ext>
-            </a:extLst>
-          </p:cNvPr>
-          <p:cNvSpPr>
-            <a:spLocks xmlns:a="http://schemas.openxmlformats.org/drawingml/2006/main" noGrp="1"/>
-          </p:cNvSpPr>
-          <p:nvPr/>
-        </p:nvSpPr>
-        <p:spPr>
-          <a:xfrm xmlns:a="http://schemas.openxmlformats.org/drawingml/2006/main">
-            <a:off x="6324600" y="2305050"/>
-            <a:ext cx="2457450" cy="285750"/>
-          </a:xfrm>
-          <a:prstGeom xmlns:a="http://schemas.openxmlformats.org/drawingml/2006/main" prst="rect">
-            <a:avLst/>
-          </a:prstGeom>
-          <a:noFill xmlns:a="http://schemas.openxmlformats.org/drawingml/2006/main"/>
-          <a:ln xmlns:a="http://schemas.openxmlformats.org/drawingml/2006/main" w="0">
-            <a:noFill/>
-          </a:ln>
-        </p:spPr>
-        <p:txBody>
-          <a:bodyPr xmlns:a="http://schemas.openxmlformats.org/drawingml/2006/main" wrap="square" lIns="0" tIns="0" rIns="0" bIns="0" anchor="t">
-            <a:noAutofit/>
-          </a:bodyPr>
-          <a:lstStyle xmlns:a="http://schemas.openxmlformats.org/drawingml/2006/main">
-            <a:defPPr algn="ctr">
-              <a:defRPr sz="1725" b="0">
-                <a:solidFill>
-                  <a:srgbClr val="556570"/>
-                </a:solidFill>
-                <a:latin typeface="Arial"/>
-                <a:ea typeface="Arial"/>
-                <a:cs typeface="Arial"/>
-              </a:defRPr>
-            </a:defPPr>
-            <a:lvl1pPr algn="ctr">
-              <a:defRPr sz="1725" b="0">
-                <a:solidFill>
-                  <a:srgbClr val="556570"/>
-                </a:solidFill>
-                <a:latin typeface="Arial"/>
-                <a:ea typeface="Arial"/>
-                <a:cs typeface="Arial"/>
-              </a:defRPr>
-            </a:lvl1pPr>
-            <a:lvl2pPr algn="ctr">
-              <a:defRPr sz="1725" b="0">
-                <a:solidFill>
-                  <a:srgbClr val="556570"/>
-                </a:solidFill>
-                <a:latin typeface="Arial"/>
-                <a:ea typeface="Arial"/>
-                <a:cs typeface="Arial"/>
-              </a:defRPr>
-            </a:lvl2pPr>
-            <a:lvl3pPr algn="ctr">
-              <a:defRPr sz="1725" b="0">
-                <a:solidFill>
-                  <a:srgbClr val="556570"/>
-                </a:solidFill>
-                <a:latin typeface="Arial"/>
-                <a:ea typeface="Arial"/>
-                <a:cs typeface="Arial"/>
-              </a:defRPr>
-            </a:lvl3pPr>
-            <a:lvl4pPr algn="ctr">
-              <a:defRPr sz="1725" b="0">
-                <a:solidFill>
-                  <a:srgbClr val="556570"/>
-                </a:solidFill>
-                <a:latin typeface="Arial"/>
-                <a:ea typeface="Arial"/>
-                <a:cs typeface="Arial"/>
-              </a:defRPr>
-            </a:lvl4pPr>
-            <a:lvl5pPr algn="ctr">
-              <a:defRPr sz="1725" b="0">
-                <a:solidFill>
-                  <a:srgbClr val="556570"/>
-                </a:solidFill>
-                <a:latin typeface="Arial"/>
-                <a:ea typeface="Arial"/>
-                <a:cs typeface="Arial"/>
-              </a:defRPr>
-            </a:lvl5pPr>
-            <a:lvl6pPr algn="ctr">
-              <a:defRPr sz="1725" b="0">
-                <a:solidFill>
-                  <a:srgbClr val="556570"/>
-                </a:solidFill>
-                <a:latin typeface="Arial"/>
-                <a:ea typeface="Arial"/>
-                <a:cs typeface="Arial"/>
-              </a:defRPr>
-            </a:lvl6pPr>
-            <a:lvl7pPr algn="ctr">
-              <a:defRPr sz="1725" b="0">
-                <a:solidFill>
-                  <a:srgbClr val="556570"/>
-                </a:solidFill>
-                <a:latin typeface="Arial"/>
-                <a:ea typeface="Arial"/>
-                <a:cs typeface="Arial"/>
-              </a:defRPr>
-            </a:lvl7pPr>
-            <a:lvl8pPr algn="ctr">
-              <a:defRPr sz="1725" b="0">
-                <a:solidFill>
-                  <a:srgbClr val="556570"/>
-                </a:solidFill>
-                <a:latin typeface="Arial"/>
-                <a:ea typeface="Arial"/>
-                <a:cs typeface="Arial"/>
-              </a:defRPr>
-            </a:lvl8pPr>
-            <a:lvl9pPr algn="ctr">
-              <a:defRPr sz="1725" b="0">
-                <a:solidFill>
-                  <a:srgbClr val="556570"/>
-                </a:solidFill>
-                <a:latin typeface="Arial"/>
-                <a:ea typeface="Arial"/>
-                <a:cs typeface="Arial"/>
-              </a:defRPr>
-            </a:lvl9pPr>
-          </a:lstStyle>
-          <a:p xmlns:a="http://schemas.openxmlformats.org/drawingml/2006/main">
-            <a:pPr algn="ctr">
-              <a:buNone/>
-              <a:defRPr sz="1725" b="0">
-                <a:solidFill>
-                  <a:srgbClr val="556570"/>
-                </a:solidFill>
-                <a:latin typeface="Arial"/>
-                <a:ea typeface="Arial"/>
-                <a:cs typeface="Arial"/>
-              </a:defRPr>
-            </a:pPr>
-            <a:r>
-              <a:rPr sz="1725" b="0">
-                <a:solidFill>
-                  <a:srgbClr val="556570"/>
-                </a:solidFill>
-                <a:latin typeface="Arial"/>
-                <a:ea typeface="Arial"/>
-                <a:cs typeface="Arial"/>
-              </a:rPr>
-              <a:t>Direct</a:t>
-            </a:r>
-          </a:p>
-        </p:txBody>
-      </p:sp>
-      <p:sp>
-        <p:nvSpPr>
-          <p:cNvPr id="10" name="Forwarding">
-            <a:extLst xmlns:a="http://schemas.openxmlformats.org/drawingml/2006/main">
-              <a:ext uri="{FF2B5EF4-FFF2-40B4-BE49-F238E27FC236}">
-                <a16:creationId xmlns:a16="http://schemas.microsoft.com/office/drawing/2014/main" id="{6DC02667-B4D7-4443-92D9-EC736F22E04B}"/>
-              </a:ext>
-            </a:extLst>
-          </p:cNvPr>
-          <p:cNvSpPr>
-            <a:spLocks xmlns:a="http://schemas.openxmlformats.org/drawingml/2006/main" noGrp="1"/>
-          </p:cNvSpPr>
-          <p:nvPr/>
-        </p:nvSpPr>
-        <p:spPr>
-          <a:xfrm xmlns:a="http://schemas.openxmlformats.org/drawingml/2006/main">
-            <a:off x="9010650" y="2305050"/>
-            <a:ext cx="2457450" cy="285750"/>
-          </a:xfrm>
-          <a:prstGeom xmlns:a="http://schemas.openxmlformats.org/drawingml/2006/main" prst="rect">
-            <a:avLst/>
-          </a:prstGeom>
-          <a:noFill xmlns:a="http://schemas.openxmlformats.org/drawingml/2006/main"/>
-          <a:ln xmlns:a="http://schemas.openxmlformats.org/drawingml/2006/main" w="0">
-            <a:noFill/>
-          </a:ln>
-        </p:spPr>
-        <p:txBody>
-          <a:bodyPr xmlns:a="http://schemas.openxmlformats.org/drawingml/2006/main" wrap="square" lIns="0" tIns="0" rIns="0" bIns="0" anchor="t">
-            <a:noAutofit/>
-          </a:bodyPr>
-          <a:lstStyle xmlns:a="http://schemas.openxmlformats.org/drawingml/2006/main">
-            <a:defPPr algn="ctr">
-              <a:defRPr sz="1725" b="0">
-                <a:solidFill>
-                  <a:srgbClr val="556570"/>
-                </a:solidFill>
-                <a:latin typeface="Arial"/>
-                <a:ea typeface="Arial"/>
-                <a:cs typeface="Arial"/>
-              </a:defRPr>
-            </a:defPPr>
-            <a:lvl1pPr algn="ctr">
-              <a:defRPr sz="1725" b="0">
-                <a:solidFill>
-                  <a:srgbClr val="556570"/>
-                </a:solidFill>
-                <a:latin typeface="Arial"/>
-                <a:ea typeface="Arial"/>
-                <a:cs typeface="Arial"/>
-              </a:defRPr>
-            </a:lvl1pPr>
-            <a:lvl2pPr algn="ctr">
-              <a:defRPr sz="1725" b="0">
-                <a:solidFill>
-                  <a:srgbClr val="556570"/>
-                </a:solidFill>
-                <a:latin typeface="Arial"/>
-                <a:ea typeface="Arial"/>
-                <a:cs typeface="Arial"/>
-              </a:defRPr>
-            </a:lvl2pPr>
-            <a:lvl3pPr algn="ctr">
-              <a:defRPr sz="1725" b="0">
-                <a:solidFill>
-                  <a:srgbClr val="556570"/>
-                </a:solidFill>
-                <a:latin typeface="Arial"/>
-                <a:ea typeface="Arial"/>
-                <a:cs typeface="Arial"/>
-              </a:defRPr>
-            </a:lvl3pPr>
-            <a:lvl4pPr algn="ctr">
-              <a:defRPr sz="1725" b="0">
-                <a:solidFill>
-                  <a:srgbClr val="556570"/>
-                </a:solidFill>
-                <a:latin typeface="Arial"/>
-                <a:ea typeface="Arial"/>
-                <a:cs typeface="Arial"/>
-              </a:defRPr>
-            </a:lvl4pPr>
-            <a:lvl5pPr algn="ctr">
-              <a:defRPr sz="1725" b="0">
-                <a:solidFill>
-                  <a:srgbClr val="556570"/>
-                </a:solidFill>
-                <a:latin typeface="Arial"/>
-                <a:ea typeface="Arial"/>
-                <a:cs typeface="Arial"/>
-              </a:defRPr>
-            </a:lvl5pPr>
-            <a:lvl6pPr algn="ctr">
-              <a:defRPr sz="1725" b="0">
-                <a:solidFill>
-                  <a:srgbClr val="556570"/>
-                </a:solidFill>
-                <a:latin typeface="Arial"/>
-                <a:ea typeface="Arial"/>
-                <a:cs typeface="Arial"/>
-              </a:defRPr>
-            </a:lvl6pPr>
-            <a:lvl7pPr algn="ctr">
-              <a:defRPr sz="1725" b="0">
-                <a:solidFill>
-                  <a:srgbClr val="556570"/>
-                </a:solidFill>
-                <a:latin typeface="Arial"/>
-                <a:ea typeface="Arial"/>
-                <a:cs typeface="Arial"/>
-              </a:defRPr>
-            </a:lvl7pPr>
-            <a:lvl8pPr algn="ctr">
-              <a:defRPr sz="1725" b="0">
-                <a:solidFill>
-                  <a:srgbClr val="556570"/>
-                </a:solidFill>
-                <a:latin typeface="Arial"/>
-                <a:ea typeface="Arial"/>
-                <a:cs typeface="Arial"/>
-              </a:defRPr>
-            </a:lvl8pPr>
-            <a:lvl9pPr algn="ctr">
-              <a:defRPr sz="1725" b="0">
-                <a:solidFill>
-                  <a:srgbClr val="556570"/>
-                </a:solidFill>
-                <a:latin typeface="Arial"/>
-                <a:ea typeface="Arial"/>
-                <a:cs typeface="Arial"/>
-              </a:defRPr>
-            </a:lvl9pPr>
-          </a:lstStyle>
-          <a:p xmlns:a="http://schemas.openxmlformats.org/drawingml/2006/main">
-            <a:pPr algn="ctr">
-              <a:buNone/>
-              <a:defRPr sz="1725" b="0">
-                <a:solidFill>
-                  <a:srgbClr val="556570"/>
-                </a:solidFill>
-                <a:latin typeface="Arial"/>
-                <a:ea typeface="Arial"/>
-                <a:cs typeface="Arial"/>
-              </a:defRPr>
-            </a:pPr>
-            <a:r>
-              <a:rPr sz="1725" b="0">
-                <a:solidFill>
-                  <a:srgbClr val="556570"/>
-                </a:solidFill>
-                <a:latin typeface="Arial"/>
-                <a:ea typeface="Arial"/>
-                <a:cs typeface="Arial"/>
-              </a:rPr>
-              <a:t>Forwarding</a:t>
-            </a:r>
-          </a:p>
-        </p:txBody>
-      </p:sp>
-      <p:sp>
-        <p:nvSpPr>
-          <p:cNvPr id="11" name="Leader C loses its direct majority.&#10;A can rel">
-            <a:extLst xmlns:a="http://schemas.openxmlformats.org/drawingml/2006/main">
-              <a:ext uri="{FF2B5EF4-FFF2-40B4-BE49-F238E27FC236}">
-                <a16:creationId xmlns:a16="http://schemas.microsoft.com/office/drawing/2014/main" id="{64169279-5E84-4396-8AC9-AEAE53D91E51}"/>
-              </a:ext>
-            </a:extLst>
-          </p:cNvPr>
-          <p:cNvSpPr>
-            <a:spLocks xmlns:a="http://schemas.openxmlformats.org/drawingml/2006/main" noGrp="1"/>
-          </p:cNvSpPr>
-          <p:nvPr/>
-        </p:nvSpPr>
-        <p:spPr>
-          <a:xfrm xmlns:a="http://schemas.openxmlformats.org/drawingml/2006/main">
-            <a:off x="685800" y="4638675"/>
-            <a:ext cx="5143500" cy="1009650"/>
+            <a:off x="685800" y="2400300"/>
+            <a:ext cx="1981200" cy="666750"/>
           </a:xfrm>
           <a:prstGeom xmlns:a="http://schemas.openxmlformats.org/drawingml/2006/main" prst="rect">
             <a:avLst/>
@@ -14371,7 +13557,7 @@
           </a:bodyPr>
           <a:lstStyle xmlns:a="http://schemas.openxmlformats.org/drawingml/2006/main">
             <a:defPPr algn="l">
-              <a:defRPr sz="2100" b="0">
+              <a:defRPr sz="2025" b="1">
                 <a:solidFill>
                   <a:srgbClr val="173247"/>
                 </a:solidFill>
@@ -14381,7 +13567,8 @@
               </a:defRPr>
             </a:defPPr>
             <a:lvl1pPr algn="l">
-              <a:defRPr sz="2100" b="0">
+              <a:buNone/>
+              <a:defRPr sz="2025" b="1">
                 <a:solidFill>
                   <a:srgbClr val="173247"/>
                 </a:solidFill>
@@ -14391,7 +13578,8 @@
               </a:defRPr>
             </a:lvl1pPr>
             <a:lvl2pPr algn="l">
-              <a:defRPr sz="2100" b="0">
+              <a:buNone/>
+              <a:defRPr sz="2025" b="1">
                 <a:solidFill>
                   <a:srgbClr val="173247"/>
                 </a:solidFill>
@@ -14401,7 +13589,8 @@
               </a:defRPr>
             </a:lvl2pPr>
             <a:lvl3pPr algn="l">
-              <a:defRPr sz="2100" b="0">
+              <a:buNone/>
+              <a:defRPr sz="2025" b="1">
                 <a:solidFill>
                   <a:srgbClr val="173247"/>
                 </a:solidFill>
@@ -14411,7 +13600,8 @@
               </a:defRPr>
             </a:lvl3pPr>
             <a:lvl4pPr algn="l">
-              <a:defRPr sz="2100" b="0">
+              <a:buNone/>
+              <a:defRPr sz="2025" b="1">
                 <a:solidFill>
                   <a:srgbClr val="173247"/>
                 </a:solidFill>
@@ -14421,7 +13611,8 @@
               </a:defRPr>
             </a:lvl4pPr>
             <a:lvl5pPr algn="l">
-              <a:defRPr sz="2100" b="0">
+              <a:buNone/>
+              <a:defRPr sz="2025" b="1">
                 <a:solidFill>
                   <a:srgbClr val="173247"/>
                 </a:solidFill>
@@ -14431,7 +13622,8 @@
               </a:defRPr>
             </a:lvl5pPr>
             <a:lvl6pPr algn="l">
-              <a:defRPr sz="2100" b="0">
+              <a:buNone/>
+              <a:defRPr sz="2025" b="1">
                 <a:solidFill>
                   <a:srgbClr val="173247"/>
                 </a:solidFill>
@@ -14441,7 +13633,8 @@
               </a:defRPr>
             </a:lvl6pPr>
             <a:lvl7pPr algn="l">
-              <a:defRPr sz="2100" b="0">
+              <a:buNone/>
+              <a:defRPr sz="2025" b="1">
                 <a:solidFill>
                   <a:srgbClr val="173247"/>
                 </a:solidFill>
@@ -14451,7 +13644,8 @@
               </a:defRPr>
             </a:lvl7pPr>
             <a:lvl8pPr algn="l">
-              <a:defRPr sz="2100" b="0">
+              <a:buNone/>
+              <a:defRPr sz="2025" b="1">
                 <a:solidFill>
                   <a:srgbClr val="173247"/>
                 </a:solidFill>
@@ -14461,7 +13655,8 @@
               </a:defRPr>
             </a:lvl8pPr>
             <a:lvl9pPr algn="l">
-              <a:defRPr sz="2100" b="0">
+              <a:buNone/>
+              <a:defRPr sz="2025" b="1">
                 <a:solidFill>
                   <a:srgbClr val="173247"/>
                 </a:solidFill>
@@ -14474,7 +13669,7 @@
           <a:p xmlns:a="http://schemas.openxmlformats.org/drawingml/2006/main">
             <a:pPr algn="l">
               <a:buNone/>
-              <a:defRPr sz="2100" b="0">
+              <a:defRPr sz="2025" b="1">
                 <a:solidFill>
                   <a:srgbClr val="173247"/>
                 </a:solidFill>
@@ -14484,7 +13679,7 @@
               </a:defRPr>
             </a:pPr>
             <a:r>
-              <a:rPr sz="2100" b="0">
+              <a:rPr sz="2025" b="1">
                 <a:solidFill>
                   <a:srgbClr val="173247"/>
                 </a:solidFill>
@@ -14492,13 +13687,13 @@
                 <a:ea typeface="Arial"/>
                 <a:cs typeface="Arial"/>
               </a:rPr>
-              <a:t>Leader C loses its direct majority.</a:t>
+              <a:t>Healthy</a:t>
             </a:r>
           </a:p>
           <a:p xmlns:a="http://schemas.openxmlformats.org/drawingml/2006/main">
             <a:pPr algn="l">
               <a:buNone/>
-              <a:defRPr sz="2100" b="0">
+              <a:defRPr sz="2025" b="1">
                 <a:solidFill>
                   <a:srgbClr val="173247"/>
                 </a:solidFill>
@@ -14508,7 +13703,7 @@
               </a:defRPr>
             </a:pPr>
             <a:r>
-              <a:rPr sz="2100" b="0">
+              <a:rPr sz="2025" b="1">
                 <a:solidFill>
                   <a:srgbClr val="173247"/>
                 </a:solidFill>
@@ -14516,17 +13711,46 @@
                 <a:ea typeface="Arial"/>
                 <a:cs typeface="Arial"/>
               </a:rPr>
-              <a:t>A can relay traffic to other nodes.</a:t>
+              <a:t>network</a:t>
             </a:r>
           </a:p>
         </p:txBody>
       </p:sp>
+      <p:pic>
+        <p:nvPicPr>
+          <p:cNvPr id="7" name="">
+            <a:extLst xmlns:a="http://schemas.openxmlformats.org/drawingml/2006/main">
+              <a:ext uri="{FF2B5EF4-FFF2-40B4-BE49-F238E27FC236}">
+                <a16:creationId xmlns:a16="http://schemas.microsoft.com/office/drawing/2014/main" id="{05CABED2-D16E-46F8-A41C-782F941C15BB}"/>
+              </a:ext>
+            </a:extLst>
+          </p:cNvPr>
+          <p:cNvPicPr>
+            <a:picLocks xmlns:a="http://schemas.openxmlformats.org/drawingml/2006/main" noChangeAspect="1"/>
+          </p:cNvPicPr>
+          <p:nvPr/>
+        </p:nvPicPr>
+        <p:blipFill>
+          <a:blip xmlns:r="http://schemas.openxmlformats.org/officeDocument/2006/relationships" xmlns:a="http://schemas.openxmlformats.org/drawingml/2006/main" r:embed="R1813755e895a438c"/>
+          <a:srcRect xmlns:a="http://schemas.openxmlformats.org/drawingml/2006/main" l="19808" t="21233" r="71346" b="63014"/>
+          <a:stretch xmlns:a="http://schemas.openxmlformats.org/drawingml/2006/main"/>
+        </p:blipFill>
+        <p:spPr>
+          <a:xfrm xmlns:a="http://schemas.openxmlformats.org/drawingml/2006/main">
+            <a:off x="771525" y="3162300"/>
+            <a:ext cx="1809750" cy="1809750"/>
+          </a:xfrm>
+          <a:prstGeom xmlns:a="http://schemas.openxmlformats.org/drawingml/2006/main" prst="rect">
+            <a:avLst/>
+          </a:prstGeom>
+        </p:spPr>
+      </p:pic>
       <p:sp>
         <p:nvSpPr>
-          <p:cNvPr id="12" name="C is isolated. A has an older log.&#10;Forwarding">
+          <p:cNvPr id="8" name="All direct links work">
             <a:extLst xmlns:a="http://schemas.openxmlformats.org/drawingml/2006/main">
               <a:ext uri="{FF2B5EF4-FFF2-40B4-BE49-F238E27FC236}">
-                <a16:creationId xmlns:a16="http://schemas.microsoft.com/office/drawing/2014/main" id="{BA89ADE2-E831-4615-B0AD-AE7F9769F1DD}"/>
+                <a16:creationId xmlns:a16="http://schemas.microsoft.com/office/drawing/2014/main" id="{1DCC91B6-01D7-45A5-AFFB-164A80BC1ECB}"/>
               </a:ext>
             </a:extLst>
           </p:cNvPr>
@@ -14537,191 +13761,8 @@
         </p:nvSpPr>
         <p:spPr>
           <a:xfrm xmlns:a="http://schemas.openxmlformats.org/drawingml/2006/main">
-            <a:off x="6324600" y="4638675"/>
-            <a:ext cx="5143500" cy="1009650"/>
-          </a:xfrm>
-          <a:prstGeom xmlns:a="http://schemas.openxmlformats.org/drawingml/2006/main" prst="rect">
-            <a:avLst/>
-          </a:prstGeom>
-          <a:noFill xmlns:a="http://schemas.openxmlformats.org/drawingml/2006/main"/>
-          <a:ln xmlns:a="http://schemas.openxmlformats.org/drawingml/2006/main" w="0">
-            <a:noFill/>
-          </a:ln>
-        </p:spPr>
-        <p:txBody>
-          <a:bodyPr xmlns:a="http://schemas.openxmlformats.org/drawingml/2006/main" wrap="square" lIns="0" tIns="0" rIns="0" bIns="0" anchor="t">
-            <a:noAutofit/>
-          </a:bodyPr>
-          <a:lstStyle xmlns:a="http://schemas.openxmlformats.org/drawingml/2006/main">
-            <a:defPPr algn="l">
-              <a:defRPr sz="2100" b="0">
-                <a:solidFill>
-                  <a:srgbClr val="173247"/>
-                </a:solidFill>
-                <a:latin typeface="Arial"/>
-                <a:ea typeface="Arial"/>
-                <a:cs typeface="Arial"/>
-              </a:defRPr>
-            </a:defPPr>
-            <a:lvl1pPr algn="l">
-              <a:defRPr sz="2100" b="0">
-                <a:solidFill>
-                  <a:srgbClr val="173247"/>
-                </a:solidFill>
-                <a:latin typeface="Arial"/>
-                <a:ea typeface="Arial"/>
-                <a:cs typeface="Arial"/>
-              </a:defRPr>
-            </a:lvl1pPr>
-            <a:lvl2pPr algn="l">
-              <a:defRPr sz="2100" b="0">
-                <a:solidFill>
-                  <a:srgbClr val="173247"/>
-                </a:solidFill>
-                <a:latin typeface="Arial"/>
-                <a:ea typeface="Arial"/>
-                <a:cs typeface="Arial"/>
-              </a:defRPr>
-            </a:lvl2pPr>
-            <a:lvl3pPr algn="l">
-              <a:defRPr sz="2100" b="0">
-                <a:solidFill>
-                  <a:srgbClr val="173247"/>
-                </a:solidFill>
-                <a:latin typeface="Arial"/>
-                <a:ea typeface="Arial"/>
-                <a:cs typeface="Arial"/>
-              </a:defRPr>
-            </a:lvl3pPr>
-            <a:lvl4pPr algn="l">
-              <a:defRPr sz="2100" b="0">
-                <a:solidFill>
-                  <a:srgbClr val="173247"/>
-                </a:solidFill>
-                <a:latin typeface="Arial"/>
-                <a:ea typeface="Arial"/>
-                <a:cs typeface="Arial"/>
-              </a:defRPr>
-            </a:lvl4pPr>
-            <a:lvl5pPr algn="l">
-              <a:defRPr sz="2100" b="0">
-                <a:solidFill>
-                  <a:srgbClr val="173247"/>
-                </a:solidFill>
-                <a:latin typeface="Arial"/>
-                <a:ea typeface="Arial"/>
-                <a:cs typeface="Arial"/>
-              </a:defRPr>
-            </a:lvl5pPr>
-            <a:lvl6pPr algn="l">
-              <a:defRPr sz="2100" b="0">
-                <a:solidFill>
-                  <a:srgbClr val="173247"/>
-                </a:solidFill>
-                <a:latin typeface="Arial"/>
-                <a:ea typeface="Arial"/>
-                <a:cs typeface="Arial"/>
-              </a:defRPr>
-            </a:lvl6pPr>
-            <a:lvl7pPr algn="l">
-              <a:defRPr sz="2100" b="0">
-                <a:solidFill>
-                  <a:srgbClr val="173247"/>
-                </a:solidFill>
-                <a:latin typeface="Arial"/>
-                <a:ea typeface="Arial"/>
-                <a:cs typeface="Arial"/>
-              </a:defRPr>
-            </a:lvl7pPr>
-            <a:lvl8pPr algn="l">
-              <a:defRPr sz="2100" b="0">
-                <a:solidFill>
-                  <a:srgbClr val="173247"/>
-                </a:solidFill>
-                <a:latin typeface="Arial"/>
-                <a:ea typeface="Arial"/>
-                <a:cs typeface="Arial"/>
-              </a:defRPr>
-            </a:lvl8pPr>
-            <a:lvl9pPr algn="l">
-              <a:defRPr sz="2100" b="0">
-                <a:solidFill>
-                  <a:srgbClr val="173247"/>
-                </a:solidFill>
-                <a:latin typeface="Arial"/>
-                <a:ea typeface="Arial"/>
-                <a:cs typeface="Arial"/>
-              </a:defRPr>
-            </a:lvl9pPr>
-          </a:lstStyle>
-          <a:p xmlns:a="http://schemas.openxmlformats.org/drawingml/2006/main">
-            <a:pPr algn="l">
-              <a:buNone/>
-              <a:defRPr sz="2100" b="0">
-                <a:solidFill>
-                  <a:srgbClr val="173247"/>
-                </a:solidFill>
-                <a:latin typeface="Arial"/>
-                <a:ea typeface="Arial"/>
-                <a:cs typeface="Arial"/>
-              </a:defRPr>
-            </a:pPr>
-            <a:r>
-              <a:rPr sz="2100" b="0">
-                <a:solidFill>
-                  <a:srgbClr val="173247"/>
-                </a:solidFill>
-                <a:latin typeface="Arial"/>
-                <a:ea typeface="Arial"/>
-                <a:cs typeface="Arial"/>
-              </a:rPr>
-              <a:t>C is isolated. A has an older log.</a:t>
-            </a:r>
-          </a:p>
-          <a:p xmlns:a="http://schemas.openxmlformats.org/drawingml/2006/main">
-            <a:pPr algn="l">
-              <a:buNone/>
-              <a:defRPr sz="2100" b="0">
-                <a:solidFill>
-                  <a:srgbClr val="173247"/>
-                </a:solidFill>
-                <a:latin typeface="Arial"/>
-                <a:ea typeface="Arial"/>
-                <a:cs typeface="Arial"/>
-              </a:defRPr>
-            </a:pPr>
-            <a:r>
-              <a:rPr sz="2100" b="0">
-                <a:solidFill>
-                  <a:srgbClr val="173247"/>
-                </a:solidFill>
-                <a:latin typeface="Arial"/>
-                <a:ea typeface="Arial"/>
-                <a:cs typeface="Arial"/>
-              </a:rPr>
-              <a:t>Forwarding lets B reach a majority.</a:t>
-            </a:r>
-          </a:p>
-        </p:txBody>
-      </p:sp>
-      <p:sp>
-        <p:nvSpPr>
-          <p:cNvPr id="13" name="Solid links survive. Dashed links fail. Blue ">
-            <a:extLst xmlns:a="http://schemas.openxmlformats.org/drawingml/2006/main">
-              <a:ext uri="{FF2B5EF4-FFF2-40B4-BE49-F238E27FC236}">
-                <a16:creationId xmlns:a16="http://schemas.microsoft.com/office/drawing/2014/main" id="{4F4CD276-504C-4C7C-805D-0A16A9337345}"/>
-              </a:ext>
-            </a:extLst>
-          </p:cNvPr>
-          <p:cNvSpPr>
-            <a:spLocks xmlns:a="http://schemas.openxmlformats.org/drawingml/2006/main" noGrp="1"/>
-          </p:cNvSpPr>
-          <p:nvPr/>
-        </p:nvSpPr>
-        <p:spPr>
-          <a:xfrm xmlns:a="http://schemas.openxmlformats.org/drawingml/2006/main">
-            <a:off x="685800" y="5467350"/>
-            <a:ext cx="10820400" cy="304800"/>
+            <a:off x="685800" y="5172075"/>
+            <a:ext cx="1981200" cy="647700"/>
           </a:xfrm>
           <a:prstGeom xmlns:a="http://schemas.openxmlformats.org/drawingml/2006/main" prst="rect">
             <a:avLst/>
@@ -14747,6 +13788,7 @@
               </a:defRPr>
             </a:defPPr>
             <a:lvl1pPr algn="l">
+              <a:buNone/>
               <a:defRPr sz="1725" b="0">
                 <a:solidFill>
                   <a:srgbClr val="556570"/>
@@ -14757,6 +13799,7 @@
               </a:defRPr>
             </a:lvl1pPr>
             <a:lvl2pPr algn="l">
+              <a:buNone/>
               <a:defRPr sz="1725" b="0">
                 <a:solidFill>
                   <a:srgbClr val="556570"/>
@@ -14767,6 +13810,7 @@
               </a:defRPr>
             </a:lvl2pPr>
             <a:lvl3pPr algn="l">
+              <a:buNone/>
               <a:defRPr sz="1725" b="0">
                 <a:solidFill>
                   <a:srgbClr val="556570"/>
@@ -14777,6 +13821,7 @@
               </a:defRPr>
             </a:lvl3pPr>
             <a:lvl4pPr algn="l">
+              <a:buNone/>
               <a:defRPr sz="1725" b="0">
                 <a:solidFill>
                   <a:srgbClr val="556570"/>
@@ -14787,6 +13832,7 @@
               </a:defRPr>
             </a:lvl4pPr>
             <a:lvl5pPr algn="l">
+              <a:buNone/>
               <a:defRPr sz="1725" b="0">
                 <a:solidFill>
                   <a:srgbClr val="556570"/>
@@ -14797,6 +13843,7 @@
               </a:defRPr>
             </a:lvl5pPr>
             <a:lvl6pPr algn="l">
+              <a:buNone/>
               <a:defRPr sz="1725" b="0">
                 <a:solidFill>
                   <a:srgbClr val="556570"/>
@@ -14807,6 +13854,7 @@
               </a:defRPr>
             </a:lvl6pPr>
             <a:lvl7pPr algn="l">
+              <a:buNone/>
               <a:defRPr sz="1725" b="0">
                 <a:solidFill>
                   <a:srgbClr val="556570"/>
@@ -14817,6 +13865,7 @@
               </a:defRPr>
             </a:lvl7pPr>
             <a:lvl8pPr algn="l">
+              <a:buNone/>
               <a:defRPr sz="1725" b="0">
                 <a:solidFill>
                   <a:srgbClr val="556570"/>
@@ -14827,6 +13876,7 @@
               </a:defRPr>
             </a:lvl8pPr>
             <a:lvl9pPr algn="l">
+              <a:buNone/>
               <a:defRPr sz="1725" b="0">
                 <a:solidFill>
                   <a:srgbClr val="556570"/>
@@ -14858,17 +13908,41 @@
                 <a:ea typeface="Arial"/>
                 <a:cs typeface="Arial"/>
               </a:rPr>
-              <a:t>Solid links survive. Dashed links fail. Blue paths forward traffic.</a:t>
+              <a:t>All direct</a:t>
+            </a:r>
+          </a:p>
+          <a:p xmlns:a="http://schemas.openxmlformats.org/drawingml/2006/main">
+            <a:pPr algn="l">
+              <a:buNone/>
+              <a:defRPr sz="1725" b="0">
+                <a:solidFill>
+                  <a:srgbClr val="556570"/>
+                </a:solidFill>
+                <a:latin typeface="Arial"/>
+                <a:ea typeface="Arial"/>
+                <a:cs typeface="Arial"/>
+              </a:defRPr>
+            </a:pPr>
+            <a:r>
+              <a:rPr sz="1725" b="0">
+                <a:solidFill>
+                  <a:srgbClr val="556570"/>
+                </a:solidFill>
+                <a:latin typeface="Arial"/>
+                <a:ea typeface="Arial"/>
+                <a:cs typeface="Arial"/>
+              </a:rPr>
+              <a:t>links work</a:t>
             </a:r>
           </a:p>
         </p:txBody>
       </p:sp>
       <p:sp>
         <p:nvSpPr>
-          <p:cNvPr id="14" name="Controls: T0 healthy, T1 non-critical cut, T4">
+          <p:cNvPr id="9" name="T1">
             <a:extLst xmlns:a="http://schemas.openxmlformats.org/drawingml/2006/main">
               <a:ext uri="{FF2B5EF4-FFF2-40B4-BE49-F238E27FC236}">
-                <a16:creationId xmlns:a16="http://schemas.microsoft.com/office/drawing/2014/main" id="{8AD19CA6-12B4-4A77-8795-768D542E03EF}"/>
+                <a16:creationId xmlns:a16="http://schemas.microsoft.com/office/drawing/2014/main" id="{A98827F3-E69D-4F12-B856-B96E3D89920B}"/>
               </a:ext>
             </a:extLst>
           </p:cNvPr>
@@ -14879,8 +13953,8 @@
         </p:nvSpPr>
         <p:spPr>
           <a:xfrm xmlns:a="http://schemas.openxmlformats.org/drawingml/2006/main">
-            <a:off x="685800" y="5857875"/>
-            <a:ext cx="10820400" cy="381000"/>
+            <a:off x="2895600" y="1971675"/>
+            <a:ext cx="1981200" cy="361950"/>
           </a:xfrm>
           <a:prstGeom xmlns:a="http://schemas.openxmlformats.org/drawingml/2006/main" prst="rect">
             <a:avLst/>
@@ -14896,9 +13970,9 @@
           </a:bodyPr>
           <a:lstStyle xmlns:a="http://schemas.openxmlformats.org/drawingml/2006/main">
             <a:defPPr algn="l">
-              <a:defRPr sz="1875" b="0">
-                <a:solidFill>
-                  <a:srgbClr val="556570"/>
+              <a:defRPr sz="2250" b="1">
+                <a:solidFill>
+                  <a:srgbClr val="007E87"/>
                 </a:solidFill>
                 <a:latin typeface="Arial"/>
                 <a:ea typeface="Arial"/>
@@ -14906,9 +13980,10 @@
               </a:defRPr>
             </a:defPPr>
             <a:lvl1pPr algn="l">
-              <a:defRPr sz="1875" b="0">
-                <a:solidFill>
-                  <a:srgbClr val="556570"/>
+              <a:buNone/>
+              <a:defRPr sz="2250" b="1">
+                <a:solidFill>
+                  <a:srgbClr val="007E87"/>
                 </a:solidFill>
                 <a:latin typeface="Arial"/>
                 <a:ea typeface="Arial"/>
@@ -14916,9 +13991,10 @@
               </a:defRPr>
             </a:lvl1pPr>
             <a:lvl2pPr algn="l">
-              <a:defRPr sz="1875" b="0">
-                <a:solidFill>
-                  <a:srgbClr val="556570"/>
+              <a:buNone/>
+              <a:defRPr sz="2250" b="1">
+                <a:solidFill>
+                  <a:srgbClr val="007E87"/>
                 </a:solidFill>
                 <a:latin typeface="Arial"/>
                 <a:ea typeface="Arial"/>
@@ -14926,9 +14002,10 @@
               </a:defRPr>
             </a:lvl2pPr>
             <a:lvl3pPr algn="l">
-              <a:defRPr sz="1875" b="0">
-                <a:solidFill>
-                  <a:srgbClr val="556570"/>
+              <a:buNone/>
+              <a:defRPr sz="2250" b="1">
+                <a:solidFill>
+                  <a:srgbClr val="007E87"/>
                 </a:solidFill>
                 <a:latin typeface="Arial"/>
                 <a:ea typeface="Arial"/>
@@ -14936,9 +14013,10 @@
               </a:defRPr>
             </a:lvl3pPr>
             <a:lvl4pPr algn="l">
-              <a:defRPr sz="1875" b="0">
-                <a:solidFill>
-                  <a:srgbClr val="556570"/>
+              <a:buNone/>
+              <a:defRPr sz="2250" b="1">
+                <a:solidFill>
+                  <a:srgbClr val="007E87"/>
                 </a:solidFill>
                 <a:latin typeface="Arial"/>
                 <a:ea typeface="Arial"/>
@@ -14946,9 +14024,10 @@
               </a:defRPr>
             </a:lvl4pPr>
             <a:lvl5pPr algn="l">
-              <a:defRPr sz="1875" b="0">
-                <a:solidFill>
-                  <a:srgbClr val="556570"/>
+              <a:buNone/>
+              <a:defRPr sz="2250" b="1">
+                <a:solidFill>
+                  <a:srgbClr val="007E87"/>
                 </a:solidFill>
                 <a:latin typeface="Arial"/>
                 <a:ea typeface="Arial"/>
@@ -14956,9 +14035,10 @@
               </a:defRPr>
             </a:lvl5pPr>
             <a:lvl6pPr algn="l">
-              <a:defRPr sz="1875" b="0">
-                <a:solidFill>
-                  <a:srgbClr val="556570"/>
+              <a:buNone/>
+              <a:defRPr sz="2250" b="1">
+                <a:solidFill>
+                  <a:srgbClr val="007E87"/>
                 </a:solidFill>
                 <a:latin typeface="Arial"/>
                 <a:ea typeface="Arial"/>
@@ -14966,9 +14046,10 @@
               </a:defRPr>
             </a:lvl6pPr>
             <a:lvl7pPr algn="l">
-              <a:defRPr sz="1875" b="0">
-                <a:solidFill>
-                  <a:srgbClr val="556570"/>
+              <a:buNone/>
+              <a:defRPr sz="2250" b="1">
+                <a:solidFill>
+                  <a:srgbClr val="007E87"/>
                 </a:solidFill>
                 <a:latin typeface="Arial"/>
                 <a:ea typeface="Arial"/>
@@ -14976,9 +14057,10 @@
               </a:defRPr>
             </a:lvl7pPr>
             <a:lvl8pPr algn="l">
-              <a:defRPr sz="1875" b="0">
-                <a:solidFill>
-                  <a:srgbClr val="556570"/>
+              <a:buNone/>
+              <a:defRPr sz="2250" b="1">
+                <a:solidFill>
+                  <a:srgbClr val="007E87"/>
                 </a:solidFill>
                 <a:latin typeface="Arial"/>
                 <a:ea typeface="Arial"/>
@@ -14986,9 +14068,10 @@
               </a:defRPr>
             </a:lvl8pPr>
             <a:lvl9pPr algn="l">
-              <a:defRPr sz="1875" b="0">
-                <a:solidFill>
-                  <a:srgbClr val="556570"/>
+              <a:buNone/>
+              <a:defRPr sz="2250" b="1">
+                <a:solidFill>
+                  <a:srgbClr val="007E87"/>
                 </a:solidFill>
                 <a:latin typeface="Arial"/>
                 <a:ea typeface="Arial"/>
@@ -14999,9 +14082,9 @@
           <a:p xmlns:a="http://schemas.openxmlformats.org/drawingml/2006/main">
             <a:pPr algn="l">
               <a:buNone/>
-              <a:defRPr sz="1875" b="0">
-                <a:solidFill>
-                  <a:srgbClr val="556570"/>
+              <a:defRPr sz="2250" b="1">
+                <a:solidFill>
+                  <a:srgbClr val="007E87"/>
                 </a:solidFill>
                 <a:latin typeface="Arial"/>
                 <a:ea typeface="Arial"/>
@@ -15009,15 +14092,2928 @@
               </a:defRPr>
             </a:pPr>
             <a:r>
-              <a:rPr sz="1875" b="0">
-                <a:solidFill>
-                  <a:srgbClr val="556570"/>
+              <a:rPr sz="2250" b="1">
+                <a:solidFill>
+                  <a:srgbClr val="007E87"/>
                 </a:solidFill>
                 <a:latin typeface="Arial"/>
                 <a:ea typeface="Arial"/>
                 <a:cs typeface="Arial"/>
               </a:rPr>
-              <a:t>T0: healthy control. T1 and T4: client reachability also matters.</a:t>
+              <a:t>T1</a:t>
+            </a:r>
+          </a:p>
+        </p:txBody>
+      </p:sp>
+      <p:sp>
+        <p:nvSpPr>
+          <p:cNvPr id="10" name="Non-critical cut">
+            <a:extLst xmlns:a="http://schemas.openxmlformats.org/drawingml/2006/main">
+              <a:ext uri="{FF2B5EF4-FFF2-40B4-BE49-F238E27FC236}">
+                <a16:creationId xmlns:a16="http://schemas.microsoft.com/office/drawing/2014/main" id="{7E630530-FF85-4885-8339-8B6F3FC99E20}"/>
+              </a:ext>
+            </a:extLst>
+          </p:cNvPr>
+          <p:cNvSpPr>
+            <a:spLocks xmlns:a="http://schemas.openxmlformats.org/drawingml/2006/main" noGrp="1"/>
+          </p:cNvSpPr>
+          <p:nvPr/>
+        </p:nvSpPr>
+        <p:spPr>
+          <a:xfrm xmlns:a="http://schemas.openxmlformats.org/drawingml/2006/main">
+            <a:off x="2895600" y="2400300"/>
+            <a:ext cx="1981200" cy="666750"/>
+          </a:xfrm>
+          <a:prstGeom xmlns:a="http://schemas.openxmlformats.org/drawingml/2006/main" prst="rect">
+            <a:avLst/>
+          </a:prstGeom>
+          <a:noFill xmlns:a="http://schemas.openxmlformats.org/drawingml/2006/main"/>
+          <a:ln xmlns:a="http://schemas.openxmlformats.org/drawingml/2006/main" w="0">
+            <a:noFill/>
+          </a:ln>
+        </p:spPr>
+        <p:txBody>
+          <a:bodyPr xmlns:a="http://schemas.openxmlformats.org/drawingml/2006/main" wrap="square" lIns="0" tIns="0" rIns="0" bIns="0" anchor="t">
+            <a:noAutofit/>
+          </a:bodyPr>
+          <a:lstStyle xmlns:a="http://schemas.openxmlformats.org/drawingml/2006/main">
+            <a:defPPr algn="l">
+              <a:defRPr sz="2025" b="1">
+                <a:solidFill>
+                  <a:srgbClr val="173247"/>
+                </a:solidFill>
+                <a:latin typeface="Arial"/>
+                <a:ea typeface="Arial"/>
+                <a:cs typeface="Arial"/>
+              </a:defRPr>
+            </a:defPPr>
+            <a:lvl1pPr algn="l">
+              <a:buNone/>
+              <a:defRPr sz="2025" b="1">
+                <a:solidFill>
+                  <a:srgbClr val="173247"/>
+                </a:solidFill>
+                <a:latin typeface="Arial"/>
+                <a:ea typeface="Arial"/>
+                <a:cs typeface="Arial"/>
+              </a:defRPr>
+            </a:lvl1pPr>
+            <a:lvl2pPr algn="l">
+              <a:buNone/>
+              <a:defRPr sz="2025" b="1">
+                <a:solidFill>
+                  <a:srgbClr val="173247"/>
+                </a:solidFill>
+                <a:latin typeface="Arial"/>
+                <a:ea typeface="Arial"/>
+                <a:cs typeface="Arial"/>
+              </a:defRPr>
+            </a:lvl2pPr>
+            <a:lvl3pPr algn="l">
+              <a:buNone/>
+              <a:defRPr sz="2025" b="1">
+                <a:solidFill>
+                  <a:srgbClr val="173247"/>
+                </a:solidFill>
+                <a:latin typeface="Arial"/>
+                <a:ea typeface="Arial"/>
+                <a:cs typeface="Arial"/>
+              </a:defRPr>
+            </a:lvl3pPr>
+            <a:lvl4pPr algn="l">
+              <a:buNone/>
+              <a:defRPr sz="2025" b="1">
+                <a:solidFill>
+                  <a:srgbClr val="173247"/>
+                </a:solidFill>
+                <a:latin typeface="Arial"/>
+                <a:ea typeface="Arial"/>
+                <a:cs typeface="Arial"/>
+              </a:defRPr>
+            </a:lvl4pPr>
+            <a:lvl5pPr algn="l">
+              <a:buNone/>
+              <a:defRPr sz="2025" b="1">
+                <a:solidFill>
+                  <a:srgbClr val="173247"/>
+                </a:solidFill>
+                <a:latin typeface="Arial"/>
+                <a:ea typeface="Arial"/>
+                <a:cs typeface="Arial"/>
+              </a:defRPr>
+            </a:lvl5pPr>
+            <a:lvl6pPr algn="l">
+              <a:buNone/>
+              <a:defRPr sz="2025" b="1">
+                <a:solidFill>
+                  <a:srgbClr val="173247"/>
+                </a:solidFill>
+                <a:latin typeface="Arial"/>
+                <a:ea typeface="Arial"/>
+                <a:cs typeface="Arial"/>
+              </a:defRPr>
+            </a:lvl6pPr>
+            <a:lvl7pPr algn="l">
+              <a:buNone/>
+              <a:defRPr sz="2025" b="1">
+                <a:solidFill>
+                  <a:srgbClr val="173247"/>
+                </a:solidFill>
+                <a:latin typeface="Arial"/>
+                <a:ea typeface="Arial"/>
+                <a:cs typeface="Arial"/>
+              </a:defRPr>
+            </a:lvl7pPr>
+            <a:lvl8pPr algn="l">
+              <a:buNone/>
+              <a:defRPr sz="2025" b="1">
+                <a:solidFill>
+                  <a:srgbClr val="173247"/>
+                </a:solidFill>
+                <a:latin typeface="Arial"/>
+                <a:ea typeface="Arial"/>
+                <a:cs typeface="Arial"/>
+              </a:defRPr>
+            </a:lvl8pPr>
+            <a:lvl9pPr algn="l">
+              <a:buNone/>
+              <a:defRPr sz="2025" b="1">
+                <a:solidFill>
+                  <a:srgbClr val="173247"/>
+                </a:solidFill>
+                <a:latin typeface="Arial"/>
+                <a:ea typeface="Arial"/>
+                <a:cs typeface="Arial"/>
+              </a:defRPr>
+            </a:lvl9pPr>
+          </a:lstStyle>
+          <a:p xmlns:a="http://schemas.openxmlformats.org/drawingml/2006/main">
+            <a:pPr algn="l">
+              <a:buNone/>
+              <a:defRPr sz="2025" b="1">
+                <a:solidFill>
+                  <a:srgbClr val="173247"/>
+                </a:solidFill>
+                <a:latin typeface="Arial"/>
+                <a:ea typeface="Arial"/>
+                <a:cs typeface="Arial"/>
+              </a:defRPr>
+            </a:pPr>
+            <a:r>
+              <a:rPr sz="2025" b="1">
+                <a:solidFill>
+                  <a:srgbClr val="173247"/>
+                </a:solidFill>
+                <a:latin typeface="Arial"/>
+                <a:ea typeface="Arial"/>
+                <a:cs typeface="Arial"/>
+              </a:rPr>
+              <a:t>Non-critical</a:t>
+            </a:r>
+          </a:p>
+          <a:p xmlns:a="http://schemas.openxmlformats.org/drawingml/2006/main">
+            <a:pPr algn="l">
+              <a:buNone/>
+              <a:defRPr sz="2025" b="1">
+                <a:solidFill>
+                  <a:srgbClr val="173247"/>
+                </a:solidFill>
+                <a:latin typeface="Arial"/>
+                <a:ea typeface="Arial"/>
+                <a:cs typeface="Arial"/>
+              </a:defRPr>
+            </a:pPr>
+            <a:r>
+              <a:rPr sz="2025" b="1">
+                <a:solidFill>
+                  <a:srgbClr val="173247"/>
+                </a:solidFill>
+                <a:latin typeface="Arial"/>
+                <a:ea typeface="Arial"/>
+                <a:cs typeface="Arial"/>
+              </a:rPr>
+              <a:t>cut</a:t>
+            </a:r>
+          </a:p>
+        </p:txBody>
+      </p:sp>
+      <p:pic>
+        <p:nvPicPr>
+          <p:cNvPr id="11" name="">
+            <a:extLst xmlns:a="http://schemas.openxmlformats.org/drawingml/2006/main">
+              <a:ext uri="{FF2B5EF4-FFF2-40B4-BE49-F238E27FC236}">
+                <a16:creationId xmlns:a16="http://schemas.microsoft.com/office/drawing/2014/main" id="{D26F0348-5998-43C5-A914-853E376E21B8}"/>
+              </a:ext>
+            </a:extLst>
+          </p:cNvPr>
+          <p:cNvPicPr>
+            <a:picLocks xmlns:a="http://schemas.openxmlformats.org/drawingml/2006/main" noChangeAspect="1"/>
+          </p:cNvPicPr>
+          <p:nvPr/>
+        </p:nvPicPr>
+        <p:blipFill>
+          <a:blip xmlns:r="http://schemas.openxmlformats.org/officeDocument/2006/relationships" xmlns:a="http://schemas.openxmlformats.org/drawingml/2006/main" r:embed="R1813755e895a438c"/>
+          <a:srcRect xmlns:a="http://schemas.openxmlformats.org/drawingml/2006/main" l="53462" t="21233" r="37692" b="63014"/>
+          <a:stretch xmlns:a="http://schemas.openxmlformats.org/drawingml/2006/main"/>
+        </p:blipFill>
+        <p:spPr>
+          <a:xfrm xmlns:a="http://schemas.openxmlformats.org/drawingml/2006/main">
+            <a:off x="2981325" y="3162300"/>
+            <a:ext cx="1809750" cy="1809750"/>
+          </a:xfrm>
+          <a:prstGeom xmlns:a="http://schemas.openxmlformats.org/drawingml/2006/main" prst="rect">
+            <a:avLst/>
+          </a:prstGeom>
+        </p:spPr>
+      </p:pic>
+      <p:sp>
+        <p:nvSpPr>
+          <p:cNvPr id="12" name="Direct majority remains">
+            <a:extLst xmlns:a="http://schemas.openxmlformats.org/drawingml/2006/main">
+              <a:ext uri="{FF2B5EF4-FFF2-40B4-BE49-F238E27FC236}">
+                <a16:creationId xmlns:a16="http://schemas.microsoft.com/office/drawing/2014/main" id="{17CE4F13-26FA-46EB-B27A-F6BE9ED80A30}"/>
+              </a:ext>
+            </a:extLst>
+          </p:cNvPr>
+          <p:cNvSpPr>
+            <a:spLocks xmlns:a="http://schemas.openxmlformats.org/drawingml/2006/main" noGrp="1"/>
+          </p:cNvSpPr>
+          <p:nvPr/>
+        </p:nvSpPr>
+        <p:spPr>
+          <a:xfrm xmlns:a="http://schemas.openxmlformats.org/drawingml/2006/main">
+            <a:off x="2895600" y="5172075"/>
+            <a:ext cx="1981200" cy="647700"/>
+          </a:xfrm>
+          <a:prstGeom xmlns:a="http://schemas.openxmlformats.org/drawingml/2006/main" prst="rect">
+            <a:avLst/>
+          </a:prstGeom>
+          <a:noFill xmlns:a="http://schemas.openxmlformats.org/drawingml/2006/main"/>
+          <a:ln xmlns:a="http://schemas.openxmlformats.org/drawingml/2006/main" w="0">
+            <a:noFill/>
+          </a:ln>
+        </p:spPr>
+        <p:txBody>
+          <a:bodyPr xmlns:a="http://schemas.openxmlformats.org/drawingml/2006/main" wrap="square" lIns="0" tIns="0" rIns="0" bIns="0" anchor="t">
+            <a:noAutofit/>
+          </a:bodyPr>
+          <a:lstStyle xmlns:a="http://schemas.openxmlformats.org/drawingml/2006/main">
+            <a:defPPr algn="l">
+              <a:defRPr sz="1725" b="0">
+                <a:solidFill>
+                  <a:srgbClr val="556570"/>
+                </a:solidFill>
+                <a:latin typeface="Arial"/>
+                <a:ea typeface="Arial"/>
+                <a:cs typeface="Arial"/>
+              </a:defRPr>
+            </a:defPPr>
+            <a:lvl1pPr algn="l">
+              <a:buNone/>
+              <a:defRPr sz="1725" b="0">
+                <a:solidFill>
+                  <a:srgbClr val="556570"/>
+                </a:solidFill>
+                <a:latin typeface="Arial"/>
+                <a:ea typeface="Arial"/>
+                <a:cs typeface="Arial"/>
+              </a:defRPr>
+            </a:lvl1pPr>
+            <a:lvl2pPr algn="l">
+              <a:buNone/>
+              <a:defRPr sz="1725" b="0">
+                <a:solidFill>
+                  <a:srgbClr val="556570"/>
+                </a:solidFill>
+                <a:latin typeface="Arial"/>
+                <a:ea typeface="Arial"/>
+                <a:cs typeface="Arial"/>
+              </a:defRPr>
+            </a:lvl2pPr>
+            <a:lvl3pPr algn="l">
+              <a:buNone/>
+              <a:defRPr sz="1725" b="0">
+                <a:solidFill>
+                  <a:srgbClr val="556570"/>
+                </a:solidFill>
+                <a:latin typeface="Arial"/>
+                <a:ea typeface="Arial"/>
+                <a:cs typeface="Arial"/>
+              </a:defRPr>
+            </a:lvl3pPr>
+            <a:lvl4pPr algn="l">
+              <a:buNone/>
+              <a:defRPr sz="1725" b="0">
+                <a:solidFill>
+                  <a:srgbClr val="556570"/>
+                </a:solidFill>
+                <a:latin typeface="Arial"/>
+                <a:ea typeface="Arial"/>
+                <a:cs typeface="Arial"/>
+              </a:defRPr>
+            </a:lvl4pPr>
+            <a:lvl5pPr algn="l">
+              <a:buNone/>
+              <a:defRPr sz="1725" b="0">
+                <a:solidFill>
+                  <a:srgbClr val="556570"/>
+                </a:solidFill>
+                <a:latin typeface="Arial"/>
+                <a:ea typeface="Arial"/>
+                <a:cs typeface="Arial"/>
+              </a:defRPr>
+            </a:lvl5pPr>
+            <a:lvl6pPr algn="l">
+              <a:buNone/>
+              <a:defRPr sz="1725" b="0">
+                <a:solidFill>
+                  <a:srgbClr val="556570"/>
+                </a:solidFill>
+                <a:latin typeface="Arial"/>
+                <a:ea typeface="Arial"/>
+                <a:cs typeface="Arial"/>
+              </a:defRPr>
+            </a:lvl6pPr>
+            <a:lvl7pPr algn="l">
+              <a:buNone/>
+              <a:defRPr sz="1725" b="0">
+                <a:solidFill>
+                  <a:srgbClr val="556570"/>
+                </a:solidFill>
+                <a:latin typeface="Arial"/>
+                <a:ea typeface="Arial"/>
+                <a:cs typeface="Arial"/>
+              </a:defRPr>
+            </a:lvl7pPr>
+            <a:lvl8pPr algn="l">
+              <a:buNone/>
+              <a:defRPr sz="1725" b="0">
+                <a:solidFill>
+                  <a:srgbClr val="556570"/>
+                </a:solidFill>
+                <a:latin typeface="Arial"/>
+                <a:ea typeface="Arial"/>
+                <a:cs typeface="Arial"/>
+              </a:defRPr>
+            </a:lvl8pPr>
+            <a:lvl9pPr algn="l">
+              <a:buNone/>
+              <a:defRPr sz="1725" b="0">
+                <a:solidFill>
+                  <a:srgbClr val="556570"/>
+                </a:solidFill>
+                <a:latin typeface="Arial"/>
+                <a:ea typeface="Arial"/>
+                <a:cs typeface="Arial"/>
+              </a:defRPr>
+            </a:lvl9pPr>
+          </a:lstStyle>
+          <a:p xmlns:a="http://schemas.openxmlformats.org/drawingml/2006/main">
+            <a:pPr algn="l">
+              <a:buNone/>
+              <a:defRPr sz="1725" b="0">
+                <a:solidFill>
+                  <a:srgbClr val="556570"/>
+                </a:solidFill>
+                <a:latin typeface="Arial"/>
+                <a:ea typeface="Arial"/>
+                <a:cs typeface="Arial"/>
+              </a:defRPr>
+            </a:pPr>
+            <a:r>
+              <a:rPr sz="1725" b="0">
+                <a:solidFill>
+                  <a:srgbClr val="556570"/>
+                </a:solidFill>
+                <a:latin typeface="Arial"/>
+                <a:ea typeface="Arial"/>
+                <a:cs typeface="Arial"/>
+              </a:rPr>
+              <a:t>Direct majority</a:t>
+            </a:r>
+          </a:p>
+          <a:p xmlns:a="http://schemas.openxmlformats.org/drawingml/2006/main">
+            <a:pPr algn="l">
+              <a:buNone/>
+              <a:defRPr sz="1725" b="0">
+                <a:solidFill>
+                  <a:srgbClr val="556570"/>
+                </a:solidFill>
+                <a:latin typeface="Arial"/>
+                <a:ea typeface="Arial"/>
+                <a:cs typeface="Arial"/>
+              </a:defRPr>
+            </a:pPr>
+            <a:r>
+              <a:rPr sz="1725" b="0">
+                <a:solidFill>
+                  <a:srgbClr val="556570"/>
+                </a:solidFill>
+                <a:latin typeface="Arial"/>
+                <a:ea typeface="Arial"/>
+                <a:cs typeface="Arial"/>
+              </a:rPr>
+              <a:t>remains</a:t>
+            </a:r>
+          </a:p>
+        </p:txBody>
+      </p:sp>
+      <p:sp>
+        <p:nvSpPr>
+          <p:cNvPr id="13" name="T2">
+            <a:extLst xmlns:a="http://schemas.openxmlformats.org/drawingml/2006/main">
+              <a:ext uri="{FF2B5EF4-FFF2-40B4-BE49-F238E27FC236}">
+                <a16:creationId xmlns:a16="http://schemas.microsoft.com/office/drawing/2014/main" id="{4FE4A562-9D2B-4D5E-A20C-E901ABC68730}"/>
+              </a:ext>
+            </a:extLst>
+          </p:cNvPr>
+          <p:cNvSpPr>
+            <a:spLocks xmlns:a="http://schemas.openxmlformats.org/drawingml/2006/main" noGrp="1"/>
+          </p:cNvSpPr>
+          <p:nvPr/>
+        </p:nvSpPr>
+        <p:spPr>
+          <a:xfrm xmlns:a="http://schemas.openxmlformats.org/drawingml/2006/main">
+            <a:off x="5105400" y="1971675"/>
+            <a:ext cx="1981200" cy="361950"/>
+          </a:xfrm>
+          <a:prstGeom xmlns:a="http://schemas.openxmlformats.org/drawingml/2006/main" prst="rect">
+            <a:avLst/>
+          </a:prstGeom>
+          <a:noFill xmlns:a="http://schemas.openxmlformats.org/drawingml/2006/main"/>
+          <a:ln xmlns:a="http://schemas.openxmlformats.org/drawingml/2006/main" w="0">
+            <a:noFill/>
+          </a:ln>
+        </p:spPr>
+        <p:txBody>
+          <a:bodyPr xmlns:a="http://schemas.openxmlformats.org/drawingml/2006/main" wrap="square" lIns="0" tIns="0" rIns="0" bIns="0" anchor="t">
+            <a:noAutofit/>
+          </a:bodyPr>
+          <a:lstStyle xmlns:a="http://schemas.openxmlformats.org/drawingml/2006/main">
+            <a:defPPr algn="l">
+              <a:defRPr sz="2250" b="1">
+                <a:solidFill>
+                  <a:srgbClr val="007E87"/>
+                </a:solidFill>
+                <a:latin typeface="Arial"/>
+                <a:ea typeface="Arial"/>
+                <a:cs typeface="Arial"/>
+              </a:defRPr>
+            </a:defPPr>
+            <a:lvl1pPr algn="l">
+              <a:buNone/>
+              <a:defRPr sz="2250" b="1">
+                <a:solidFill>
+                  <a:srgbClr val="007E87"/>
+                </a:solidFill>
+                <a:latin typeface="Arial"/>
+                <a:ea typeface="Arial"/>
+                <a:cs typeface="Arial"/>
+              </a:defRPr>
+            </a:lvl1pPr>
+            <a:lvl2pPr algn="l">
+              <a:buNone/>
+              <a:defRPr sz="2250" b="1">
+                <a:solidFill>
+                  <a:srgbClr val="007E87"/>
+                </a:solidFill>
+                <a:latin typeface="Arial"/>
+                <a:ea typeface="Arial"/>
+                <a:cs typeface="Arial"/>
+              </a:defRPr>
+            </a:lvl2pPr>
+            <a:lvl3pPr algn="l">
+              <a:buNone/>
+              <a:defRPr sz="2250" b="1">
+                <a:solidFill>
+                  <a:srgbClr val="007E87"/>
+                </a:solidFill>
+                <a:latin typeface="Arial"/>
+                <a:ea typeface="Arial"/>
+                <a:cs typeface="Arial"/>
+              </a:defRPr>
+            </a:lvl3pPr>
+            <a:lvl4pPr algn="l">
+              <a:buNone/>
+              <a:defRPr sz="2250" b="1">
+                <a:solidFill>
+                  <a:srgbClr val="007E87"/>
+                </a:solidFill>
+                <a:latin typeface="Arial"/>
+                <a:ea typeface="Arial"/>
+                <a:cs typeface="Arial"/>
+              </a:defRPr>
+            </a:lvl4pPr>
+            <a:lvl5pPr algn="l">
+              <a:buNone/>
+              <a:defRPr sz="2250" b="1">
+                <a:solidFill>
+                  <a:srgbClr val="007E87"/>
+                </a:solidFill>
+                <a:latin typeface="Arial"/>
+                <a:ea typeface="Arial"/>
+                <a:cs typeface="Arial"/>
+              </a:defRPr>
+            </a:lvl5pPr>
+            <a:lvl6pPr algn="l">
+              <a:buNone/>
+              <a:defRPr sz="2250" b="1">
+                <a:solidFill>
+                  <a:srgbClr val="007E87"/>
+                </a:solidFill>
+                <a:latin typeface="Arial"/>
+                <a:ea typeface="Arial"/>
+                <a:cs typeface="Arial"/>
+              </a:defRPr>
+            </a:lvl6pPr>
+            <a:lvl7pPr algn="l">
+              <a:buNone/>
+              <a:defRPr sz="2250" b="1">
+                <a:solidFill>
+                  <a:srgbClr val="007E87"/>
+                </a:solidFill>
+                <a:latin typeface="Arial"/>
+                <a:ea typeface="Arial"/>
+                <a:cs typeface="Arial"/>
+              </a:defRPr>
+            </a:lvl7pPr>
+            <a:lvl8pPr algn="l">
+              <a:buNone/>
+              <a:defRPr sz="2250" b="1">
+                <a:solidFill>
+                  <a:srgbClr val="007E87"/>
+                </a:solidFill>
+                <a:latin typeface="Arial"/>
+                <a:ea typeface="Arial"/>
+                <a:cs typeface="Arial"/>
+              </a:defRPr>
+            </a:lvl8pPr>
+            <a:lvl9pPr algn="l">
+              <a:buNone/>
+              <a:defRPr sz="2250" b="1">
+                <a:solidFill>
+                  <a:srgbClr val="007E87"/>
+                </a:solidFill>
+                <a:latin typeface="Arial"/>
+                <a:ea typeface="Arial"/>
+                <a:cs typeface="Arial"/>
+              </a:defRPr>
+            </a:lvl9pPr>
+          </a:lstStyle>
+          <a:p xmlns:a="http://schemas.openxmlformats.org/drawingml/2006/main">
+            <a:pPr algn="l">
+              <a:buNone/>
+              <a:defRPr sz="2250" b="1">
+                <a:solidFill>
+                  <a:srgbClr val="007E87"/>
+                </a:solidFill>
+                <a:latin typeface="Arial"/>
+                <a:ea typeface="Arial"/>
+                <a:cs typeface="Arial"/>
+              </a:defRPr>
+            </a:pPr>
+            <a:r>
+              <a:rPr sz="2250" b="1">
+                <a:solidFill>
+                  <a:srgbClr val="007E87"/>
+                </a:solidFill>
+                <a:latin typeface="Arial"/>
+                <a:ea typeface="Arial"/>
+                <a:cs typeface="Arial"/>
+              </a:rPr>
+              <a:t>T2</a:t>
+            </a:r>
+          </a:p>
+        </p:txBody>
+      </p:sp>
+      <p:sp>
+        <p:nvSpPr>
+          <p:cNvPr id="14" name="Quorum loss">
+            <a:extLst xmlns:a="http://schemas.openxmlformats.org/drawingml/2006/main">
+              <a:ext uri="{FF2B5EF4-FFF2-40B4-BE49-F238E27FC236}">
+                <a16:creationId xmlns:a16="http://schemas.microsoft.com/office/drawing/2014/main" id="{F666AC56-AF0D-43DE-A344-ABA7FD31C6B4}"/>
+              </a:ext>
+            </a:extLst>
+          </p:cNvPr>
+          <p:cNvSpPr>
+            <a:spLocks xmlns:a="http://schemas.openxmlformats.org/drawingml/2006/main" noGrp="1"/>
+          </p:cNvSpPr>
+          <p:nvPr/>
+        </p:nvSpPr>
+        <p:spPr>
+          <a:xfrm xmlns:a="http://schemas.openxmlformats.org/drawingml/2006/main">
+            <a:off x="5105400" y="2400300"/>
+            <a:ext cx="1981200" cy="666750"/>
+          </a:xfrm>
+          <a:prstGeom xmlns:a="http://schemas.openxmlformats.org/drawingml/2006/main" prst="rect">
+            <a:avLst/>
+          </a:prstGeom>
+          <a:noFill xmlns:a="http://schemas.openxmlformats.org/drawingml/2006/main"/>
+          <a:ln xmlns:a="http://schemas.openxmlformats.org/drawingml/2006/main" w="0">
+            <a:noFill/>
+          </a:ln>
+        </p:spPr>
+        <p:txBody>
+          <a:bodyPr xmlns:a="http://schemas.openxmlformats.org/drawingml/2006/main" wrap="square" lIns="0" tIns="0" rIns="0" bIns="0" anchor="t">
+            <a:noAutofit/>
+          </a:bodyPr>
+          <a:lstStyle xmlns:a="http://schemas.openxmlformats.org/drawingml/2006/main">
+            <a:defPPr algn="l">
+              <a:defRPr sz="2025" b="1">
+                <a:solidFill>
+                  <a:srgbClr val="173247"/>
+                </a:solidFill>
+                <a:latin typeface="Arial"/>
+                <a:ea typeface="Arial"/>
+                <a:cs typeface="Arial"/>
+              </a:defRPr>
+            </a:defPPr>
+            <a:lvl1pPr algn="l">
+              <a:buNone/>
+              <a:defRPr sz="2025" b="1">
+                <a:solidFill>
+                  <a:srgbClr val="173247"/>
+                </a:solidFill>
+                <a:latin typeface="Arial"/>
+                <a:ea typeface="Arial"/>
+                <a:cs typeface="Arial"/>
+              </a:defRPr>
+            </a:lvl1pPr>
+            <a:lvl2pPr algn="l">
+              <a:buNone/>
+              <a:defRPr sz="2025" b="1">
+                <a:solidFill>
+                  <a:srgbClr val="173247"/>
+                </a:solidFill>
+                <a:latin typeface="Arial"/>
+                <a:ea typeface="Arial"/>
+                <a:cs typeface="Arial"/>
+              </a:defRPr>
+            </a:lvl2pPr>
+            <a:lvl3pPr algn="l">
+              <a:buNone/>
+              <a:defRPr sz="2025" b="1">
+                <a:solidFill>
+                  <a:srgbClr val="173247"/>
+                </a:solidFill>
+                <a:latin typeface="Arial"/>
+                <a:ea typeface="Arial"/>
+                <a:cs typeface="Arial"/>
+              </a:defRPr>
+            </a:lvl3pPr>
+            <a:lvl4pPr algn="l">
+              <a:buNone/>
+              <a:defRPr sz="2025" b="1">
+                <a:solidFill>
+                  <a:srgbClr val="173247"/>
+                </a:solidFill>
+                <a:latin typeface="Arial"/>
+                <a:ea typeface="Arial"/>
+                <a:cs typeface="Arial"/>
+              </a:defRPr>
+            </a:lvl4pPr>
+            <a:lvl5pPr algn="l">
+              <a:buNone/>
+              <a:defRPr sz="2025" b="1">
+                <a:solidFill>
+                  <a:srgbClr val="173247"/>
+                </a:solidFill>
+                <a:latin typeface="Arial"/>
+                <a:ea typeface="Arial"/>
+                <a:cs typeface="Arial"/>
+              </a:defRPr>
+            </a:lvl5pPr>
+            <a:lvl6pPr algn="l">
+              <a:buNone/>
+              <a:defRPr sz="2025" b="1">
+                <a:solidFill>
+                  <a:srgbClr val="173247"/>
+                </a:solidFill>
+                <a:latin typeface="Arial"/>
+                <a:ea typeface="Arial"/>
+                <a:cs typeface="Arial"/>
+              </a:defRPr>
+            </a:lvl6pPr>
+            <a:lvl7pPr algn="l">
+              <a:buNone/>
+              <a:defRPr sz="2025" b="1">
+                <a:solidFill>
+                  <a:srgbClr val="173247"/>
+                </a:solidFill>
+                <a:latin typeface="Arial"/>
+                <a:ea typeface="Arial"/>
+                <a:cs typeface="Arial"/>
+              </a:defRPr>
+            </a:lvl7pPr>
+            <a:lvl8pPr algn="l">
+              <a:buNone/>
+              <a:defRPr sz="2025" b="1">
+                <a:solidFill>
+                  <a:srgbClr val="173247"/>
+                </a:solidFill>
+                <a:latin typeface="Arial"/>
+                <a:ea typeface="Arial"/>
+                <a:cs typeface="Arial"/>
+              </a:defRPr>
+            </a:lvl8pPr>
+            <a:lvl9pPr algn="l">
+              <a:buNone/>
+              <a:defRPr sz="2025" b="1">
+                <a:solidFill>
+                  <a:srgbClr val="173247"/>
+                </a:solidFill>
+                <a:latin typeface="Arial"/>
+                <a:ea typeface="Arial"/>
+                <a:cs typeface="Arial"/>
+              </a:defRPr>
+            </a:lvl9pPr>
+          </a:lstStyle>
+          <a:p xmlns:a="http://schemas.openxmlformats.org/drawingml/2006/main">
+            <a:pPr algn="l">
+              <a:buNone/>
+              <a:defRPr sz="2025" b="1">
+                <a:solidFill>
+                  <a:srgbClr val="173247"/>
+                </a:solidFill>
+                <a:latin typeface="Arial"/>
+                <a:ea typeface="Arial"/>
+                <a:cs typeface="Arial"/>
+              </a:defRPr>
+            </a:pPr>
+            <a:r>
+              <a:rPr sz="2025" b="1">
+                <a:solidFill>
+                  <a:srgbClr val="173247"/>
+                </a:solidFill>
+                <a:latin typeface="Arial"/>
+                <a:ea typeface="Arial"/>
+                <a:cs typeface="Arial"/>
+              </a:rPr>
+              <a:t>Quorum</a:t>
+            </a:r>
+          </a:p>
+          <a:p xmlns:a="http://schemas.openxmlformats.org/drawingml/2006/main">
+            <a:pPr algn="l">
+              <a:buNone/>
+              <a:defRPr sz="2025" b="1">
+                <a:solidFill>
+                  <a:srgbClr val="173247"/>
+                </a:solidFill>
+                <a:latin typeface="Arial"/>
+                <a:ea typeface="Arial"/>
+                <a:cs typeface="Arial"/>
+              </a:defRPr>
+            </a:pPr>
+            <a:r>
+              <a:rPr sz="2025" b="1">
+                <a:solidFill>
+                  <a:srgbClr val="173247"/>
+                </a:solidFill>
+                <a:latin typeface="Arial"/>
+                <a:ea typeface="Arial"/>
+                <a:cs typeface="Arial"/>
+              </a:rPr>
+              <a:t>loss</a:t>
+            </a:r>
+          </a:p>
+        </p:txBody>
+      </p:sp>
+      <p:pic>
+        <p:nvPicPr>
+          <p:cNvPr id="15" name="">
+            <a:extLst xmlns:a="http://schemas.openxmlformats.org/drawingml/2006/main">
+              <a:ext uri="{FF2B5EF4-FFF2-40B4-BE49-F238E27FC236}">
+                <a16:creationId xmlns:a16="http://schemas.microsoft.com/office/drawing/2014/main" id="{9C8E2D19-403D-4CB4-B191-4A28B4FA7922}"/>
+              </a:ext>
+            </a:extLst>
+          </p:cNvPr>
+          <p:cNvPicPr>
+            <a:picLocks xmlns:a="http://schemas.openxmlformats.org/drawingml/2006/main" noChangeAspect="1"/>
+          </p:cNvPicPr>
+          <p:nvPr/>
+        </p:nvPicPr>
+        <p:blipFill>
+          <a:blip xmlns:r="http://schemas.openxmlformats.org/officeDocument/2006/relationships" xmlns:a="http://schemas.openxmlformats.org/drawingml/2006/main" r:embed="R1813755e895a438c"/>
+          <a:srcRect xmlns:a="http://schemas.openxmlformats.org/drawingml/2006/main" l="86538" t="21233" r="4615" b="63014"/>
+          <a:stretch xmlns:a="http://schemas.openxmlformats.org/drawingml/2006/main"/>
+        </p:blipFill>
+        <p:spPr>
+          <a:xfrm xmlns:a="http://schemas.openxmlformats.org/drawingml/2006/main">
+            <a:off x="5191125" y="3162300"/>
+            <a:ext cx="1809750" cy="1809750"/>
+          </a:xfrm>
+          <a:prstGeom xmlns:a="http://schemas.openxmlformats.org/drawingml/2006/main" prst="rect">
+            <a:avLst/>
+          </a:prstGeom>
+        </p:spPr>
+      </p:pic>
+      <p:sp>
+        <p:nvSpPr>
+          <p:cNvPr id="16" name="Direct majority is lost">
+            <a:extLst xmlns:a="http://schemas.openxmlformats.org/drawingml/2006/main">
+              <a:ext uri="{FF2B5EF4-FFF2-40B4-BE49-F238E27FC236}">
+                <a16:creationId xmlns:a16="http://schemas.microsoft.com/office/drawing/2014/main" id="{6CE299F7-44F6-4329-B475-A36073E623DF}"/>
+              </a:ext>
+            </a:extLst>
+          </p:cNvPr>
+          <p:cNvSpPr>
+            <a:spLocks xmlns:a="http://schemas.openxmlformats.org/drawingml/2006/main" noGrp="1"/>
+          </p:cNvSpPr>
+          <p:nvPr/>
+        </p:nvSpPr>
+        <p:spPr>
+          <a:xfrm xmlns:a="http://schemas.openxmlformats.org/drawingml/2006/main">
+            <a:off x="5105400" y="5172075"/>
+            <a:ext cx="1981200" cy="647700"/>
+          </a:xfrm>
+          <a:prstGeom xmlns:a="http://schemas.openxmlformats.org/drawingml/2006/main" prst="rect">
+            <a:avLst/>
+          </a:prstGeom>
+          <a:noFill xmlns:a="http://schemas.openxmlformats.org/drawingml/2006/main"/>
+          <a:ln xmlns:a="http://schemas.openxmlformats.org/drawingml/2006/main" w="0">
+            <a:noFill/>
+          </a:ln>
+        </p:spPr>
+        <p:txBody>
+          <a:bodyPr xmlns:a="http://schemas.openxmlformats.org/drawingml/2006/main" wrap="square" lIns="0" tIns="0" rIns="0" bIns="0" anchor="t">
+            <a:noAutofit/>
+          </a:bodyPr>
+          <a:lstStyle xmlns:a="http://schemas.openxmlformats.org/drawingml/2006/main">
+            <a:defPPr algn="l">
+              <a:defRPr sz="1725" b="0">
+                <a:solidFill>
+                  <a:srgbClr val="556570"/>
+                </a:solidFill>
+                <a:latin typeface="Arial"/>
+                <a:ea typeface="Arial"/>
+                <a:cs typeface="Arial"/>
+              </a:defRPr>
+            </a:defPPr>
+            <a:lvl1pPr algn="l">
+              <a:buNone/>
+              <a:defRPr sz="1725" b="0">
+                <a:solidFill>
+                  <a:srgbClr val="556570"/>
+                </a:solidFill>
+                <a:latin typeface="Arial"/>
+                <a:ea typeface="Arial"/>
+                <a:cs typeface="Arial"/>
+              </a:defRPr>
+            </a:lvl1pPr>
+            <a:lvl2pPr algn="l">
+              <a:buNone/>
+              <a:defRPr sz="1725" b="0">
+                <a:solidFill>
+                  <a:srgbClr val="556570"/>
+                </a:solidFill>
+                <a:latin typeface="Arial"/>
+                <a:ea typeface="Arial"/>
+                <a:cs typeface="Arial"/>
+              </a:defRPr>
+            </a:lvl2pPr>
+            <a:lvl3pPr algn="l">
+              <a:buNone/>
+              <a:defRPr sz="1725" b="0">
+                <a:solidFill>
+                  <a:srgbClr val="556570"/>
+                </a:solidFill>
+                <a:latin typeface="Arial"/>
+                <a:ea typeface="Arial"/>
+                <a:cs typeface="Arial"/>
+              </a:defRPr>
+            </a:lvl3pPr>
+            <a:lvl4pPr algn="l">
+              <a:buNone/>
+              <a:defRPr sz="1725" b="0">
+                <a:solidFill>
+                  <a:srgbClr val="556570"/>
+                </a:solidFill>
+                <a:latin typeface="Arial"/>
+                <a:ea typeface="Arial"/>
+                <a:cs typeface="Arial"/>
+              </a:defRPr>
+            </a:lvl4pPr>
+            <a:lvl5pPr algn="l">
+              <a:buNone/>
+              <a:defRPr sz="1725" b="0">
+                <a:solidFill>
+                  <a:srgbClr val="556570"/>
+                </a:solidFill>
+                <a:latin typeface="Arial"/>
+                <a:ea typeface="Arial"/>
+                <a:cs typeface="Arial"/>
+              </a:defRPr>
+            </a:lvl5pPr>
+            <a:lvl6pPr algn="l">
+              <a:buNone/>
+              <a:defRPr sz="1725" b="0">
+                <a:solidFill>
+                  <a:srgbClr val="556570"/>
+                </a:solidFill>
+                <a:latin typeface="Arial"/>
+                <a:ea typeface="Arial"/>
+                <a:cs typeface="Arial"/>
+              </a:defRPr>
+            </a:lvl6pPr>
+            <a:lvl7pPr algn="l">
+              <a:buNone/>
+              <a:defRPr sz="1725" b="0">
+                <a:solidFill>
+                  <a:srgbClr val="556570"/>
+                </a:solidFill>
+                <a:latin typeface="Arial"/>
+                <a:ea typeface="Arial"/>
+                <a:cs typeface="Arial"/>
+              </a:defRPr>
+            </a:lvl7pPr>
+            <a:lvl8pPr algn="l">
+              <a:buNone/>
+              <a:defRPr sz="1725" b="0">
+                <a:solidFill>
+                  <a:srgbClr val="556570"/>
+                </a:solidFill>
+                <a:latin typeface="Arial"/>
+                <a:ea typeface="Arial"/>
+                <a:cs typeface="Arial"/>
+              </a:defRPr>
+            </a:lvl8pPr>
+            <a:lvl9pPr algn="l">
+              <a:buNone/>
+              <a:defRPr sz="1725" b="0">
+                <a:solidFill>
+                  <a:srgbClr val="556570"/>
+                </a:solidFill>
+                <a:latin typeface="Arial"/>
+                <a:ea typeface="Arial"/>
+                <a:cs typeface="Arial"/>
+              </a:defRPr>
+            </a:lvl9pPr>
+          </a:lstStyle>
+          <a:p xmlns:a="http://schemas.openxmlformats.org/drawingml/2006/main">
+            <a:pPr algn="l">
+              <a:buNone/>
+              <a:defRPr sz="1725" b="0">
+                <a:solidFill>
+                  <a:srgbClr val="556570"/>
+                </a:solidFill>
+                <a:latin typeface="Arial"/>
+                <a:ea typeface="Arial"/>
+                <a:cs typeface="Arial"/>
+              </a:defRPr>
+            </a:pPr>
+            <a:r>
+              <a:rPr sz="1725" b="0">
+                <a:solidFill>
+                  <a:srgbClr val="556570"/>
+                </a:solidFill>
+                <a:latin typeface="Arial"/>
+                <a:ea typeface="Arial"/>
+                <a:cs typeface="Arial"/>
+              </a:rPr>
+              <a:t>Direct majority</a:t>
+            </a:r>
+          </a:p>
+          <a:p xmlns:a="http://schemas.openxmlformats.org/drawingml/2006/main">
+            <a:pPr algn="l">
+              <a:buNone/>
+              <a:defRPr sz="1725" b="0">
+                <a:solidFill>
+                  <a:srgbClr val="556570"/>
+                </a:solidFill>
+                <a:latin typeface="Arial"/>
+                <a:ea typeface="Arial"/>
+                <a:cs typeface="Arial"/>
+              </a:defRPr>
+            </a:pPr>
+            <a:r>
+              <a:rPr sz="1725" b="0">
+                <a:solidFill>
+                  <a:srgbClr val="556570"/>
+                </a:solidFill>
+                <a:latin typeface="Arial"/>
+                <a:ea typeface="Arial"/>
+                <a:cs typeface="Arial"/>
+              </a:rPr>
+              <a:t>is lost</a:t>
+            </a:r>
+          </a:p>
+        </p:txBody>
+      </p:sp>
+      <p:sp>
+        <p:nvSpPr>
+          <p:cNvPr id="17" name="T3">
+            <a:extLst xmlns:a="http://schemas.openxmlformats.org/drawingml/2006/main">
+              <a:ext uri="{FF2B5EF4-FFF2-40B4-BE49-F238E27FC236}">
+                <a16:creationId xmlns:a16="http://schemas.microsoft.com/office/drawing/2014/main" id="{FAA1D802-6AFA-4C2A-9385-0C490C23BFD3}"/>
+              </a:ext>
+            </a:extLst>
+          </p:cNvPr>
+          <p:cNvSpPr>
+            <a:spLocks xmlns:a="http://schemas.openxmlformats.org/drawingml/2006/main" noGrp="1"/>
+          </p:cNvSpPr>
+          <p:nvPr/>
+        </p:nvSpPr>
+        <p:spPr>
+          <a:xfrm xmlns:a="http://schemas.openxmlformats.org/drawingml/2006/main">
+            <a:off x="7315200" y="1971675"/>
+            <a:ext cx="1981200" cy="361950"/>
+          </a:xfrm>
+          <a:prstGeom xmlns:a="http://schemas.openxmlformats.org/drawingml/2006/main" prst="rect">
+            <a:avLst/>
+          </a:prstGeom>
+          <a:noFill xmlns:a="http://schemas.openxmlformats.org/drawingml/2006/main"/>
+          <a:ln xmlns:a="http://schemas.openxmlformats.org/drawingml/2006/main" w="0">
+            <a:noFill/>
+          </a:ln>
+        </p:spPr>
+        <p:txBody>
+          <a:bodyPr xmlns:a="http://schemas.openxmlformats.org/drawingml/2006/main" wrap="square" lIns="0" tIns="0" rIns="0" bIns="0" anchor="t">
+            <a:noAutofit/>
+          </a:bodyPr>
+          <a:lstStyle xmlns:a="http://schemas.openxmlformats.org/drawingml/2006/main">
+            <a:defPPr algn="l">
+              <a:defRPr sz="2250" b="1">
+                <a:solidFill>
+                  <a:srgbClr val="007E87"/>
+                </a:solidFill>
+                <a:latin typeface="Arial"/>
+                <a:ea typeface="Arial"/>
+                <a:cs typeface="Arial"/>
+              </a:defRPr>
+            </a:defPPr>
+            <a:lvl1pPr algn="l">
+              <a:buNone/>
+              <a:defRPr sz="2250" b="1">
+                <a:solidFill>
+                  <a:srgbClr val="007E87"/>
+                </a:solidFill>
+                <a:latin typeface="Arial"/>
+                <a:ea typeface="Arial"/>
+                <a:cs typeface="Arial"/>
+              </a:defRPr>
+            </a:lvl1pPr>
+            <a:lvl2pPr algn="l">
+              <a:buNone/>
+              <a:defRPr sz="2250" b="1">
+                <a:solidFill>
+                  <a:srgbClr val="007E87"/>
+                </a:solidFill>
+                <a:latin typeface="Arial"/>
+                <a:ea typeface="Arial"/>
+                <a:cs typeface="Arial"/>
+              </a:defRPr>
+            </a:lvl2pPr>
+            <a:lvl3pPr algn="l">
+              <a:buNone/>
+              <a:defRPr sz="2250" b="1">
+                <a:solidFill>
+                  <a:srgbClr val="007E87"/>
+                </a:solidFill>
+                <a:latin typeface="Arial"/>
+                <a:ea typeface="Arial"/>
+                <a:cs typeface="Arial"/>
+              </a:defRPr>
+            </a:lvl3pPr>
+            <a:lvl4pPr algn="l">
+              <a:buNone/>
+              <a:defRPr sz="2250" b="1">
+                <a:solidFill>
+                  <a:srgbClr val="007E87"/>
+                </a:solidFill>
+                <a:latin typeface="Arial"/>
+                <a:ea typeface="Arial"/>
+                <a:cs typeface="Arial"/>
+              </a:defRPr>
+            </a:lvl4pPr>
+            <a:lvl5pPr algn="l">
+              <a:buNone/>
+              <a:defRPr sz="2250" b="1">
+                <a:solidFill>
+                  <a:srgbClr val="007E87"/>
+                </a:solidFill>
+                <a:latin typeface="Arial"/>
+                <a:ea typeface="Arial"/>
+                <a:cs typeface="Arial"/>
+              </a:defRPr>
+            </a:lvl5pPr>
+            <a:lvl6pPr algn="l">
+              <a:buNone/>
+              <a:defRPr sz="2250" b="1">
+                <a:solidFill>
+                  <a:srgbClr val="007E87"/>
+                </a:solidFill>
+                <a:latin typeface="Arial"/>
+                <a:ea typeface="Arial"/>
+                <a:cs typeface="Arial"/>
+              </a:defRPr>
+            </a:lvl6pPr>
+            <a:lvl7pPr algn="l">
+              <a:buNone/>
+              <a:defRPr sz="2250" b="1">
+                <a:solidFill>
+                  <a:srgbClr val="007E87"/>
+                </a:solidFill>
+                <a:latin typeface="Arial"/>
+                <a:ea typeface="Arial"/>
+                <a:cs typeface="Arial"/>
+              </a:defRPr>
+            </a:lvl7pPr>
+            <a:lvl8pPr algn="l">
+              <a:buNone/>
+              <a:defRPr sz="2250" b="1">
+                <a:solidFill>
+                  <a:srgbClr val="007E87"/>
+                </a:solidFill>
+                <a:latin typeface="Arial"/>
+                <a:ea typeface="Arial"/>
+                <a:cs typeface="Arial"/>
+              </a:defRPr>
+            </a:lvl8pPr>
+            <a:lvl9pPr algn="l">
+              <a:buNone/>
+              <a:defRPr sz="2250" b="1">
+                <a:solidFill>
+                  <a:srgbClr val="007E87"/>
+                </a:solidFill>
+                <a:latin typeface="Arial"/>
+                <a:ea typeface="Arial"/>
+                <a:cs typeface="Arial"/>
+              </a:defRPr>
+            </a:lvl9pPr>
+          </a:lstStyle>
+          <a:p xmlns:a="http://schemas.openxmlformats.org/drawingml/2006/main">
+            <a:pPr algn="l">
+              <a:buNone/>
+              <a:defRPr sz="2250" b="1">
+                <a:solidFill>
+                  <a:srgbClr val="007E87"/>
+                </a:solidFill>
+                <a:latin typeface="Arial"/>
+                <a:ea typeface="Arial"/>
+                <a:cs typeface="Arial"/>
+              </a:defRPr>
+            </a:pPr>
+            <a:r>
+              <a:rPr sz="2250" b="1">
+                <a:solidFill>
+                  <a:srgbClr val="007E87"/>
+                </a:solidFill>
+                <a:latin typeface="Arial"/>
+                <a:ea typeface="Arial"/>
+                <a:cs typeface="Arial"/>
+              </a:rPr>
+              <a:t>T3</a:t>
+            </a:r>
+          </a:p>
+        </p:txBody>
+      </p:sp>
+      <p:sp>
+        <p:nvSpPr>
+          <p:cNvPr id="18" name="Constrained election">
+            <a:extLst xmlns:a="http://schemas.openxmlformats.org/drawingml/2006/main">
+              <a:ext uri="{FF2B5EF4-FFF2-40B4-BE49-F238E27FC236}">
+                <a16:creationId xmlns:a16="http://schemas.microsoft.com/office/drawing/2014/main" id="{45AFF04C-6A83-4C46-B1C9-1C682740D908}"/>
+              </a:ext>
+            </a:extLst>
+          </p:cNvPr>
+          <p:cNvSpPr>
+            <a:spLocks xmlns:a="http://schemas.openxmlformats.org/drawingml/2006/main" noGrp="1"/>
+          </p:cNvSpPr>
+          <p:nvPr/>
+        </p:nvSpPr>
+        <p:spPr>
+          <a:xfrm xmlns:a="http://schemas.openxmlformats.org/drawingml/2006/main">
+            <a:off x="7315200" y="2400300"/>
+            <a:ext cx="1981200" cy="666750"/>
+          </a:xfrm>
+          <a:prstGeom xmlns:a="http://schemas.openxmlformats.org/drawingml/2006/main" prst="rect">
+            <a:avLst/>
+          </a:prstGeom>
+          <a:noFill xmlns:a="http://schemas.openxmlformats.org/drawingml/2006/main"/>
+          <a:ln xmlns:a="http://schemas.openxmlformats.org/drawingml/2006/main" w="0">
+            <a:noFill/>
+          </a:ln>
+        </p:spPr>
+        <p:txBody>
+          <a:bodyPr xmlns:a="http://schemas.openxmlformats.org/drawingml/2006/main" wrap="square" lIns="0" tIns="0" rIns="0" bIns="0" anchor="t">
+            <a:noAutofit/>
+          </a:bodyPr>
+          <a:lstStyle xmlns:a="http://schemas.openxmlformats.org/drawingml/2006/main">
+            <a:defPPr algn="l">
+              <a:defRPr sz="2025" b="1">
+                <a:solidFill>
+                  <a:srgbClr val="173247"/>
+                </a:solidFill>
+                <a:latin typeface="Arial"/>
+                <a:ea typeface="Arial"/>
+                <a:cs typeface="Arial"/>
+              </a:defRPr>
+            </a:defPPr>
+            <a:lvl1pPr algn="l">
+              <a:buNone/>
+              <a:defRPr sz="2025" b="1">
+                <a:solidFill>
+                  <a:srgbClr val="173247"/>
+                </a:solidFill>
+                <a:latin typeface="Arial"/>
+                <a:ea typeface="Arial"/>
+                <a:cs typeface="Arial"/>
+              </a:defRPr>
+            </a:lvl1pPr>
+            <a:lvl2pPr algn="l">
+              <a:buNone/>
+              <a:defRPr sz="2025" b="1">
+                <a:solidFill>
+                  <a:srgbClr val="173247"/>
+                </a:solidFill>
+                <a:latin typeface="Arial"/>
+                <a:ea typeface="Arial"/>
+                <a:cs typeface="Arial"/>
+              </a:defRPr>
+            </a:lvl2pPr>
+            <a:lvl3pPr algn="l">
+              <a:buNone/>
+              <a:defRPr sz="2025" b="1">
+                <a:solidFill>
+                  <a:srgbClr val="173247"/>
+                </a:solidFill>
+                <a:latin typeface="Arial"/>
+                <a:ea typeface="Arial"/>
+                <a:cs typeface="Arial"/>
+              </a:defRPr>
+            </a:lvl3pPr>
+            <a:lvl4pPr algn="l">
+              <a:buNone/>
+              <a:defRPr sz="2025" b="1">
+                <a:solidFill>
+                  <a:srgbClr val="173247"/>
+                </a:solidFill>
+                <a:latin typeface="Arial"/>
+                <a:ea typeface="Arial"/>
+                <a:cs typeface="Arial"/>
+              </a:defRPr>
+            </a:lvl4pPr>
+            <a:lvl5pPr algn="l">
+              <a:buNone/>
+              <a:defRPr sz="2025" b="1">
+                <a:solidFill>
+                  <a:srgbClr val="173247"/>
+                </a:solidFill>
+                <a:latin typeface="Arial"/>
+                <a:ea typeface="Arial"/>
+                <a:cs typeface="Arial"/>
+              </a:defRPr>
+            </a:lvl5pPr>
+            <a:lvl6pPr algn="l">
+              <a:buNone/>
+              <a:defRPr sz="2025" b="1">
+                <a:solidFill>
+                  <a:srgbClr val="173247"/>
+                </a:solidFill>
+                <a:latin typeface="Arial"/>
+                <a:ea typeface="Arial"/>
+                <a:cs typeface="Arial"/>
+              </a:defRPr>
+            </a:lvl6pPr>
+            <a:lvl7pPr algn="l">
+              <a:buNone/>
+              <a:defRPr sz="2025" b="1">
+                <a:solidFill>
+                  <a:srgbClr val="173247"/>
+                </a:solidFill>
+                <a:latin typeface="Arial"/>
+                <a:ea typeface="Arial"/>
+                <a:cs typeface="Arial"/>
+              </a:defRPr>
+            </a:lvl7pPr>
+            <a:lvl8pPr algn="l">
+              <a:buNone/>
+              <a:defRPr sz="2025" b="1">
+                <a:solidFill>
+                  <a:srgbClr val="173247"/>
+                </a:solidFill>
+                <a:latin typeface="Arial"/>
+                <a:ea typeface="Arial"/>
+                <a:cs typeface="Arial"/>
+              </a:defRPr>
+            </a:lvl8pPr>
+            <a:lvl9pPr algn="l">
+              <a:buNone/>
+              <a:defRPr sz="2025" b="1">
+                <a:solidFill>
+                  <a:srgbClr val="173247"/>
+                </a:solidFill>
+                <a:latin typeface="Arial"/>
+                <a:ea typeface="Arial"/>
+                <a:cs typeface="Arial"/>
+              </a:defRPr>
+            </a:lvl9pPr>
+          </a:lstStyle>
+          <a:p xmlns:a="http://schemas.openxmlformats.org/drawingml/2006/main">
+            <a:pPr algn="l">
+              <a:buNone/>
+              <a:defRPr sz="2025" b="1">
+                <a:solidFill>
+                  <a:srgbClr val="173247"/>
+                </a:solidFill>
+                <a:latin typeface="Arial"/>
+                <a:ea typeface="Arial"/>
+                <a:cs typeface="Arial"/>
+              </a:defRPr>
+            </a:pPr>
+            <a:r>
+              <a:rPr sz="2025" b="1">
+                <a:solidFill>
+                  <a:srgbClr val="173247"/>
+                </a:solidFill>
+                <a:latin typeface="Arial"/>
+                <a:ea typeface="Arial"/>
+                <a:cs typeface="Arial"/>
+              </a:rPr>
+              <a:t>Constrained</a:t>
+            </a:r>
+          </a:p>
+          <a:p xmlns:a="http://schemas.openxmlformats.org/drawingml/2006/main">
+            <a:pPr algn="l">
+              <a:buNone/>
+              <a:defRPr sz="2025" b="1">
+                <a:solidFill>
+                  <a:srgbClr val="173247"/>
+                </a:solidFill>
+                <a:latin typeface="Arial"/>
+                <a:ea typeface="Arial"/>
+                <a:cs typeface="Arial"/>
+              </a:defRPr>
+            </a:pPr>
+            <a:r>
+              <a:rPr sz="2025" b="1">
+                <a:solidFill>
+                  <a:srgbClr val="173247"/>
+                </a:solidFill>
+                <a:latin typeface="Arial"/>
+                <a:ea typeface="Arial"/>
+                <a:cs typeface="Arial"/>
+              </a:rPr>
+              <a:t>election</a:t>
+            </a:r>
+          </a:p>
+        </p:txBody>
+      </p:sp>
+      <p:pic>
+        <p:nvPicPr>
+          <p:cNvPr id="19" name="">
+            <a:extLst xmlns:a="http://schemas.openxmlformats.org/drawingml/2006/main">
+              <a:ext uri="{FF2B5EF4-FFF2-40B4-BE49-F238E27FC236}">
+                <a16:creationId xmlns:a16="http://schemas.microsoft.com/office/drawing/2014/main" id="{36CF07D3-FBC1-40AE-BE84-B1BA0A011ABD}"/>
+              </a:ext>
+            </a:extLst>
+          </p:cNvPr>
+          <p:cNvPicPr>
+            <a:picLocks xmlns:a="http://schemas.openxmlformats.org/drawingml/2006/main" noChangeAspect="1"/>
+          </p:cNvPicPr>
+          <p:nvPr/>
+        </p:nvPicPr>
+        <p:blipFill>
+          <a:blip xmlns:r="http://schemas.openxmlformats.org/officeDocument/2006/relationships" xmlns:a="http://schemas.openxmlformats.org/drawingml/2006/main" r:embed="R1813755e895a438c"/>
+          <a:srcRect xmlns:a="http://schemas.openxmlformats.org/drawingml/2006/main" l="36538" t="63356" r="54615" b="20890"/>
+          <a:stretch xmlns:a="http://schemas.openxmlformats.org/drawingml/2006/main"/>
+        </p:blipFill>
+        <p:spPr>
+          <a:xfrm xmlns:a="http://schemas.openxmlformats.org/drawingml/2006/main">
+            <a:off x="7400925" y="3162300"/>
+            <a:ext cx="1809750" cy="1809750"/>
+          </a:xfrm>
+          <a:prstGeom xmlns:a="http://schemas.openxmlformats.org/drawingml/2006/main" prst="rect">
+            <a:avLst/>
+          </a:prstGeom>
+        </p:spPr>
+      </p:pic>
+      <p:sp>
+        <p:nvSpPr>
+          <p:cNvPr id="20" name="A has an older log">
+            <a:extLst xmlns:a="http://schemas.openxmlformats.org/drawingml/2006/main">
+              <a:ext uri="{FF2B5EF4-FFF2-40B4-BE49-F238E27FC236}">
+                <a16:creationId xmlns:a16="http://schemas.microsoft.com/office/drawing/2014/main" id="{737FCDEC-54C2-4648-82BC-9D4A8F52DDE5}"/>
+              </a:ext>
+            </a:extLst>
+          </p:cNvPr>
+          <p:cNvSpPr>
+            <a:spLocks xmlns:a="http://schemas.openxmlformats.org/drawingml/2006/main" noGrp="1"/>
+          </p:cNvSpPr>
+          <p:nvPr/>
+        </p:nvSpPr>
+        <p:spPr>
+          <a:xfrm xmlns:a="http://schemas.openxmlformats.org/drawingml/2006/main">
+            <a:off x="7315200" y="5172075"/>
+            <a:ext cx="1981200" cy="647700"/>
+          </a:xfrm>
+          <a:prstGeom xmlns:a="http://schemas.openxmlformats.org/drawingml/2006/main" prst="rect">
+            <a:avLst/>
+          </a:prstGeom>
+          <a:noFill xmlns:a="http://schemas.openxmlformats.org/drawingml/2006/main"/>
+          <a:ln xmlns:a="http://schemas.openxmlformats.org/drawingml/2006/main" w="0">
+            <a:noFill/>
+          </a:ln>
+        </p:spPr>
+        <p:txBody>
+          <a:bodyPr xmlns:a="http://schemas.openxmlformats.org/drawingml/2006/main" wrap="square" lIns="0" tIns="0" rIns="0" bIns="0" anchor="t">
+            <a:noAutofit/>
+          </a:bodyPr>
+          <a:lstStyle xmlns:a="http://schemas.openxmlformats.org/drawingml/2006/main">
+            <a:defPPr algn="l">
+              <a:defRPr sz="1725" b="0">
+                <a:solidFill>
+                  <a:srgbClr val="556570"/>
+                </a:solidFill>
+                <a:latin typeface="Arial"/>
+                <a:ea typeface="Arial"/>
+                <a:cs typeface="Arial"/>
+              </a:defRPr>
+            </a:defPPr>
+            <a:lvl1pPr algn="l">
+              <a:buNone/>
+              <a:defRPr sz="1725" b="0">
+                <a:solidFill>
+                  <a:srgbClr val="556570"/>
+                </a:solidFill>
+                <a:latin typeface="Arial"/>
+                <a:ea typeface="Arial"/>
+                <a:cs typeface="Arial"/>
+              </a:defRPr>
+            </a:lvl1pPr>
+            <a:lvl2pPr algn="l">
+              <a:buNone/>
+              <a:defRPr sz="1725" b="0">
+                <a:solidFill>
+                  <a:srgbClr val="556570"/>
+                </a:solidFill>
+                <a:latin typeface="Arial"/>
+                <a:ea typeface="Arial"/>
+                <a:cs typeface="Arial"/>
+              </a:defRPr>
+            </a:lvl2pPr>
+            <a:lvl3pPr algn="l">
+              <a:buNone/>
+              <a:defRPr sz="1725" b="0">
+                <a:solidFill>
+                  <a:srgbClr val="556570"/>
+                </a:solidFill>
+                <a:latin typeface="Arial"/>
+                <a:ea typeface="Arial"/>
+                <a:cs typeface="Arial"/>
+              </a:defRPr>
+            </a:lvl3pPr>
+            <a:lvl4pPr algn="l">
+              <a:buNone/>
+              <a:defRPr sz="1725" b="0">
+                <a:solidFill>
+                  <a:srgbClr val="556570"/>
+                </a:solidFill>
+                <a:latin typeface="Arial"/>
+                <a:ea typeface="Arial"/>
+                <a:cs typeface="Arial"/>
+              </a:defRPr>
+            </a:lvl4pPr>
+            <a:lvl5pPr algn="l">
+              <a:buNone/>
+              <a:defRPr sz="1725" b="0">
+                <a:solidFill>
+                  <a:srgbClr val="556570"/>
+                </a:solidFill>
+                <a:latin typeface="Arial"/>
+                <a:ea typeface="Arial"/>
+                <a:cs typeface="Arial"/>
+              </a:defRPr>
+            </a:lvl5pPr>
+            <a:lvl6pPr algn="l">
+              <a:buNone/>
+              <a:defRPr sz="1725" b="0">
+                <a:solidFill>
+                  <a:srgbClr val="556570"/>
+                </a:solidFill>
+                <a:latin typeface="Arial"/>
+                <a:ea typeface="Arial"/>
+                <a:cs typeface="Arial"/>
+              </a:defRPr>
+            </a:lvl6pPr>
+            <a:lvl7pPr algn="l">
+              <a:buNone/>
+              <a:defRPr sz="1725" b="0">
+                <a:solidFill>
+                  <a:srgbClr val="556570"/>
+                </a:solidFill>
+                <a:latin typeface="Arial"/>
+                <a:ea typeface="Arial"/>
+                <a:cs typeface="Arial"/>
+              </a:defRPr>
+            </a:lvl7pPr>
+            <a:lvl8pPr algn="l">
+              <a:buNone/>
+              <a:defRPr sz="1725" b="0">
+                <a:solidFill>
+                  <a:srgbClr val="556570"/>
+                </a:solidFill>
+                <a:latin typeface="Arial"/>
+                <a:ea typeface="Arial"/>
+                <a:cs typeface="Arial"/>
+              </a:defRPr>
+            </a:lvl8pPr>
+            <a:lvl9pPr algn="l">
+              <a:buNone/>
+              <a:defRPr sz="1725" b="0">
+                <a:solidFill>
+                  <a:srgbClr val="556570"/>
+                </a:solidFill>
+                <a:latin typeface="Arial"/>
+                <a:ea typeface="Arial"/>
+                <a:cs typeface="Arial"/>
+              </a:defRPr>
+            </a:lvl9pPr>
+          </a:lstStyle>
+          <a:p xmlns:a="http://schemas.openxmlformats.org/drawingml/2006/main">
+            <a:pPr algn="l">
+              <a:buNone/>
+              <a:defRPr sz="1725" b="0">
+                <a:solidFill>
+                  <a:srgbClr val="556570"/>
+                </a:solidFill>
+                <a:latin typeface="Arial"/>
+                <a:ea typeface="Arial"/>
+                <a:cs typeface="Arial"/>
+              </a:defRPr>
+            </a:pPr>
+            <a:r>
+              <a:rPr sz="1725" b="0">
+                <a:solidFill>
+                  <a:srgbClr val="556570"/>
+                </a:solidFill>
+                <a:latin typeface="Arial"/>
+                <a:ea typeface="Arial"/>
+                <a:cs typeface="Arial"/>
+              </a:rPr>
+              <a:t>A has an</a:t>
+            </a:r>
+          </a:p>
+          <a:p xmlns:a="http://schemas.openxmlformats.org/drawingml/2006/main">
+            <a:pPr algn="l">
+              <a:buNone/>
+              <a:defRPr sz="1725" b="0">
+                <a:solidFill>
+                  <a:srgbClr val="556570"/>
+                </a:solidFill>
+                <a:latin typeface="Arial"/>
+                <a:ea typeface="Arial"/>
+                <a:cs typeface="Arial"/>
+              </a:defRPr>
+            </a:pPr>
+            <a:r>
+              <a:rPr sz="1725" b="0">
+                <a:solidFill>
+                  <a:srgbClr val="556570"/>
+                </a:solidFill>
+                <a:latin typeface="Arial"/>
+                <a:ea typeface="Arial"/>
+                <a:cs typeface="Arial"/>
+              </a:rPr>
+              <a:t>older log</a:t>
+            </a:r>
+          </a:p>
+        </p:txBody>
+      </p:sp>
+      <p:sp>
+        <p:nvSpPr>
+          <p:cNvPr id="21" name="T4">
+            <a:extLst xmlns:a="http://schemas.openxmlformats.org/drawingml/2006/main">
+              <a:ext uri="{FF2B5EF4-FFF2-40B4-BE49-F238E27FC236}">
+                <a16:creationId xmlns:a16="http://schemas.microsoft.com/office/drawing/2014/main" id="{66DEE5DA-0EE0-451C-820E-A2522B3198BE}"/>
+              </a:ext>
+            </a:extLst>
+          </p:cNvPr>
+          <p:cNvSpPr>
+            <a:spLocks xmlns:a="http://schemas.openxmlformats.org/drawingml/2006/main" noGrp="1"/>
+          </p:cNvSpPr>
+          <p:nvPr/>
+        </p:nvSpPr>
+        <p:spPr>
+          <a:xfrm xmlns:a="http://schemas.openxmlformats.org/drawingml/2006/main">
+            <a:off x="9525000" y="1971675"/>
+            <a:ext cx="1981200" cy="361950"/>
+          </a:xfrm>
+          <a:prstGeom xmlns:a="http://schemas.openxmlformats.org/drawingml/2006/main" prst="rect">
+            <a:avLst/>
+          </a:prstGeom>
+          <a:noFill xmlns:a="http://schemas.openxmlformats.org/drawingml/2006/main"/>
+          <a:ln xmlns:a="http://schemas.openxmlformats.org/drawingml/2006/main" w="0">
+            <a:noFill/>
+          </a:ln>
+        </p:spPr>
+        <p:txBody>
+          <a:bodyPr xmlns:a="http://schemas.openxmlformats.org/drawingml/2006/main" wrap="square" lIns="0" tIns="0" rIns="0" bIns="0" anchor="t">
+            <a:noAutofit/>
+          </a:bodyPr>
+          <a:lstStyle xmlns:a="http://schemas.openxmlformats.org/drawingml/2006/main">
+            <a:defPPr algn="l">
+              <a:defRPr sz="2250" b="1">
+                <a:solidFill>
+                  <a:srgbClr val="007E87"/>
+                </a:solidFill>
+                <a:latin typeface="Arial"/>
+                <a:ea typeface="Arial"/>
+                <a:cs typeface="Arial"/>
+              </a:defRPr>
+            </a:defPPr>
+            <a:lvl1pPr algn="l">
+              <a:buNone/>
+              <a:defRPr sz="2250" b="1">
+                <a:solidFill>
+                  <a:srgbClr val="007E87"/>
+                </a:solidFill>
+                <a:latin typeface="Arial"/>
+                <a:ea typeface="Arial"/>
+                <a:cs typeface="Arial"/>
+              </a:defRPr>
+            </a:lvl1pPr>
+            <a:lvl2pPr algn="l">
+              <a:buNone/>
+              <a:defRPr sz="2250" b="1">
+                <a:solidFill>
+                  <a:srgbClr val="007E87"/>
+                </a:solidFill>
+                <a:latin typeface="Arial"/>
+                <a:ea typeface="Arial"/>
+                <a:cs typeface="Arial"/>
+              </a:defRPr>
+            </a:lvl2pPr>
+            <a:lvl3pPr algn="l">
+              <a:buNone/>
+              <a:defRPr sz="2250" b="1">
+                <a:solidFill>
+                  <a:srgbClr val="007E87"/>
+                </a:solidFill>
+                <a:latin typeface="Arial"/>
+                <a:ea typeface="Arial"/>
+                <a:cs typeface="Arial"/>
+              </a:defRPr>
+            </a:lvl3pPr>
+            <a:lvl4pPr algn="l">
+              <a:buNone/>
+              <a:defRPr sz="2250" b="1">
+                <a:solidFill>
+                  <a:srgbClr val="007E87"/>
+                </a:solidFill>
+                <a:latin typeface="Arial"/>
+                <a:ea typeface="Arial"/>
+                <a:cs typeface="Arial"/>
+              </a:defRPr>
+            </a:lvl4pPr>
+            <a:lvl5pPr algn="l">
+              <a:buNone/>
+              <a:defRPr sz="2250" b="1">
+                <a:solidFill>
+                  <a:srgbClr val="007E87"/>
+                </a:solidFill>
+                <a:latin typeface="Arial"/>
+                <a:ea typeface="Arial"/>
+                <a:cs typeface="Arial"/>
+              </a:defRPr>
+            </a:lvl5pPr>
+            <a:lvl6pPr algn="l">
+              <a:buNone/>
+              <a:defRPr sz="2250" b="1">
+                <a:solidFill>
+                  <a:srgbClr val="007E87"/>
+                </a:solidFill>
+                <a:latin typeface="Arial"/>
+                <a:ea typeface="Arial"/>
+                <a:cs typeface="Arial"/>
+              </a:defRPr>
+            </a:lvl6pPr>
+            <a:lvl7pPr algn="l">
+              <a:buNone/>
+              <a:defRPr sz="2250" b="1">
+                <a:solidFill>
+                  <a:srgbClr val="007E87"/>
+                </a:solidFill>
+                <a:latin typeface="Arial"/>
+                <a:ea typeface="Arial"/>
+                <a:cs typeface="Arial"/>
+              </a:defRPr>
+            </a:lvl7pPr>
+            <a:lvl8pPr algn="l">
+              <a:buNone/>
+              <a:defRPr sz="2250" b="1">
+                <a:solidFill>
+                  <a:srgbClr val="007E87"/>
+                </a:solidFill>
+                <a:latin typeface="Arial"/>
+                <a:ea typeface="Arial"/>
+                <a:cs typeface="Arial"/>
+              </a:defRPr>
+            </a:lvl8pPr>
+            <a:lvl9pPr algn="l">
+              <a:buNone/>
+              <a:defRPr sz="2250" b="1">
+                <a:solidFill>
+                  <a:srgbClr val="007E87"/>
+                </a:solidFill>
+                <a:latin typeface="Arial"/>
+                <a:ea typeface="Arial"/>
+                <a:cs typeface="Arial"/>
+              </a:defRPr>
+            </a:lvl9pPr>
+          </a:lstStyle>
+          <a:p xmlns:a="http://schemas.openxmlformats.org/drawingml/2006/main">
+            <a:pPr algn="l">
+              <a:buNone/>
+              <a:defRPr sz="2250" b="1">
+                <a:solidFill>
+                  <a:srgbClr val="007E87"/>
+                </a:solidFill>
+                <a:latin typeface="Arial"/>
+                <a:ea typeface="Arial"/>
+                <a:cs typeface="Arial"/>
+              </a:defRPr>
+            </a:pPr>
+            <a:r>
+              <a:rPr sz="2250" b="1">
+                <a:solidFill>
+                  <a:srgbClr val="007E87"/>
+                </a:solidFill>
+                <a:latin typeface="Arial"/>
+                <a:ea typeface="Arial"/>
+                <a:cs typeface="Arial"/>
+              </a:rPr>
+              <a:t>T4</a:t>
+            </a:r>
+          </a:p>
+        </p:txBody>
+      </p:sp>
+      <p:sp>
+        <p:nvSpPr>
+          <p:cNvPr id="22" name="Three-node chain">
+            <a:extLst xmlns:a="http://schemas.openxmlformats.org/drawingml/2006/main">
+              <a:ext uri="{FF2B5EF4-FFF2-40B4-BE49-F238E27FC236}">
+                <a16:creationId xmlns:a16="http://schemas.microsoft.com/office/drawing/2014/main" id="{9C3C5BB8-35B9-4260-B7EE-3821C60065FD}"/>
+              </a:ext>
+            </a:extLst>
+          </p:cNvPr>
+          <p:cNvSpPr>
+            <a:spLocks xmlns:a="http://schemas.openxmlformats.org/drawingml/2006/main" noGrp="1"/>
+          </p:cNvSpPr>
+          <p:nvPr/>
+        </p:nvSpPr>
+        <p:spPr>
+          <a:xfrm xmlns:a="http://schemas.openxmlformats.org/drawingml/2006/main">
+            <a:off x="9525000" y="2400300"/>
+            <a:ext cx="1981200" cy="666750"/>
+          </a:xfrm>
+          <a:prstGeom xmlns:a="http://schemas.openxmlformats.org/drawingml/2006/main" prst="rect">
+            <a:avLst/>
+          </a:prstGeom>
+          <a:noFill xmlns:a="http://schemas.openxmlformats.org/drawingml/2006/main"/>
+          <a:ln xmlns:a="http://schemas.openxmlformats.org/drawingml/2006/main" w="0">
+            <a:noFill/>
+          </a:ln>
+        </p:spPr>
+        <p:txBody>
+          <a:bodyPr xmlns:a="http://schemas.openxmlformats.org/drawingml/2006/main" wrap="square" lIns="0" tIns="0" rIns="0" bIns="0" anchor="t">
+            <a:noAutofit/>
+          </a:bodyPr>
+          <a:lstStyle xmlns:a="http://schemas.openxmlformats.org/drawingml/2006/main">
+            <a:defPPr algn="l">
+              <a:defRPr sz="2025" b="1">
+                <a:solidFill>
+                  <a:srgbClr val="173247"/>
+                </a:solidFill>
+                <a:latin typeface="Arial"/>
+                <a:ea typeface="Arial"/>
+                <a:cs typeface="Arial"/>
+              </a:defRPr>
+            </a:defPPr>
+            <a:lvl1pPr algn="l">
+              <a:buNone/>
+              <a:defRPr sz="2025" b="1">
+                <a:solidFill>
+                  <a:srgbClr val="173247"/>
+                </a:solidFill>
+                <a:latin typeface="Arial"/>
+                <a:ea typeface="Arial"/>
+                <a:cs typeface="Arial"/>
+              </a:defRPr>
+            </a:lvl1pPr>
+            <a:lvl2pPr algn="l">
+              <a:buNone/>
+              <a:defRPr sz="2025" b="1">
+                <a:solidFill>
+                  <a:srgbClr val="173247"/>
+                </a:solidFill>
+                <a:latin typeface="Arial"/>
+                <a:ea typeface="Arial"/>
+                <a:cs typeface="Arial"/>
+              </a:defRPr>
+            </a:lvl2pPr>
+            <a:lvl3pPr algn="l">
+              <a:buNone/>
+              <a:defRPr sz="2025" b="1">
+                <a:solidFill>
+                  <a:srgbClr val="173247"/>
+                </a:solidFill>
+                <a:latin typeface="Arial"/>
+                <a:ea typeface="Arial"/>
+                <a:cs typeface="Arial"/>
+              </a:defRPr>
+            </a:lvl3pPr>
+            <a:lvl4pPr algn="l">
+              <a:buNone/>
+              <a:defRPr sz="2025" b="1">
+                <a:solidFill>
+                  <a:srgbClr val="173247"/>
+                </a:solidFill>
+                <a:latin typeface="Arial"/>
+                <a:ea typeface="Arial"/>
+                <a:cs typeface="Arial"/>
+              </a:defRPr>
+            </a:lvl4pPr>
+            <a:lvl5pPr algn="l">
+              <a:buNone/>
+              <a:defRPr sz="2025" b="1">
+                <a:solidFill>
+                  <a:srgbClr val="173247"/>
+                </a:solidFill>
+                <a:latin typeface="Arial"/>
+                <a:ea typeface="Arial"/>
+                <a:cs typeface="Arial"/>
+              </a:defRPr>
+            </a:lvl5pPr>
+            <a:lvl6pPr algn="l">
+              <a:buNone/>
+              <a:defRPr sz="2025" b="1">
+                <a:solidFill>
+                  <a:srgbClr val="173247"/>
+                </a:solidFill>
+                <a:latin typeface="Arial"/>
+                <a:ea typeface="Arial"/>
+                <a:cs typeface="Arial"/>
+              </a:defRPr>
+            </a:lvl6pPr>
+            <a:lvl7pPr algn="l">
+              <a:buNone/>
+              <a:defRPr sz="2025" b="1">
+                <a:solidFill>
+                  <a:srgbClr val="173247"/>
+                </a:solidFill>
+                <a:latin typeface="Arial"/>
+                <a:ea typeface="Arial"/>
+                <a:cs typeface="Arial"/>
+              </a:defRPr>
+            </a:lvl7pPr>
+            <a:lvl8pPr algn="l">
+              <a:buNone/>
+              <a:defRPr sz="2025" b="1">
+                <a:solidFill>
+                  <a:srgbClr val="173247"/>
+                </a:solidFill>
+                <a:latin typeface="Arial"/>
+                <a:ea typeface="Arial"/>
+                <a:cs typeface="Arial"/>
+              </a:defRPr>
+            </a:lvl8pPr>
+            <a:lvl9pPr algn="l">
+              <a:buNone/>
+              <a:defRPr sz="2025" b="1">
+                <a:solidFill>
+                  <a:srgbClr val="173247"/>
+                </a:solidFill>
+                <a:latin typeface="Arial"/>
+                <a:ea typeface="Arial"/>
+                <a:cs typeface="Arial"/>
+              </a:defRPr>
+            </a:lvl9pPr>
+          </a:lstStyle>
+          <a:p xmlns:a="http://schemas.openxmlformats.org/drawingml/2006/main">
+            <a:pPr algn="l">
+              <a:buNone/>
+              <a:defRPr sz="2025" b="1">
+                <a:solidFill>
+                  <a:srgbClr val="173247"/>
+                </a:solidFill>
+                <a:latin typeface="Arial"/>
+                <a:ea typeface="Arial"/>
+                <a:cs typeface="Arial"/>
+              </a:defRPr>
+            </a:pPr>
+            <a:r>
+              <a:rPr sz="2025" b="1">
+                <a:solidFill>
+                  <a:srgbClr val="173247"/>
+                </a:solidFill>
+                <a:latin typeface="Arial"/>
+                <a:ea typeface="Arial"/>
+                <a:cs typeface="Arial"/>
+              </a:rPr>
+              <a:t>Three-node</a:t>
+            </a:r>
+          </a:p>
+          <a:p xmlns:a="http://schemas.openxmlformats.org/drawingml/2006/main">
+            <a:pPr algn="l">
+              <a:buNone/>
+              <a:defRPr sz="2025" b="1">
+                <a:solidFill>
+                  <a:srgbClr val="173247"/>
+                </a:solidFill>
+                <a:latin typeface="Arial"/>
+                <a:ea typeface="Arial"/>
+                <a:cs typeface="Arial"/>
+              </a:defRPr>
+            </a:pPr>
+            <a:r>
+              <a:rPr sz="2025" b="1">
+                <a:solidFill>
+                  <a:srgbClr val="173247"/>
+                </a:solidFill>
+                <a:latin typeface="Arial"/>
+                <a:ea typeface="Arial"/>
+                <a:cs typeface="Arial"/>
+              </a:rPr>
+              <a:t>chain</a:t>
+            </a:r>
+          </a:p>
+        </p:txBody>
+      </p:sp>
+      <p:pic>
+        <p:nvPicPr>
+          <p:cNvPr id="23" name="">
+            <a:extLst xmlns:a="http://schemas.openxmlformats.org/drawingml/2006/main">
+              <a:ext uri="{FF2B5EF4-FFF2-40B4-BE49-F238E27FC236}">
+                <a16:creationId xmlns:a16="http://schemas.microsoft.com/office/drawing/2014/main" id="{AF7A9B3D-D560-423A-8ED2-E6F0CE9957B4}"/>
+              </a:ext>
+            </a:extLst>
+          </p:cNvPr>
+          <p:cNvPicPr>
+            <a:picLocks xmlns:a="http://schemas.openxmlformats.org/drawingml/2006/main" noChangeAspect="1"/>
+          </p:cNvPicPr>
+          <p:nvPr/>
+        </p:nvPicPr>
+        <p:blipFill>
+          <a:blip xmlns:r="http://schemas.openxmlformats.org/officeDocument/2006/relationships" xmlns:a="http://schemas.openxmlformats.org/drawingml/2006/main" r:embed="R1813755e895a438c"/>
+          <a:srcRect xmlns:a="http://schemas.openxmlformats.org/drawingml/2006/main" l="70000" t="63356" r="21154" b="20890"/>
+          <a:stretch xmlns:a="http://schemas.openxmlformats.org/drawingml/2006/main"/>
+        </p:blipFill>
+        <p:spPr>
+          <a:xfrm xmlns:a="http://schemas.openxmlformats.org/drawingml/2006/main">
+            <a:off x="9610725" y="3162300"/>
+            <a:ext cx="1809750" cy="1809750"/>
+          </a:xfrm>
+          <a:prstGeom xmlns:a="http://schemas.openxmlformats.org/drawingml/2006/main" prst="rect">
+            <a:avLst/>
+          </a:prstGeom>
+        </p:spPr>
+      </p:pic>
+      <p:sp>
+        <p:nvSpPr>
+          <p:cNvPr id="24" name="B and C connect through A">
+            <a:extLst xmlns:a="http://schemas.openxmlformats.org/drawingml/2006/main">
+              <a:ext uri="{FF2B5EF4-FFF2-40B4-BE49-F238E27FC236}">
+                <a16:creationId xmlns:a16="http://schemas.microsoft.com/office/drawing/2014/main" id="{58420DD6-2E82-4FBF-A70A-B63B87D31758}"/>
+              </a:ext>
+            </a:extLst>
+          </p:cNvPr>
+          <p:cNvSpPr>
+            <a:spLocks xmlns:a="http://schemas.openxmlformats.org/drawingml/2006/main" noGrp="1"/>
+          </p:cNvSpPr>
+          <p:nvPr/>
+        </p:nvSpPr>
+        <p:spPr>
+          <a:xfrm xmlns:a="http://schemas.openxmlformats.org/drawingml/2006/main">
+            <a:off x="9525000" y="5172075"/>
+            <a:ext cx="1981200" cy="647700"/>
+          </a:xfrm>
+          <a:prstGeom xmlns:a="http://schemas.openxmlformats.org/drawingml/2006/main" prst="rect">
+            <a:avLst/>
+          </a:prstGeom>
+          <a:noFill xmlns:a="http://schemas.openxmlformats.org/drawingml/2006/main"/>
+          <a:ln xmlns:a="http://schemas.openxmlformats.org/drawingml/2006/main" w="0">
+            <a:noFill/>
+          </a:ln>
+        </p:spPr>
+        <p:txBody>
+          <a:bodyPr xmlns:a="http://schemas.openxmlformats.org/drawingml/2006/main" wrap="square" lIns="0" tIns="0" rIns="0" bIns="0" anchor="t">
+            <a:noAutofit/>
+          </a:bodyPr>
+          <a:lstStyle xmlns:a="http://schemas.openxmlformats.org/drawingml/2006/main">
+            <a:defPPr algn="l">
+              <a:defRPr sz="1725" b="0">
+                <a:solidFill>
+                  <a:srgbClr val="556570"/>
+                </a:solidFill>
+                <a:latin typeface="Arial"/>
+                <a:ea typeface="Arial"/>
+                <a:cs typeface="Arial"/>
+              </a:defRPr>
+            </a:defPPr>
+            <a:lvl1pPr algn="l">
+              <a:buNone/>
+              <a:defRPr sz="1725" b="0">
+                <a:solidFill>
+                  <a:srgbClr val="556570"/>
+                </a:solidFill>
+                <a:latin typeface="Arial"/>
+                <a:ea typeface="Arial"/>
+                <a:cs typeface="Arial"/>
+              </a:defRPr>
+            </a:lvl1pPr>
+            <a:lvl2pPr algn="l">
+              <a:buNone/>
+              <a:defRPr sz="1725" b="0">
+                <a:solidFill>
+                  <a:srgbClr val="556570"/>
+                </a:solidFill>
+                <a:latin typeface="Arial"/>
+                <a:ea typeface="Arial"/>
+                <a:cs typeface="Arial"/>
+              </a:defRPr>
+            </a:lvl2pPr>
+            <a:lvl3pPr algn="l">
+              <a:buNone/>
+              <a:defRPr sz="1725" b="0">
+                <a:solidFill>
+                  <a:srgbClr val="556570"/>
+                </a:solidFill>
+                <a:latin typeface="Arial"/>
+                <a:ea typeface="Arial"/>
+                <a:cs typeface="Arial"/>
+              </a:defRPr>
+            </a:lvl3pPr>
+            <a:lvl4pPr algn="l">
+              <a:buNone/>
+              <a:defRPr sz="1725" b="0">
+                <a:solidFill>
+                  <a:srgbClr val="556570"/>
+                </a:solidFill>
+                <a:latin typeface="Arial"/>
+                <a:ea typeface="Arial"/>
+                <a:cs typeface="Arial"/>
+              </a:defRPr>
+            </a:lvl4pPr>
+            <a:lvl5pPr algn="l">
+              <a:buNone/>
+              <a:defRPr sz="1725" b="0">
+                <a:solidFill>
+                  <a:srgbClr val="556570"/>
+                </a:solidFill>
+                <a:latin typeface="Arial"/>
+                <a:ea typeface="Arial"/>
+                <a:cs typeface="Arial"/>
+              </a:defRPr>
+            </a:lvl5pPr>
+            <a:lvl6pPr algn="l">
+              <a:buNone/>
+              <a:defRPr sz="1725" b="0">
+                <a:solidFill>
+                  <a:srgbClr val="556570"/>
+                </a:solidFill>
+                <a:latin typeface="Arial"/>
+                <a:ea typeface="Arial"/>
+                <a:cs typeface="Arial"/>
+              </a:defRPr>
+            </a:lvl6pPr>
+            <a:lvl7pPr algn="l">
+              <a:buNone/>
+              <a:defRPr sz="1725" b="0">
+                <a:solidFill>
+                  <a:srgbClr val="556570"/>
+                </a:solidFill>
+                <a:latin typeface="Arial"/>
+                <a:ea typeface="Arial"/>
+                <a:cs typeface="Arial"/>
+              </a:defRPr>
+            </a:lvl7pPr>
+            <a:lvl8pPr algn="l">
+              <a:buNone/>
+              <a:defRPr sz="1725" b="0">
+                <a:solidFill>
+                  <a:srgbClr val="556570"/>
+                </a:solidFill>
+                <a:latin typeface="Arial"/>
+                <a:ea typeface="Arial"/>
+                <a:cs typeface="Arial"/>
+              </a:defRPr>
+            </a:lvl8pPr>
+            <a:lvl9pPr algn="l">
+              <a:buNone/>
+              <a:defRPr sz="1725" b="0">
+                <a:solidFill>
+                  <a:srgbClr val="556570"/>
+                </a:solidFill>
+                <a:latin typeface="Arial"/>
+                <a:ea typeface="Arial"/>
+                <a:cs typeface="Arial"/>
+              </a:defRPr>
+            </a:lvl9pPr>
+          </a:lstStyle>
+          <a:p xmlns:a="http://schemas.openxmlformats.org/drawingml/2006/main">
+            <a:pPr algn="l">
+              <a:buNone/>
+              <a:defRPr sz="1725" b="0">
+                <a:solidFill>
+                  <a:srgbClr val="556570"/>
+                </a:solidFill>
+                <a:latin typeface="Arial"/>
+                <a:ea typeface="Arial"/>
+                <a:cs typeface="Arial"/>
+              </a:defRPr>
+            </a:pPr>
+            <a:r>
+              <a:rPr sz="1725" b="0">
+                <a:solidFill>
+                  <a:srgbClr val="556570"/>
+                </a:solidFill>
+                <a:latin typeface="Arial"/>
+                <a:ea typeface="Arial"/>
+                <a:cs typeface="Arial"/>
+              </a:rPr>
+              <a:t>B and C connect</a:t>
+            </a:r>
+          </a:p>
+          <a:p xmlns:a="http://schemas.openxmlformats.org/drawingml/2006/main">
+            <a:pPr algn="l">
+              <a:buNone/>
+              <a:defRPr sz="1725" b="0">
+                <a:solidFill>
+                  <a:srgbClr val="556570"/>
+                </a:solidFill>
+                <a:latin typeface="Arial"/>
+                <a:ea typeface="Arial"/>
+                <a:cs typeface="Arial"/>
+              </a:defRPr>
+            </a:pPr>
+            <a:r>
+              <a:rPr sz="1725" b="0">
+                <a:solidFill>
+                  <a:srgbClr val="556570"/>
+                </a:solidFill>
+                <a:latin typeface="Arial"/>
+                <a:ea typeface="Arial"/>
+                <a:cs typeface="Arial"/>
+              </a:rPr>
+              <a:t>through A</a:t>
+            </a:r>
+          </a:p>
+        </p:txBody>
+      </p:sp>
+      <p:sp>
+        <p:nvSpPr>
+          <p:cNvPr id="25" name="legend-surviving-sample">
+            <a:extLst xmlns:a="http://schemas.openxmlformats.org/drawingml/2006/main">
+              <a:ext uri="{FF2B5EF4-FFF2-40B4-BE49-F238E27FC236}">
+                <a16:creationId xmlns:a16="http://schemas.microsoft.com/office/drawing/2014/main" id="{197BED59-4A75-497A-BBDF-05914891E8BA}"/>
+              </a:ext>
+            </a:extLst>
+          </p:cNvPr>
+          <p:cNvSpPr>
+            <a:spLocks xmlns:a="http://schemas.openxmlformats.org/drawingml/2006/main" noGrp="1"/>
+          </p:cNvSpPr>
+          <p:nvPr/>
+        </p:nvSpPr>
+        <p:spPr>
+          <a:xfrm xmlns:a="http://schemas.openxmlformats.org/drawingml/2006/main">
+            <a:off x="685800" y="6162675"/>
+            <a:ext cx="514350" cy="0"/>
+          </a:xfrm>
+          <a:prstGeom xmlns:a="http://schemas.openxmlformats.org/drawingml/2006/main" prst="line">
+            <a:avLst/>
+          </a:prstGeom>
+          <a:noFill xmlns:a="http://schemas.openxmlformats.org/drawingml/2006/main"/>
+          <a:ln xmlns:a="http://schemas.openxmlformats.org/drawingml/2006/main" w="23813">
+            <a:solidFill>
+              <a:srgbClr val="374151"/>
+            </a:solidFill>
+            <a:prstDash val="solid"/>
+          </a:ln>
+        </p:spPr>
+      </p:sp>
+      <p:sp>
+        <p:nvSpPr>
+          <p:cNvPr id="26" name="legend-Surviving link">
+            <a:extLst xmlns:a="http://schemas.openxmlformats.org/drawingml/2006/main">
+              <a:ext uri="{FF2B5EF4-FFF2-40B4-BE49-F238E27FC236}">
+                <a16:creationId xmlns:a16="http://schemas.microsoft.com/office/drawing/2014/main" id="{DA1A4905-D856-4AC4-A971-2EED433BAC92}"/>
+              </a:ext>
+            </a:extLst>
+          </p:cNvPr>
+          <p:cNvSpPr>
+            <a:spLocks xmlns:a="http://schemas.openxmlformats.org/drawingml/2006/main" noGrp="1"/>
+          </p:cNvSpPr>
+          <p:nvPr/>
+        </p:nvSpPr>
+        <p:spPr>
+          <a:xfrm xmlns:a="http://schemas.openxmlformats.org/drawingml/2006/main">
+            <a:off x="1333500" y="6019800"/>
+            <a:ext cx="1809750" cy="304800"/>
+          </a:xfrm>
+          <a:prstGeom xmlns:a="http://schemas.openxmlformats.org/drawingml/2006/main" prst="rect">
+            <a:avLst/>
+          </a:prstGeom>
+          <a:noFill xmlns:a="http://schemas.openxmlformats.org/drawingml/2006/main"/>
+          <a:ln xmlns:a="http://schemas.openxmlformats.org/drawingml/2006/main" w="0">
+            <a:noFill/>
+          </a:ln>
+        </p:spPr>
+        <p:txBody>
+          <a:bodyPr xmlns:a="http://schemas.openxmlformats.org/drawingml/2006/main" wrap="square" lIns="0" tIns="0" rIns="0" bIns="0" anchor="t">
+            <a:noAutofit/>
+          </a:bodyPr>
+          <a:lstStyle xmlns:a="http://schemas.openxmlformats.org/drawingml/2006/main">
+            <a:defPPr algn="l">
+              <a:defRPr sz="1650">
+                <a:solidFill>
+                  <a:srgbClr val="556570"/>
+                </a:solidFill>
+                <a:latin typeface="Arial"/>
+                <a:ea typeface="Arial"/>
+                <a:cs typeface="Arial"/>
+              </a:defRPr>
+            </a:defPPr>
+            <a:lvl1pPr algn="l">
+              <a:defRPr sz="1650">
+                <a:solidFill>
+                  <a:srgbClr val="556570"/>
+                </a:solidFill>
+                <a:latin typeface="Arial"/>
+                <a:ea typeface="Arial"/>
+                <a:cs typeface="Arial"/>
+              </a:defRPr>
+            </a:lvl1pPr>
+            <a:lvl2pPr algn="l">
+              <a:defRPr sz="1650">
+                <a:solidFill>
+                  <a:srgbClr val="556570"/>
+                </a:solidFill>
+                <a:latin typeface="Arial"/>
+                <a:ea typeface="Arial"/>
+                <a:cs typeface="Arial"/>
+              </a:defRPr>
+            </a:lvl2pPr>
+            <a:lvl3pPr algn="l">
+              <a:defRPr sz="1650">
+                <a:solidFill>
+                  <a:srgbClr val="556570"/>
+                </a:solidFill>
+                <a:latin typeface="Arial"/>
+                <a:ea typeface="Arial"/>
+                <a:cs typeface="Arial"/>
+              </a:defRPr>
+            </a:lvl3pPr>
+            <a:lvl4pPr algn="l">
+              <a:defRPr sz="1650">
+                <a:solidFill>
+                  <a:srgbClr val="556570"/>
+                </a:solidFill>
+                <a:latin typeface="Arial"/>
+                <a:ea typeface="Arial"/>
+                <a:cs typeface="Arial"/>
+              </a:defRPr>
+            </a:lvl4pPr>
+            <a:lvl5pPr algn="l">
+              <a:defRPr sz="1650">
+                <a:solidFill>
+                  <a:srgbClr val="556570"/>
+                </a:solidFill>
+                <a:latin typeface="Arial"/>
+                <a:ea typeface="Arial"/>
+                <a:cs typeface="Arial"/>
+              </a:defRPr>
+            </a:lvl5pPr>
+            <a:lvl6pPr algn="l">
+              <a:defRPr sz="1650">
+                <a:solidFill>
+                  <a:srgbClr val="556570"/>
+                </a:solidFill>
+                <a:latin typeface="Arial"/>
+                <a:ea typeface="Arial"/>
+                <a:cs typeface="Arial"/>
+              </a:defRPr>
+            </a:lvl6pPr>
+            <a:lvl7pPr algn="l">
+              <a:defRPr sz="1650">
+                <a:solidFill>
+                  <a:srgbClr val="556570"/>
+                </a:solidFill>
+                <a:latin typeface="Arial"/>
+                <a:ea typeface="Arial"/>
+                <a:cs typeface="Arial"/>
+              </a:defRPr>
+            </a:lvl7pPr>
+            <a:lvl8pPr algn="l">
+              <a:defRPr sz="1650">
+                <a:solidFill>
+                  <a:srgbClr val="556570"/>
+                </a:solidFill>
+                <a:latin typeface="Arial"/>
+                <a:ea typeface="Arial"/>
+                <a:cs typeface="Arial"/>
+              </a:defRPr>
+            </a:lvl8pPr>
+            <a:lvl9pPr algn="l">
+              <a:defRPr sz="1650">
+                <a:solidFill>
+                  <a:srgbClr val="556570"/>
+                </a:solidFill>
+                <a:latin typeface="Arial"/>
+                <a:ea typeface="Arial"/>
+                <a:cs typeface="Arial"/>
+              </a:defRPr>
+            </a:lvl9pPr>
+          </a:lstStyle>
+          <a:p xmlns:a="http://schemas.openxmlformats.org/drawingml/2006/main">
+            <a:pPr algn="l">
+              <a:defRPr sz="1650">
+                <a:solidFill>
+                  <a:srgbClr val="556570"/>
+                </a:solidFill>
+                <a:latin typeface="Arial"/>
+                <a:ea typeface="Arial"/>
+                <a:cs typeface="Arial"/>
+              </a:defRPr>
+            </a:pPr>
+            <a:r>
+              <a:rPr sz="1650">
+                <a:solidFill>
+                  <a:srgbClr val="556570"/>
+                </a:solidFill>
+                <a:latin typeface="Arial"/>
+                <a:ea typeface="Arial"/>
+                <a:cs typeface="Arial"/>
+              </a:rPr>
+              <a:t>Surviving link</a:t>
+            </a:r>
+          </a:p>
+        </p:txBody>
+      </p:sp>
+      <p:sp>
+        <p:nvSpPr>
+          <p:cNvPr id="27" name="legend-failed-sample">
+            <a:extLst xmlns:a="http://schemas.openxmlformats.org/drawingml/2006/main">
+              <a:ext uri="{FF2B5EF4-FFF2-40B4-BE49-F238E27FC236}">
+                <a16:creationId xmlns:a16="http://schemas.microsoft.com/office/drawing/2014/main" id="{97EE908B-A65E-4983-B88C-E1E4E12095AF}"/>
+              </a:ext>
+            </a:extLst>
+          </p:cNvPr>
+          <p:cNvSpPr>
+            <a:spLocks xmlns:a="http://schemas.openxmlformats.org/drawingml/2006/main" noGrp="1"/>
+          </p:cNvSpPr>
+          <p:nvPr/>
+        </p:nvSpPr>
+        <p:spPr>
+          <a:xfrm xmlns:a="http://schemas.openxmlformats.org/drawingml/2006/main">
+            <a:off x="3429000" y="6162675"/>
+            <a:ext cx="514350" cy="0"/>
+          </a:xfrm>
+          <a:prstGeom xmlns:a="http://schemas.openxmlformats.org/drawingml/2006/main" prst="line">
+            <a:avLst/>
+          </a:prstGeom>
+          <a:noFill xmlns:a="http://schemas.openxmlformats.org/drawingml/2006/main"/>
+          <a:ln xmlns:a="http://schemas.openxmlformats.org/drawingml/2006/main" w="23813">
+            <a:solidFill>
+              <a:srgbClr val="C0392B"/>
+            </a:solidFill>
+            <a:prstDash val="dash"/>
+          </a:ln>
+        </p:spPr>
+      </p:sp>
+      <p:sp>
+        <p:nvSpPr>
+          <p:cNvPr id="28" name="legend-Failed link">
+            <a:extLst xmlns:a="http://schemas.openxmlformats.org/drawingml/2006/main">
+              <a:ext uri="{FF2B5EF4-FFF2-40B4-BE49-F238E27FC236}">
+                <a16:creationId xmlns:a16="http://schemas.microsoft.com/office/drawing/2014/main" id="{7BEB246F-1BCE-405D-AD7B-6229E0EFC502}"/>
+              </a:ext>
+            </a:extLst>
+          </p:cNvPr>
+          <p:cNvSpPr>
+            <a:spLocks xmlns:a="http://schemas.openxmlformats.org/drawingml/2006/main" noGrp="1"/>
+          </p:cNvSpPr>
+          <p:nvPr/>
+        </p:nvSpPr>
+        <p:spPr>
+          <a:xfrm xmlns:a="http://schemas.openxmlformats.org/drawingml/2006/main">
+            <a:off x="4076700" y="6019800"/>
+            <a:ext cx="1524000" cy="304800"/>
+          </a:xfrm>
+          <a:prstGeom xmlns:a="http://schemas.openxmlformats.org/drawingml/2006/main" prst="rect">
+            <a:avLst/>
+          </a:prstGeom>
+          <a:noFill xmlns:a="http://schemas.openxmlformats.org/drawingml/2006/main"/>
+          <a:ln xmlns:a="http://schemas.openxmlformats.org/drawingml/2006/main" w="0">
+            <a:noFill/>
+          </a:ln>
+        </p:spPr>
+        <p:txBody>
+          <a:bodyPr xmlns:a="http://schemas.openxmlformats.org/drawingml/2006/main" wrap="square" lIns="0" tIns="0" rIns="0" bIns="0" anchor="t">
+            <a:noAutofit/>
+          </a:bodyPr>
+          <a:lstStyle xmlns:a="http://schemas.openxmlformats.org/drawingml/2006/main">
+            <a:defPPr algn="l">
+              <a:defRPr sz="1650">
+                <a:solidFill>
+                  <a:srgbClr val="556570"/>
+                </a:solidFill>
+                <a:latin typeface="Arial"/>
+                <a:ea typeface="Arial"/>
+                <a:cs typeface="Arial"/>
+              </a:defRPr>
+            </a:defPPr>
+            <a:lvl1pPr algn="l">
+              <a:defRPr sz="1650">
+                <a:solidFill>
+                  <a:srgbClr val="556570"/>
+                </a:solidFill>
+                <a:latin typeface="Arial"/>
+                <a:ea typeface="Arial"/>
+                <a:cs typeface="Arial"/>
+              </a:defRPr>
+            </a:lvl1pPr>
+            <a:lvl2pPr algn="l">
+              <a:defRPr sz="1650">
+                <a:solidFill>
+                  <a:srgbClr val="556570"/>
+                </a:solidFill>
+                <a:latin typeface="Arial"/>
+                <a:ea typeface="Arial"/>
+                <a:cs typeface="Arial"/>
+              </a:defRPr>
+            </a:lvl2pPr>
+            <a:lvl3pPr algn="l">
+              <a:defRPr sz="1650">
+                <a:solidFill>
+                  <a:srgbClr val="556570"/>
+                </a:solidFill>
+                <a:latin typeface="Arial"/>
+                <a:ea typeface="Arial"/>
+                <a:cs typeface="Arial"/>
+              </a:defRPr>
+            </a:lvl3pPr>
+            <a:lvl4pPr algn="l">
+              <a:defRPr sz="1650">
+                <a:solidFill>
+                  <a:srgbClr val="556570"/>
+                </a:solidFill>
+                <a:latin typeface="Arial"/>
+                <a:ea typeface="Arial"/>
+                <a:cs typeface="Arial"/>
+              </a:defRPr>
+            </a:lvl4pPr>
+            <a:lvl5pPr algn="l">
+              <a:defRPr sz="1650">
+                <a:solidFill>
+                  <a:srgbClr val="556570"/>
+                </a:solidFill>
+                <a:latin typeface="Arial"/>
+                <a:ea typeface="Arial"/>
+                <a:cs typeface="Arial"/>
+              </a:defRPr>
+            </a:lvl5pPr>
+            <a:lvl6pPr algn="l">
+              <a:defRPr sz="1650">
+                <a:solidFill>
+                  <a:srgbClr val="556570"/>
+                </a:solidFill>
+                <a:latin typeface="Arial"/>
+                <a:ea typeface="Arial"/>
+                <a:cs typeface="Arial"/>
+              </a:defRPr>
+            </a:lvl6pPr>
+            <a:lvl7pPr algn="l">
+              <a:defRPr sz="1650">
+                <a:solidFill>
+                  <a:srgbClr val="556570"/>
+                </a:solidFill>
+                <a:latin typeface="Arial"/>
+                <a:ea typeface="Arial"/>
+                <a:cs typeface="Arial"/>
+              </a:defRPr>
+            </a:lvl7pPr>
+            <a:lvl8pPr algn="l">
+              <a:defRPr sz="1650">
+                <a:solidFill>
+                  <a:srgbClr val="556570"/>
+                </a:solidFill>
+                <a:latin typeface="Arial"/>
+                <a:ea typeface="Arial"/>
+                <a:cs typeface="Arial"/>
+              </a:defRPr>
+            </a:lvl8pPr>
+            <a:lvl9pPr algn="l">
+              <a:defRPr sz="1650">
+                <a:solidFill>
+                  <a:srgbClr val="556570"/>
+                </a:solidFill>
+                <a:latin typeface="Arial"/>
+                <a:ea typeface="Arial"/>
+                <a:cs typeface="Arial"/>
+              </a:defRPr>
+            </a:lvl9pPr>
+          </a:lstStyle>
+          <a:p xmlns:a="http://schemas.openxmlformats.org/drawingml/2006/main">
+            <a:pPr algn="l">
+              <a:defRPr sz="1650">
+                <a:solidFill>
+                  <a:srgbClr val="556570"/>
+                </a:solidFill>
+                <a:latin typeface="Arial"/>
+                <a:ea typeface="Arial"/>
+                <a:cs typeface="Arial"/>
+              </a:defRPr>
+            </a:pPr>
+            <a:r>
+              <a:rPr sz="1650">
+                <a:solidFill>
+                  <a:srgbClr val="556570"/>
+                </a:solidFill>
+                <a:latin typeface="Arial"/>
+                <a:ea typeface="Arial"/>
+                <a:cs typeface="Arial"/>
+              </a:rPr>
+              <a:t>Failed link</a:t>
+            </a:r>
+          </a:p>
+        </p:txBody>
+      </p:sp>
+      <p:cxnSp>
+        <p:nvCxnSpPr>
+          <p:cNvPr id="29" name="legend-forwarding-sample">
+            <a:extLst xmlns:a="http://schemas.openxmlformats.org/drawingml/2006/main">
+              <a:ext uri="{FF2B5EF4-FFF2-40B4-BE49-F238E27FC236}">
+                <a16:creationId xmlns:a16="http://schemas.microsoft.com/office/drawing/2014/main" id="{B9E15206-52AE-4BD8-854D-45C285FF5C6B}"/>
+              </a:ext>
+            </a:extLst>
+          </p:cNvPr>
+          <p:cNvCxnSpPr/>
+          <p:nvPr/>
+        </p:nvCxnSpPr>
+        <p:spPr>
+          <a:xfrm xmlns:a="http://schemas.openxmlformats.org/drawingml/2006/main">
+            <a:off x="5857875" y="6162675"/>
+            <a:ext cx="514350" cy="0"/>
+          </a:xfrm>
+          <a:prstGeom xmlns:a="http://schemas.openxmlformats.org/drawingml/2006/main" prst="straightConnector1">
+            <a:avLst/>
+          </a:prstGeom>
+          <a:ln xmlns:a="http://schemas.openxmlformats.org/drawingml/2006/main" w="28575">
+            <a:solidFill>
+              <a:srgbClr val="1677B8"/>
+            </a:solidFill>
+            <a:prstDash val="solid"/>
+            <a:headEnd type="stealth" w="sm" len="sm"/>
+            <a:tailEnd type="stealth" w="sm" len="sm"/>
+          </a:ln>
+        </p:spPr>
+      </p:cxnSp>
+      <p:sp>
+        <p:nvSpPr>
+          <p:cNvPr id="30" name="legend-Forwarding path">
+            <a:extLst xmlns:a="http://schemas.openxmlformats.org/drawingml/2006/main">
+              <a:ext uri="{FF2B5EF4-FFF2-40B4-BE49-F238E27FC236}">
+                <a16:creationId xmlns:a16="http://schemas.microsoft.com/office/drawing/2014/main" id="{BF1FF53A-052C-4D3F-8D7C-9125BF6E3A45}"/>
+              </a:ext>
+            </a:extLst>
+          </p:cNvPr>
+          <p:cNvSpPr>
+            <a:spLocks xmlns:a="http://schemas.openxmlformats.org/drawingml/2006/main" noGrp="1"/>
+          </p:cNvSpPr>
+          <p:nvPr/>
+        </p:nvSpPr>
+        <p:spPr>
+          <a:xfrm xmlns:a="http://schemas.openxmlformats.org/drawingml/2006/main">
+            <a:off x="6534150" y="6019800"/>
+            <a:ext cx="2095500" cy="304800"/>
+          </a:xfrm>
+          <a:prstGeom xmlns:a="http://schemas.openxmlformats.org/drawingml/2006/main" prst="rect">
+            <a:avLst/>
+          </a:prstGeom>
+          <a:noFill xmlns:a="http://schemas.openxmlformats.org/drawingml/2006/main"/>
+          <a:ln xmlns:a="http://schemas.openxmlformats.org/drawingml/2006/main" w="0">
+            <a:noFill/>
+          </a:ln>
+        </p:spPr>
+        <p:txBody>
+          <a:bodyPr xmlns:a="http://schemas.openxmlformats.org/drawingml/2006/main" wrap="square" lIns="0" tIns="0" rIns="0" bIns="0" anchor="t">
+            <a:noAutofit/>
+          </a:bodyPr>
+          <a:lstStyle xmlns:a="http://schemas.openxmlformats.org/drawingml/2006/main">
+            <a:defPPr algn="l">
+              <a:defRPr sz="1650">
+                <a:solidFill>
+                  <a:srgbClr val="556570"/>
+                </a:solidFill>
+                <a:latin typeface="Arial"/>
+                <a:ea typeface="Arial"/>
+                <a:cs typeface="Arial"/>
+              </a:defRPr>
+            </a:defPPr>
+            <a:lvl1pPr algn="l">
+              <a:defRPr sz="1650">
+                <a:solidFill>
+                  <a:srgbClr val="556570"/>
+                </a:solidFill>
+                <a:latin typeface="Arial"/>
+                <a:ea typeface="Arial"/>
+                <a:cs typeface="Arial"/>
+              </a:defRPr>
+            </a:lvl1pPr>
+            <a:lvl2pPr algn="l">
+              <a:defRPr sz="1650">
+                <a:solidFill>
+                  <a:srgbClr val="556570"/>
+                </a:solidFill>
+                <a:latin typeface="Arial"/>
+                <a:ea typeface="Arial"/>
+                <a:cs typeface="Arial"/>
+              </a:defRPr>
+            </a:lvl2pPr>
+            <a:lvl3pPr algn="l">
+              <a:defRPr sz="1650">
+                <a:solidFill>
+                  <a:srgbClr val="556570"/>
+                </a:solidFill>
+                <a:latin typeface="Arial"/>
+                <a:ea typeface="Arial"/>
+                <a:cs typeface="Arial"/>
+              </a:defRPr>
+            </a:lvl3pPr>
+            <a:lvl4pPr algn="l">
+              <a:defRPr sz="1650">
+                <a:solidFill>
+                  <a:srgbClr val="556570"/>
+                </a:solidFill>
+                <a:latin typeface="Arial"/>
+                <a:ea typeface="Arial"/>
+                <a:cs typeface="Arial"/>
+              </a:defRPr>
+            </a:lvl4pPr>
+            <a:lvl5pPr algn="l">
+              <a:defRPr sz="1650">
+                <a:solidFill>
+                  <a:srgbClr val="556570"/>
+                </a:solidFill>
+                <a:latin typeface="Arial"/>
+                <a:ea typeface="Arial"/>
+                <a:cs typeface="Arial"/>
+              </a:defRPr>
+            </a:lvl5pPr>
+            <a:lvl6pPr algn="l">
+              <a:defRPr sz="1650">
+                <a:solidFill>
+                  <a:srgbClr val="556570"/>
+                </a:solidFill>
+                <a:latin typeface="Arial"/>
+                <a:ea typeface="Arial"/>
+                <a:cs typeface="Arial"/>
+              </a:defRPr>
+            </a:lvl6pPr>
+            <a:lvl7pPr algn="l">
+              <a:defRPr sz="1650">
+                <a:solidFill>
+                  <a:srgbClr val="556570"/>
+                </a:solidFill>
+                <a:latin typeface="Arial"/>
+                <a:ea typeface="Arial"/>
+                <a:cs typeface="Arial"/>
+              </a:defRPr>
+            </a:lvl7pPr>
+            <a:lvl8pPr algn="l">
+              <a:defRPr sz="1650">
+                <a:solidFill>
+                  <a:srgbClr val="556570"/>
+                </a:solidFill>
+                <a:latin typeface="Arial"/>
+                <a:ea typeface="Arial"/>
+                <a:cs typeface="Arial"/>
+              </a:defRPr>
+            </a:lvl8pPr>
+            <a:lvl9pPr algn="l">
+              <a:defRPr sz="1650">
+                <a:solidFill>
+                  <a:srgbClr val="556570"/>
+                </a:solidFill>
+                <a:latin typeface="Arial"/>
+                <a:ea typeface="Arial"/>
+                <a:cs typeface="Arial"/>
+              </a:defRPr>
+            </a:lvl9pPr>
+          </a:lstStyle>
+          <a:p xmlns:a="http://schemas.openxmlformats.org/drawingml/2006/main">
+            <a:pPr algn="l">
+              <a:defRPr sz="1650">
+                <a:solidFill>
+                  <a:srgbClr val="556570"/>
+                </a:solidFill>
+                <a:latin typeface="Arial"/>
+                <a:ea typeface="Arial"/>
+                <a:cs typeface="Arial"/>
+              </a:defRPr>
+            </a:pPr>
+            <a:r>
+              <a:rPr sz="1650">
+                <a:solidFill>
+                  <a:srgbClr val="556570"/>
+                </a:solidFill>
+                <a:latin typeface="Arial"/>
+                <a:ea typeface="Arial"/>
+                <a:cs typeface="Arial"/>
+              </a:rPr>
+              <a:t>Forwarding path</a:t>
+            </a:r>
+          </a:p>
+        </p:txBody>
+      </p:sp>
+      <p:sp>
+        <p:nvSpPr>
+          <p:cNvPr id="31" name="legend-leader-sample">
+            <a:extLst xmlns:a="http://schemas.openxmlformats.org/drawingml/2006/main">
+              <a:ext uri="{FF2B5EF4-FFF2-40B4-BE49-F238E27FC236}">
+                <a16:creationId xmlns:a16="http://schemas.microsoft.com/office/drawing/2014/main" id="{31FFFCEB-DDEE-4A09-A316-386233D13CAA}"/>
+              </a:ext>
+            </a:extLst>
+          </p:cNvPr>
+          <p:cNvSpPr>
+            <a:spLocks xmlns:a="http://schemas.openxmlformats.org/drawingml/2006/main" noGrp="1"/>
+          </p:cNvSpPr>
+          <p:nvPr/>
+        </p:nvSpPr>
+        <p:spPr>
+          <a:xfrm xmlns:a="http://schemas.openxmlformats.org/drawingml/2006/main">
+            <a:off x="9096375" y="6010275"/>
+            <a:ext cx="266700" cy="266700"/>
+          </a:xfrm>
+          <a:prstGeom xmlns:a="http://schemas.openxmlformats.org/drawingml/2006/main" prst="ellipse">
+            <a:avLst/>
+          </a:prstGeom>
+          <a:solidFill xmlns:a="http://schemas.openxmlformats.org/drawingml/2006/main">
+            <a:srgbClr val="F6C85F"/>
+          </a:solidFill>
+          <a:ln xmlns:a="http://schemas.openxmlformats.org/drawingml/2006/main" w="28575">
+            <a:solidFill>
+              <a:srgbClr val="374151"/>
+            </a:solidFill>
+            <a:prstDash val="solid"/>
+          </a:ln>
+        </p:spPr>
+      </p:sp>
+      <p:sp>
+        <p:nvSpPr>
+          <p:cNvPr id="32" name="legend-Initial leader">
+            <a:extLst xmlns:a="http://schemas.openxmlformats.org/drawingml/2006/main">
+              <a:ext uri="{FF2B5EF4-FFF2-40B4-BE49-F238E27FC236}">
+                <a16:creationId xmlns:a16="http://schemas.microsoft.com/office/drawing/2014/main" id="{A778ED99-5E05-42E8-B87C-485409F50CD2}"/>
+              </a:ext>
+            </a:extLst>
+          </p:cNvPr>
+          <p:cNvSpPr>
+            <a:spLocks xmlns:a="http://schemas.openxmlformats.org/drawingml/2006/main" noGrp="1"/>
+          </p:cNvSpPr>
+          <p:nvPr/>
+        </p:nvSpPr>
+        <p:spPr>
+          <a:xfrm xmlns:a="http://schemas.openxmlformats.org/drawingml/2006/main">
+            <a:off x="9515475" y="6019800"/>
+            <a:ext cx="1990725" cy="304800"/>
+          </a:xfrm>
+          <a:prstGeom xmlns:a="http://schemas.openxmlformats.org/drawingml/2006/main" prst="rect">
+            <a:avLst/>
+          </a:prstGeom>
+          <a:noFill xmlns:a="http://schemas.openxmlformats.org/drawingml/2006/main"/>
+          <a:ln xmlns:a="http://schemas.openxmlformats.org/drawingml/2006/main" w="0">
+            <a:noFill/>
+          </a:ln>
+        </p:spPr>
+        <p:txBody>
+          <a:bodyPr xmlns:a="http://schemas.openxmlformats.org/drawingml/2006/main" wrap="square" lIns="0" tIns="0" rIns="0" bIns="0" anchor="t">
+            <a:noAutofit/>
+          </a:bodyPr>
+          <a:lstStyle xmlns:a="http://schemas.openxmlformats.org/drawingml/2006/main">
+            <a:defPPr algn="l">
+              <a:defRPr sz="1650">
+                <a:solidFill>
+                  <a:srgbClr val="556570"/>
+                </a:solidFill>
+                <a:latin typeface="Arial"/>
+                <a:ea typeface="Arial"/>
+                <a:cs typeface="Arial"/>
+              </a:defRPr>
+            </a:defPPr>
+            <a:lvl1pPr algn="l">
+              <a:defRPr sz="1650">
+                <a:solidFill>
+                  <a:srgbClr val="556570"/>
+                </a:solidFill>
+                <a:latin typeface="Arial"/>
+                <a:ea typeface="Arial"/>
+                <a:cs typeface="Arial"/>
+              </a:defRPr>
+            </a:lvl1pPr>
+            <a:lvl2pPr algn="l">
+              <a:defRPr sz="1650">
+                <a:solidFill>
+                  <a:srgbClr val="556570"/>
+                </a:solidFill>
+                <a:latin typeface="Arial"/>
+                <a:ea typeface="Arial"/>
+                <a:cs typeface="Arial"/>
+              </a:defRPr>
+            </a:lvl2pPr>
+            <a:lvl3pPr algn="l">
+              <a:defRPr sz="1650">
+                <a:solidFill>
+                  <a:srgbClr val="556570"/>
+                </a:solidFill>
+                <a:latin typeface="Arial"/>
+                <a:ea typeface="Arial"/>
+                <a:cs typeface="Arial"/>
+              </a:defRPr>
+            </a:lvl3pPr>
+            <a:lvl4pPr algn="l">
+              <a:defRPr sz="1650">
+                <a:solidFill>
+                  <a:srgbClr val="556570"/>
+                </a:solidFill>
+                <a:latin typeface="Arial"/>
+                <a:ea typeface="Arial"/>
+                <a:cs typeface="Arial"/>
+              </a:defRPr>
+            </a:lvl4pPr>
+            <a:lvl5pPr algn="l">
+              <a:defRPr sz="1650">
+                <a:solidFill>
+                  <a:srgbClr val="556570"/>
+                </a:solidFill>
+                <a:latin typeface="Arial"/>
+                <a:ea typeface="Arial"/>
+                <a:cs typeface="Arial"/>
+              </a:defRPr>
+            </a:lvl5pPr>
+            <a:lvl6pPr algn="l">
+              <a:defRPr sz="1650">
+                <a:solidFill>
+                  <a:srgbClr val="556570"/>
+                </a:solidFill>
+                <a:latin typeface="Arial"/>
+                <a:ea typeface="Arial"/>
+                <a:cs typeface="Arial"/>
+              </a:defRPr>
+            </a:lvl6pPr>
+            <a:lvl7pPr algn="l">
+              <a:defRPr sz="1650">
+                <a:solidFill>
+                  <a:srgbClr val="556570"/>
+                </a:solidFill>
+                <a:latin typeface="Arial"/>
+                <a:ea typeface="Arial"/>
+                <a:cs typeface="Arial"/>
+              </a:defRPr>
+            </a:lvl7pPr>
+            <a:lvl8pPr algn="l">
+              <a:defRPr sz="1650">
+                <a:solidFill>
+                  <a:srgbClr val="556570"/>
+                </a:solidFill>
+                <a:latin typeface="Arial"/>
+                <a:ea typeface="Arial"/>
+                <a:cs typeface="Arial"/>
+              </a:defRPr>
+            </a:lvl8pPr>
+            <a:lvl9pPr algn="l">
+              <a:defRPr sz="1650">
+                <a:solidFill>
+                  <a:srgbClr val="556570"/>
+                </a:solidFill>
+                <a:latin typeface="Arial"/>
+                <a:ea typeface="Arial"/>
+                <a:cs typeface="Arial"/>
+              </a:defRPr>
+            </a:lvl9pPr>
+          </a:lstStyle>
+          <a:p xmlns:a="http://schemas.openxmlformats.org/drawingml/2006/main">
+            <a:pPr algn="l">
+              <a:defRPr sz="1650">
+                <a:solidFill>
+                  <a:srgbClr val="556570"/>
+                </a:solidFill>
+                <a:latin typeface="Arial"/>
+                <a:ea typeface="Arial"/>
+                <a:cs typeface="Arial"/>
+              </a:defRPr>
+            </a:pPr>
+            <a:r>
+              <a:rPr sz="1650">
+                <a:solidFill>
+                  <a:srgbClr val="556570"/>
+                </a:solidFill>
+                <a:latin typeface="Arial"/>
+                <a:ea typeface="Arial"/>
+                <a:cs typeface="Arial"/>
+              </a:rPr>
+              <a:t>Initial leader</a:t>
             </a:r>
           </a:p>
         </p:txBody>

--- a/docs/presentation/II2202-final-presentation.pptx
+++ b/docs/presentation/II2202-final-presentation.pptx
@@ -11141,6 +11141,7 @@
               </a:defRPr>
             </a:defPPr>
             <a:lvl1pPr algn="l">
+              <a:buNone/>
               <a:defRPr sz="3300" b="1">
                 <a:solidFill>
                   <a:srgbClr val="173247"/>
@@ -11151,6 +11152,7 @@
               </a:defRPr>
             </a:lvl1pPr>
             <a:lvl2pPr algn="l">
+              <a:buNone/>
               <a:defRPr sz="3300" b="1">
                 <a:solidFill>
                   <a:srgbClr val="173247"/>
@@ -11161,6 +11163,7 @@
               </a:defRPr>
             </a:lvl2pPr>
             <a:lvl3pPr algn="l">
+              <a:buNone/>
               <a:defRPr sz="3300" b="1">
                 <a:solidFill>
                   <a:srgbClr val="173247"/>
@@ -11171,6 +11174,7 @@
               </a:defRPr>
             </a:lvl3pPr>
             <a:lvl4pPr algn="l">
+              <a:buNone/>
               <a:defRPr sz="3300" b="1">
                 <a:solidFill>
                   <a:srgbClr val="173247"/>
@@ -11181,6 +11185,7 @@
               </a:defRPr>
             </a:lvl4pPr>
             <a:lvl5pPr algn="l">
+              <a:buNone/>
               <a:defRPr sz="3300" b="1">
                 <a:solidFill>
                   <a:srgbClr val="173247"/>
@@ -11191,6 +11196,7 @@
               </a:defRPr>
             </a:lvl5pPr>
             <a:lvl6pPr algn="l">
+              <a:buNone/>
               <a:defRPr sz="3300" b="1">
                 <a:solidFill>
                   <a:srgbClr val="173247"/>
@@ -11201,6 +11207,7 @@
               </a:defRPr>
             </a:lvl6pPr>
             <a:lvl7pPr algn="l">
+              <a:buNone/>
               <a:defRPr sz="3300" b="1">
                 <a:solidFill>
                   <a:srgbClr val="173247"/>
@@ -11211,6 +11218,7 @@
               </a:defRPr>
             </a:lvl7pPr>
             <a:lvl8pPr algn="l">
+              <a:buNone/>
               <a:defRPr sz="3300" b="1">
                 <a:solidFill>
                   <a:srgbClr val="173247"/>
@@ -11221,6 +11229,7 @@
               </a:defRPr>
             </a:lvl8pPr>
             <a:lvl9pPr algn="l">
+              <a:buNone/>
               <a:defRPr sz="3300" b="1">
                 <a:solidFill>
                   <a:srgbClr val="173247"/>
@@ -11300,6 +11309,7 @@
               </a:defRPr>
             </a:defPPr>
             <a:lvl1pPr algn="r">
+              <a:buNone/>
               <a:defRPr sz="1500" b="0">
                 <a:solidFill>
                   <a:srgbClr val="556570"/>
@@ -11310,6 +11320,7 @@
               </a:defRPr>
             </a:lvl1pPr>
             <a:lvl2pPr algn="r">
+              <a:buNone/>
               <a:defRPr sz="1500" b="0">
                 <a:solidFill>
                   <a:srgbClr val="556570"/>
@@ -11320,6 +11331,7 @@
               </a:defRPr>
             </a:lvl2pPr>
             <a:lvl3pPr algn="r">
+              <a:buNone/>
               <a:defRPr sz="1500" b="0">
                 <a:solidFill>
                   <a:srgbClr val="556570"/>
@@ -11330,6 +11342,7 @@
               </a:defRPr>
             </a:lvl3pPr>
             <a:lvl4pPr algn="r">
+              <a:buNone/>
               <a:defRPr sz="1500" b="0">
                 <a:solidFill>
                   <a:srgbClr val="556570"/>
@@ -11340,6 +11353,7 @@
               </a:defRPr>
             </a:lvl4pPr>
             <a:lvl5pPr algn="r">
+              <a:buNone/>
               <a:defRPr sz="1500" b="0">
                 <a:solidFill>
                   <a:srgbClr val="556570"/>
@@ -11350,6 +11364,7 @@
               </a:defRPr>
             </a:lvl5pPr>
             <a:lvl6pPr algn="r">
+              <a:buNone/>
               <a:defRPr sz="1500" b="0">
                 <a:solidFill>
                   <a:srgbClr val="556570"/>
@@ -11360,6 +11375,7 @@
               </a:defRPr>
             </a:lvl6pPr>
             <a:lvl7pPr algn="r">
+              <a:buNone/>
               <a:defRPr sz="1500" b="0">
                 <a:solidFill>
                   <a:srgbClr val="556570"/>
@@ -11370,6 +11386,7 @@
               </a:defRPr>
             </a:lvl7pPr>
             <a:lvl8pPr algn="r">
+              <a:buNone/>
               <a:defRPr sz="1500" b="0">
                 <a:solidFill>
                   <a:srgbClr val="556570"/>
@@ -11380,6 +11397,7 @@
               </a:defRPr>
             </a:lvl8pPr>
             <a:lvl9pPr algn="r">
+              <a:buNone/>
               <a:defRPr sz="1500" b="0">
                 <a:solidFill>
                   <a:srgbClr val="556570"/>
@@ -11459,6 +11477,7 @@
               </a:defRPr>
             </a:defPPr>
             <a:lvl1pPr algn="l">
+              <a:buNone/>
               <a:defRPr sz="7500" b="1">
                 <a:solidFill>
                   <a:srgbClr val="007E87"/>
@@ -11469,6 +11488,7 @@
               </a:defRPr>
             </a:lvl1pPr>
             <a:lvl2pPr algn="l">
+              <a:buNone/>
               <a:defRPr sz="7500" b="1">
                 <a:solidFill>
                   <a:srgbClr val="007E87"/>
@@ -11479,6 +11499,7 @@
               </a:defRPr>
             </a:lvl2pPr>
             <a:lvl3pPr algn="l">
+              <a:buNone/>
               <a:defRPr sz="7500" b="1">
                 <a:solidFill>
                   <a:srgbClr val="007E87"/>
@@ -11489,6 +11510,7 @@
               </a:defRPr>
             </a:lvl3pPr>
             <a:lvl4pPr algn="l">
+              <a:buNone/>
               <a:defRPr sz="7500" b="1">
                 <a:solidFill>
                   <a:srgbClr val="007E87"/>
@@ -11499,6 +11521,7 @@
               </a:defRPr>
             </a:lvl4pPr>
             <a:lvl5pPr algn="l">
+              <a:buNone/>
               <a:defRPr sz="7500" b="1">
                 <a:solidFill>
                   <a:srgbClr val="007E87"/>
@@ -11509,6 +11532,7 @@
               </a:defRPr>
             </a:lvl5pPr>
             <a:lvl6pPr algn="l">
+              <a:buNone/>
               <a:defRPr sz="7500" b="1">
                 <a:solidFill>
                   <a:srgbClr val="007E87"/>
@@ -11519,6 +11543,7 @@
               </a:defRPr>
             </a:lvl6pPr>
             <a:lvl7pPr algn="l">
+              <a:buNone/>
               <a:defRPr sz="7500" b="1">
                 <a:solidFill>
                   <a:srgbClr val="007E87"/>
@@ -11529,6 +11554,7 @@
               </a:defRPr>
             </a:lvl7pPr>
             <a:lvl8pPr algn="l">
+              <a:buNone/>
               <a:defRPr sz="7500" b="1">
                 <a:solidFill>
                   <a:srgbClr val="007E87"/>
@@ -11539,6 +11565,7 @@
               </a:defRPr>
             </a:lvl8pPr>
             <a:lvl9pPr algn="l">
+              <a:buNone/>
               <a:defRPr sz="7500" b="1">
                 <a:solidFill>
                   <a:srgbClr val="007E87"/>
@@ -11618,6 +11645,7 @@
               </a:defRPr>
             </a:defPPr>
             <a:lvl1pPr algn="l">
+              <a:buNone/>
               <a:defRPr sz="2400" b="0">
                 <a:solidFill>
                   <a:srgbClr val="173247"/>
@@ -11628,6 +11656,7 @@
               </a:defRPr>
             </a:lvl1pPr>
             <a:lvl2pPr algn="l">
+              <a:buNone/>
               <a:defRPr sz="2400" b="0">
                 <a:solidFill>
                   <a:srgbClr val="173247"/>
@@ -11638,6 +11667,7 @@
               </a:defRPr>
             </a:lvl2pPr>
             <a:lvl3pPr algn="l">
+              <a:buNone/>
               <a:defRPr sz="2400" b="0">
                 <a:solidFill>
                   <a:srgbClr val="173247"/>
@@ -11648,6 +11678,7 @@
               </a:defRPr>
             </a:lvl3pPr>
             <a:lvl4pPr algn="l">
+              <a:buNone/>
               <a:defRPr sz="2400" b="0">
                 <a:solidFill>
                   <a:srgbClr val="173247"/>
@@ -11658,6 +11689,7 @@
               </a:defRPr>
             </a:lvl4pPr>
             <a:lvl5pPr algn="l">
+              <a:buNone/>
               <a:defRPr sz="2400" b="0">
                 <a:solidFill>
                   <a:srgbClr val="173247"/>
@@ -11668,6 +11700,7 @@
               </a:defRPr>
             </a:lvl5pPr>
             <a:lvl6pPr algn="l">
+              <a:buNone/>
               <a:defRPr sz="2400" b="0">
                 <a:solidFill>
                   <a:srgbClr val="173247"/>
@@ -11678,6 +11711,7 @@
               </a:defRPr>
             </a:lvl6pPr>
             <a:lvl7pPr algn="l">
+              <a:buNone/>
               <a:defRPr sz="2400" b="0">
                 <a:solidFill>
                   <a:srgbClr val="173247"/>
@@ -11688,6 +11722,7 @@
               </a:defRPr>
             </a:lvl7pPr>
             <a:lvl8pPr algn="l">
+              <a:buNone/>
               <a:defRPr sz="2400" b="0">
                 <a:solidFill>
                   <a:srgbClr val="173247"/>
@@ -11698,6 +11733,7 @@
               </a:defRPr>
             </a:lvl8pPr>
             <a:lvl9pPr algn="l">
+              <a:buNone/>
               <a:defRPr sz="2400" b="0">
                 <a:solidFill>
                   <a:srgbClr val="173247"/>
@@ -11777,6 +11813,7 @@
               </a:defRPr>
             </a:defPPr>
             <a:lvl1pPr algn="l">
+              <a:buNone/>
               <a:defRPr sz="2100" b="0">
                 <a:solidFill>
                   <a:srgbClr val="173247"/>
@@ -11787,6 +11824,7 @@
               </a:defRPr>
             </a:lvl1pPr>
             <a:lvl2pPr algn="l">
+              <a:buNone/>
               <a:defRPr sz="2100" b="0">
                 <a:solidFill>
                   <a:srgbClr val="173247"/>
@@ -11797,6 +11835,7 @@
               </a:defRPr>
             </a:lvl2pPr>
             <a:lvl3pPr algn="l">
+              <a:buNone/>
               <a:defRPr sz="2100" b="0">
                 <a:solidFill>
                   <a:srgbClr val="173247"/>
@@ -11807,6 +11846,7 @@
               </a:defRPr>
             </a:lvl3pPr>
             <a:lvl4pPr algn="l">
+              <a:buNone/>
               <a:defRPr sz="2100" b="0">
                 <a:solidFill>
                   <a:srgbClr val="173247"/>
@@ -11817,6 +11857,7 @@
               </a:defRPr>
             </a:lvl4pPr>
             <a:lvl5pPr algn="l">
+              <a:buNone/>
               <a:defRPr sz="2100" b="0">
                 <a:solidFill>
                   <a:srgbClr val="173247"/>
@@ -11827,6 +11868,7 @@
               </a:defRPr>
             </a:lvl5pPr>
             <a:lvl6pPr algn="l">
+              <a:buNone/>
               <a:defRPr sz="2100" b="0">
                 <a:solidFill>
                   <a:srgbClr val="173247"/>
@@ -11837,6 +11879,7 @@
               </a:defRPr>
             </a:lvl6pPr>
             <a:lvl7pPr algn="l">
+              <a:buNone/>
               <a:defRPr sz="2100" b="0">
                 <a:solidFill>
                   <a:srgbClr val="173247"/>
@@ -11847,6 +11890,7 @@
               </a:defRPr>
             </a:lvl7pPr>
             <a:lvl8pPr algn="l">
+              <a:buNone/>
               <a:defRPr sz="2100" b="0">
                 <a:solidFill>
                   <a:srgbClr val="173247"/>
@@ -11857,6 +11901,7 @@
               </a:defRPr>
             </a:lvl8pPr>
             <a:lvl9pPr algn="l">
+              <a:buNone/>
               <a:defRPr sz="2100" b="0">
                 <a:solidFill>
                   <a:srgbClr val="173247"/>
@@ -12008,6 +12053,7 @@
               </a:defRPr>
             </a:defPPr>
             <a:lvl1pPr algn="l">
+              <a:buNone/>
               <a:defRPr sz="2400" b="1">
                 <a:solidFill>
                   <a:srgbClr val="173247"/>
@@ -12018,6 +12064,7 @@
               </a:defRPr>
             </a:lvl1pPr>
             <a:lvl2pPr algn="l">
+              <a:buNone/>
               <a:defRPr sz="2400" b="1">
                 <a:solidFill>
                   <a:srgbClr val="173247"/>
@@ -12028,6 +12075,7 @@
               </a:defRPr>
             </a:lvl2pPr>
             <a:lvl3pPr algn="l">
+              <a:buNone/>
               <a:defRPr sz="2400" b="1">
                 <a:solidFill>
                   <a:srgbClr val="173247"/>
@@ -12038,6 +12086,7 @@
               </a:defRPr>
             </a:lvl3pPr>
             <a:lvl4pPr algn="l">
+              <a:buNone/>
               <a:defRPr sz="2400" b="1">
                 <a:solidFill>
                   <a:srgbClr val="173247"/>
@@ -12048,6 +12097,7 @@
               </a:defRPr>
             </a:lvl4pPr>
             <a:lvl5pPr algn="l">
+              <a:buNone/>
               <a:defRPr sz="2400" b="1">
                 <a:solidFill>
                   <a:srgbClr val="173247"/>
@@ -12058,6 +12108,7 @@
               </a:defRPr>
             </a:lvl5pPr>
             <a:lvl6pPr algn="l">
+              <a:buNone/>
               <a:defRPr sz="2400" b="1">
                 <a:solidFill>
                   <a:srgbClr val="173247"/>
@@ -12068,6 +12119,7 @@
               </a:defRPr>
             </a:lvl6pPr>
             <a:lvl7pPr algn="l">
+              <a:buNone/>
               <a:defRPr sz="2400" b="1">
                 <a:solidFill>
                   <a:srgbClr val="173247"/>
@@ -12078,6 +12130,7 @@
               </a:defRPr>
             </a:lvl7pPr>
             <a:lvl8pPr algn="l">
+              <a:buNone/>
               <a:defRPr sz="2400" b="1">
                 <a:solidFill>
                   <a:srgbClr val="173247"/>
@@ -12088,6 +12141,7 @@
               </a:defRPr>
             </a:lvl8pPr>
             <a:lvl9pPr algn="l">
+              <a:buNone/>
               <a:defRPr sz="2400" b="1">
                 <a:solidFill>
                   <a:srgbClr val="173247"/>
@@ -12167,6 +12221,7 @@
               </a:defRPr>
             </a:defPPr>
             <a:lvl1pPr algn="l">
+              <a:buNone/>
               <a:defRPr sz="2100" b="0">
                 <a:solidFill>
                   <a:srgbClr val="173247"/>
@@ -12177,6 +12232,7 @@
               </a:defRPr>
             </a:lvl1pPr>
             <a:lvl2pPr algn="l">
+              <a:buNone/>
               <a:defRPr sz="2100" b="0">
                 <a:solidFill>
                   <a:srgbClr val="173247"/>
@@ -12187,6 +12243,7 @@
               </a:defRPr>
             </a:lvl2pPr>
             <a:lvl3pPr algn="l">
+              <a:buNone/>
               <a:defRPr sz="2100" b="0">
                 <a:solidFill>
                   <a:srgbClr val="173247"/>
@@ -12197,6 +12254,7 @@
               </a:defRPr>
             </a:lvl3pPr>
             <a:lvl4pPr algn="l">
+              <a:buNone/>
               <a:defRPr sz="2100" b="0">
                 <a:solidFill>
                   <a:srgbClr val="173247"/>
@@ -12207,6 +12265,7 @@
               </a:defRPr>
             </a:lvl4pPr>
             <a:lvl5pPr algn="l">
+              <a:buNone/>
               <a:defRPr sz="2100" b="0">
                 <a:solidFill>
                   <a:srgbClr val="173247"/>
@@ -12217,6 +12276,7 @@
               </a:defRPr>
             </a:lvl5pPr>
             <a:lvl6pPr algn="l">
+              <a:buNone/>
               <a:defRPr sz="2100" b="0">
                 <a:solidFill>
                   <a:srgbClr val="173247"/>
@@ -12227,6 +12287,7 @@
               </a:defRPr>
             </a:lvl6pPr>
             <a:lvl7pPr algn="l">
+              <a:buNone/>
               <a:defRPr sz="2100" b="0">
                 <a:solidFill>
                   <a:srgbClr val="173247"/>
@@ -12237,6 +12298,7 @@
               </a:defRPr>
             </a:lvl7pPr>
             <a:lvl8pPr algn="l">
+              <a:buNone/>
               <a:defRPr sz="2100" b="0">
                 <a:solidFill>
                   <a:srgbClr val="173247"/>
@@ -12247,6 +12309,7 @@
               </a:defRPr>
             </a:lvl8pPr>
             <a:lvl9pPr algn="l">
+              <a:buNone/>
               <a:defRPr sz="2100" b="0">
                 <a:solidFill>
                   <a:srgbClr val="173247"/>
@@ -12326,6 +12389,7 @@
               </a:defRPr>
             </a:defPPr>
             <a:lvl1pPr algn="l">
+              <a:buNone/>
               <a:defRPr sz="2025" b="0">
                 <a:solidFill>
                   <a:srgbClr val="173247"/>
@@ -12336,6 +12400,7 @@
               </a:defRPr>
             </a:lvl1pPr>
             <a:lvl2pPr algn="l">
+              <a:buNone/>
               <a:defRPr sz="2025" b="0">
                 <a:solidFill>
                   <a:srgbClr val="173247"/>
@@ -12346,6 +12411,7 @@
               </a:defRPr>
             </a:lvl2pPr>
             <a:lvl3pPr algn="l">
+              <a:buNone/>
               <a:defRPr sz="2025" b="0">
                 <a:solidFill>
                   <a:srgbClr val="173247"/>
@@ -12356,6 +12422,7 @@
               </a:defRPr>
             </a:lvl3pPr>
             <a:lvl4pPr algn="l">
+              <a:buNone/>
               <a:defRPr sz="2025" b="0">
                 <a:solidFill>
                   <a:srgbClr val="173247"/>
@@ -12366,6 +12433,7 @@
               </a:defRPr>
             </a:lvl4pPr>
             <a:lvl5pPr algn="l">
+              <a:buNone/>
               <a:defRPr sz="2025" b="0">
                 <a:solidFill>
                   <a:srgbClr val="173247"/>
@@ -12376,6 +12444,7 @@
               </a:defRPr>
             </a:lvl5pPr>
             <a:lvl6pPr algn="l">
+              <a:buNone/>
               <a:defRPr sz="2025" b="0">
                 <a:solidFill>
                   <a:srgbClr val="173247"/>
@@ -12386,6 +12455,7 @@
               </a:defRPr>
             </a:lvl6pPr>
             <a:lvl7pPr algn="l">
+              <a:buNone/>
               <a:defRPr sz="2025" b="0">
                 <a:solidFill>
                   <a:srgbClr val="173247"/>
@@ -12396,6 +12466,7 @@
               </a:defRPr>
             </a:lvl7pPr>
             <a:lvl8pPr algn="l">
+              <a:buNone/>
               <a:defRPr sz="2025" b="0">
                 <a:solidFill>
                   <a:srgbClr val="173247"/>
@@ -12406,6 +12477,7 @@
               </a:defRPr>
             </a:lvl8pPr>
             <a:lvl9pPr algn="l">
+              <a:buNone/>
               <a:defRPr sz="2025" b="0">
                 <a:solidFill>
                   <a:srgbClr val="173247"/>
@@ -12462,30 +12534,6 @@
                 <a:cs typeface="Arial"/>
               </a:rPr>
               <a:t>Heartbeat timeout: 500 ms</a:t>
-            </a:r>
-          </a:p>
-          <a:p xmlns:a="http://schemas.openxmlformats.org/drawingml/2006/main">
-            <a:pPr algn="l">
-              <a:buNone/>
-              <a:defRPr sz="2025" b="0">
-                <a:solidFill>
-                  <a:srgbClr val="173247"/>
-                </a:solidFill>
-                <a:latin typeface="Arial"/>
-                <a:ea typeface="Arial"/>
-                <a:cs typeface="Arial"/>
-              </a:defRPr>
-            </a:pPr>
-            <a:r>
-              <a:rPr sz="2025" b="0">
-                <a:solidFill>
-                  <a:srgbClr val="173247"/>
-                </a:solidFill>
-                <a:latin typeface="Arial"/>
-                <a:ea typeface="Arial"/>
-                <a:cs typeface="Arial"/>
-              </a:rPr>
-              <a:t>PreVote disabled</a:t>
             </a:r>
           </a:p>
         </p:txBody>
@@ -12533,6 +12581,7 @@
               </a:defRPr>
             </a:defPPr>
             <a:lvl1pPr algn="l">
+              <a:buNone/>
               <a:defRPr sz="2100" b="0">
                 <a:solidFill>
                   <a:srgbClr val="173247"/>
@@ -12543,6 +12592,7 @@
               </a:defRPr>
             </a:lvl1pPr>
             <a:lvl2pPr algn="l">
+              <a:buNone/>
               <a:defRPr sz="2100" b="0">
                 <a:solidFill>
                   <a:srgbClr val="173247"/>
@@ -12553,6 +12603,7 @@
               </a:defRPr>
             </a:lvl2pPr>
             <a:lvl3pPr algn="l">
+              <a:buNone/>
               <a:defRPr sz="2100" b="0">
                 <a:solidFill>
                   <a:srgbClr val="173247"/>
@@ -12563,6 +12614,7 @@
               </a:defRPr>
             </a:lvl3pPr>
             <a:lvl4pPr algn="l">
+              <a:buNone/>
               <a:defRPr sz="2100" b="0">
                 <a:solidFill>
                   <a:srgbClr val="173247"/>
@@ -12573,6 +12625,7 @@
               </a:defRPr>
             </a:lvl4pPr>
             <a:lvl5pPr algn="l">
+              <a:buNone/>
               <a:defRPr sz="2100" b="0">
                 <a:solidFill>
                   <a:srgbClr val="173247"/>
@@ -12583,6 +12636,7 @@
               </a:defRPr>
             </a:lvl5pPr>
             <a:lvl6pPr algn="l">
+              <a:buNone/>
               <a:defRPr sz="2100" b="0">
                 <a:solidFill>
                   <a:srgbClr val="173247"/>
@@ -12593,6 +12647,7 @@
               </a:defRPr>
             </a:lvl6pPr>
             <a:lvl7pPr algn="l">
+              <a:buNone/>
               <a:defRPr sz="2100" b="0">
                 <a:solidFill>
                   <a:srgbClr val="173247"/>
@@ -12603,6 +12658,7 @@
               </a:defRPr>
             </a:lvl7pPr>
             <a:lvl8pPr algn="l">
+              <a:buNone/>
               <a:defRPr sz="2100" b="0">
                 <a:solidFill>
                   <a:srgbClr val="173247"/>
@@ -12613,6 +12669,7 @@
               </a:defRPr>
             </a:lvl8pPr>
             <a:lvl9pPr algn="l">
+              <a:buNone/>
               <a:defRPr sz="2100" b="0">
                 <a:solidFill>
                   <a:srgbClr val="173247"/>
@@ -12692,6 +12749,7 @@
               </a:defRPr>
             </a:defPPr>
             <a:lvl1pPr algn="l">
+              <a:buNone/>
               <a:defRPr sz="1875" b="0">
                 <a:solidFill>
                   <a:srgbClr val="007E87"/>
@@ -12702,6 +12760,7 @@
               </a:defRPr>
             </a:lvl1pPr>
             <a:lvl2pPr algn="l">
+              <a:buNone/>
               <a:defRPr sz="1875" b="0">
                 <a:solidFill>
                   <a:srgbClr val="007E87"/>
@@ -12712,6 +12771,7 @@
               </a:defRPr>
             </a:lvl2pPr>
             <a:lvl3pPr algn="l">
+              <a:buNone/>
               <a:defRPr sz="1875" b="0">
                 <a:solidFill>
                   <a:srgbClr val="007E87"/>
@@ -12722,6 +12782,7 @@
               </a:defRPr>
             </a:lvl3pPr>
             <a:lvl4pPr algn="l">
+              <a:buNone/>
               <a:defRPr sz="1875" b="0">
                 <a:solidFill>
                   <a:srgbClr val="007E87"/>
@@ -12732,6 +12793,7 @@
               </a:defRPr>
             </a:lvl4pPr>
             <a:lvl5pPr algn="l">
+              <a:buNone/>
               <a:defRPr sz="1875" b="0">
                 <a:solidFill>
                   <a:srgbClr val="007E87"/>
@@ -12742,6 +12804,7 @@
               </a:defRPr>
             </a:lvl5pPr>
             <a:lvl6pPr algn="l">
+              <a:buNone/>
               <a:defRPr sz="1875" b="0">
                 <a:solidFill>
                   <a:srgbClr val="007E87"/>
@@ -12752,6 +12815,7 @@
               </a:defRPr>
             </a:lvl6pPr>
             <a:lvl7pPr algn="l">
+              <a:buNone/>
               <a:defRPr sz="1875" b="0">
                 <a:solidFill>
                   <a:srgbClr val="007E87"/>
@@ -12762,6 +12826,7 @@
               </a:defRPr>
             </a:lvl7pPr>
             <a:lvl8pPr algn="l">
+              <a:buNone/>
               <a:defRPr sz="1875" b="0">
                 <a:solidFill>
                   <a:srgbClr val="007E87"/>
@@ -12772,6 +12837,7 @@
               </a:defRPr>
             </a:lvl8pPr>
             <a:lvl9pPr algn="l">
+              <a:buNone/>
               <a:defRPr sz="1875" b="0">
                 <a:solidFill>
                   <a:srgbClr val="007E87"/>
@@ -12875,6 +12941,7 @@
               </a:defRPr>
             </a:defPPr>
             <a:lvl1pPr algn="l">
+              <a:buNone/>
               <a:defRPr sz="1875" b="0">
                 <a:solidFill>
                   <a:srgbClr val="556570"/>
@@ -12885,6 +12952,7 @@
               </a:defRPr>
             </a:lvl1pPr>
             <a:lvl2pPr algn="l">
+              <a:buNone/>
               <a:defRPr sz="1875" b="0">
                 <a:solidFill>
                   <a:srgbClr val="556570"/>
@@ -12895,6 +12963,7 @@
               </a:defRPr>
             </a:lvl2pPr>
             <a:lvl3pPr algn="l">
+              <a:buNone/>
               <a:defRPr sz="1875" b="0">
                 <a:solidFill>
                   <a:srgbClr val="556570"/>
@@ -12905,6 +12974,7 @@
               </a:defRPr>
             </a:lvl3pPr>
             <a:lvl4pPr algn="l">
+              <a:buNone/>
               <a:defRPr sz="1875" b="0">
                 <a:solidFill>
                   <a:srgbClr val="556570"/>
@@ -12915,6 +12985,7 @@
               </a:defRPr>
             </a:lvl4pPr>
             <a:lvl5pPr algn="l">
+              <a:buNone/>
               <a:defRPr sz="1875" b="0">
                 <a:solidFill>
                   <a:srgbClr val="556570"/>
@@ -12925,6 +12996,7 @@
               </a:defRPr>
             </a:lvl5pPr>
             <a:lvl6pPr algn="l">
+              <a:buNone/>
               <a:defRPr sz="1875" b="0">
                 <a:solidFill>
                   <a:srgbClr val="556570"/>
@@ -12935,6 +13007,7 @@
               </a:defRPr>
             </a:lvl6pPr>
             <a:lvl7pPr algn="l">
+              <a:buNone/>
               <a:defRPr sz="1875" b="0">
                 <a:solidFill>
                   <a:srgbClr val="556570"/>
@@ -12945,6 +13018,7 @@
               </a:defRPr>
             </a:lvl7pPr>
             <a:lvl8pPr algn="l">
+              <a:buNone/>
               <a:defRPr sz="1875" b="0">
                 <a:solidFill>
                   <a:srgbClr val="556570"/>
@@ -12955,6 +13029,7 @@
               </a:defRPr>
             </a:lvl8pPr>
             <a:lvl9pPr algn="l">
+              <a:buNone/>
               <a:defRPr sz="1875" b="0">
                 <a:solidFill>
                   <a:srgbClr val="556570"/>

--- a/docs/presentation/II2202-final-presentation.pptx
+++ b/docs/presentation/II2202-final-presentation.pptx
@@ -1041,7 +1041,7 @@
           </a:p>
           <a:p xmlns:a="http://schemas.openxmlformats.org/drawingml/2006/main">
             <a:r>
-              <a:t>[Cue: Point across T0–T4, then pause at T2 and T3. Explain the diagrams without listing every link.]</a:t>
+              <a:t>[Cue: Move from T0 to T4 as you explain each configuration.]</a:t>
             </a:r>
           </a:p>
           <a:p xmlns:a="http://schemas.openxmlformats.org/drawingml/2006/main">
@@ -1051,7 +1051,7 @@
           </a:p>
           <a:p xmlns:a="http://schemas.openxmlformats.org/drawingml/2006/main">
             <a:r>
-              <a:t>We tested five configurations. Solid lines are working connections, dashed lines have failed, and blue paths show forwarding.</a:t>
+              <a:t>These are the five network configurations we tested.</a:t>
             </a:r>
           </a:p>
           <a:p xmlns:a="http://schemas.openxmlformats.org/drawingml/2006/main">
@@ -1061,7 +1061,7 @@
           </a:p>
           <a:p xmlns:a="http://schemas.openxmlformats.org/drawingml/2006/main">
             <a:r>
-              <a:t>T0 is our healthy baseline, with every direct connection working.</a:t>
+              <a:t>T0 is the healthy baseline: all five nodes are directly connected. We expect stable progress in both modes.</a:t>
             </a:r>
           </a:p>
           <a:p xmlns:a="http://schemas.openxmlformats.org/drawingml/2006/main">
@@ -1071,7 +1071,7 @@
           </a:p>
           <a:p xmlns:a="http://schemas.openxmlformats.org/drawingml/2006/main">
             <a:r>
-              <a:t>T1 removes one link, while the leader still has a direct majority.</a:t>
+              <a:t>T1 removes one link, but the leader still has a direct majority. We expect consensus to continue, so this is our control for a non-critical failure.</a:t>
             </a:r>
           </a:p>
           <a:p xmlns:a="http://schemas.openxmlformats.org/drawingml/2006/main">
@@ -1081,7 +1081,7 @@
           </a:p>
           <a:p xmlns:a="http://schemas.openxmlformats.org/drawingml/2006/main">
             <a:r>
-              <a:t>T2 removes the leader's direct majority. Forwarding through A gives it another path to enough nodes.</a:t>
+              <a:t>T2 leaves the leader connected only to A. We expect forwarding through A to restore its access to a majority.</a:t>
             </a:r>
           </a:p>
           <a:p xmlns:a="http://schemas.openxmlformats.org/drawingml/2006/main">
@@ -1091,7 +1091,7 @@
           </a:p>
           <a:p xmlns:a="http://schemas.openxmlformats.org/drawingml/2006/main">
             <a:r>
-              <a:t>T3 also tests the election rules. Each node keeps a history of updates, called a log. Here, C is isolated, and A's log is older. A can reach enough nodes, but other nodes can reject its election request because its log is behind. Forwarding lets an eligible candidate reach a majority.</a:t>
+              <a:t>In T3, C is isolated and A has an older history of updates, or log. A can reach a majority, but its older log prevents it from winning enough votes. We expect forwarding to let an eligible candidate reach that majority.</a:t>
             </a:r>
           </a:p>
           <a:p xmlns:a="http://schemas.openxmlformats.org/drawingml/2006/main">
@@ -1101,7 +1101,7 @@
           </a:p>
           <a:p xmlns:a="http://schemas.openxmlformats.org/drawingml/2006/main">
             <a:r>
-              <a:t>Finally, T4 is a three-node chain. B and C can communicate through A. A leader can still have a direct majority, but client access can be affected, as in T1.</a:t>
+              <a:t>T4 is a three-node chain. B and C cannot talk directly, but both connect to A. A direct majority can still exist. We expect forwarding to reduce disruption between the endpoints.</a:t>
             </a:r>
           </a:p>
           <a:p xmlns:a="http://schemas.openxmlformats.org/drawingml/2006/main">
@@ -1111,7 +1111,7 @@
           </a:p>
           <a:p xmlns:a="http://schemas.openxmlformats.org/drawingml/2006/main">
             <a:r>
-              <a:t>I'll hand over to Juozas for the results.</a:t>
+              <a:t>We measure successful client requests in every topology. In T1 and T4, we need to distinguish a client that cannot reach the leader from a cluster that cannot make progress.</a:t>
             </a:r>
           </a:p>
           <a:p xmlns:a="http://schemas.openxmlformats.org/drawingml/2006/main">
@@ -1121,7 +1121,17 @@
           </a:p>
           <a:p xmlns:a="http://schemas.openxmlformats.org/drawingml/2006/main">
             <a:r>
-              <a:t>Sources: docs/presentation/presentation-script.md; docs/final-report/figures/topology-scenarios.png; docs/final-report/II2202-report.tex</a:t>
+              <a:t>I'll hand over to Juozas to show what actually happened.</a:t>
+            </a:r>
+          </a:p>
+          <a:p xmlns:a="http://schemas.openxmlformats.org/drawingml/2006/main">
+            <a:r>
+              <a:t/>
+            </a:r>
+          </a:p>
+          <a:p xmlns:a="http://schemas.openxmlformats.org/drawingml/2006/main">
+            <a:r>
+              <a:t>Sources: docs/presentation/presentation-script.md; docs/final-report/II2202-report.tex</a:t>
             </a:r>
           </a:p>
         </p:txBody>

--- a/docs/presentation/II2202-final-presentation.pptx
+++ b/docs/presentation/II2202-final-presentation.pptx
@@ -471,7 +471,7 @@
           </a:p>
           <a:p xmlns:a="http://schemas.openxmlformats.org/drawingml/2006/main">
             <a:r>
-              <a:t>Our project looks at what happens to Raft when some network connections fail, and whether sending messages through another node can help it keep working.</a:t>
+              <a:t>Today we’ll present our study of Raft under partial network partitions, and show how forwarding messages through intermediate nodes can restore progress and how that affects commit latency.</a:t>
             </a:r>
           </a:p>
           <a:p xmlns:a="http://schemas.openxmlformats.org/drawingml/2006/main">
@@ -661,7 +661,7 @@
           </a:p>
           <a:p xmlns:a="http://schemas.openxmlformats.org/drawingml/2006/main">
             <a:r>
-              <a:t>Raft helps several computers agree on the same sequence of updates. Systems such as distributed databases use it to keep their copies consistent.</a:t>
+              <a:t>Raft is a a leader based consensus protocol that lets a cluster of replicas agree on a shared ordered log.</a:t>
             </a:r>
           </a:p>
           <a:p xmlns:a="http://schemas.openxmlformats.org/drawingml/2006/main">
@@ -671,7 +671,7 @@
           </a:p>
           <a:p xmlns:a="http://schemas.openxmlformats.org/drawingml/2006/main">
             <a:r>
-              <a:t>One node acts as the leader. Before it confirms an update, a majority of the nodes must store it. We call that a commit.</a:t>
+              <a:t>The problem we study is partial network partitions where some link connection fails but nodes are still connected through peers.</a:t>
             </a:r>
           </a:p>
           <a:p xmlns:a="http://schemas.openxmlformats.org/drawingml/2006/main">
@@ -681,7 +681,7 @@
           </a:p>
           <a:p xmlns:a="http://schemas.openxmlformats.org/drawingml/2006/main">
             <a:r>
-              <a:t>The problem we study is a partial network partition. Some direct connections fail, but a path through another node may still exist. Raft's normal communication does not use that indirect path, so the system can struggle to commit updates even though the nodes are still connected through other peers.</a:t>
+              <a:t>Raft normal communication protocol does not forward messages and under partitions the system can struggle to commit even tho and alternative path exists through other peers.</a:t>
             </a:r>
           </a:p>
           <a:p xmlns:a="http://schemas.openxmlformats.org/drawingml/2006/main">
@@ -691,7 +691,7 @@
           </a:p>
           <a:p xmlns:a="http://schemas.openxmlformats.org/drawingml/2006/main">
             <a:r>
-              <a:t>Our idea is to let the network forward messages through those peers while leaving Raft itself unchanged.</a:t>
+              <a:t>Out idea is to enable this to enable this forwaring through connected nodes without touching the raft implementation.</a:t>
             </a:r>
           </a:p>
           <a:p xmlns:a="http://schemas.openxmlformats.org/drawingml/2006/main">
@@ -791,7 +791,7 @@
           </a:p>
           <a:p xmlns:a="http://schemas.openxmlformats.org/drawingml/2006/main">
             <a:r>
-              <a:t>For a five-node Raft cluster, a majority means three nodes.</a:t>
+              <a:t>Let's look at previous work and where we fit in.</a:t>
             </a:r>
           </a:p>
           <a:p xmlns:a="http://schemas.openxmlformats.org/drawingml/2006/main">
@@ -801,7 +801,27 @@
           </a:p>
           <a:p xmlns:a="http://schemas.openxmlformats.org/drawingml/2006/main">
             <a:r>
-              <a:t>Earlier work by Jensen and colleagues suggested using an overlay network to help Raft under partial partitions. Nifty showed that transparent rerouting can help other systems. OmniPaxos takes another approach by changing the consensus protocol.</a:t>
+              <a:t>Jensen and colleagues suggested the use of an overlay network to help raft under partial partitions as an alternative to PreVote.</a:t>
+            </a:r>
+          </a:p>
+          <a:p xmlns:a="http://schemas.openxmlformats.org/drawingml/2006/main">
+            <a:r>
+              <a:t/>
+            </a:r>
+          </a:p>
+          <a:p xmlns:a="http://schemas.openxmlformats.org/drawingml/2006/main">
+            <a:r>
+              <a:t>Nifty showed that transparent rerouting could help systems like Kafka with low overhead.</a:t>
+            </a:r>
+          </a:p>
+          <a:p xmlns:a="http://schemas.openxmlformats.org/drawingml/2006/main">
+            <a:r>
+              <a:t/>
+            </a:r>
+          </a:p>
+          <a:p xmlns:a="http://schemas.openxmlformats.org/drawingml/2006/main">
+            <a:r>
+              <a:t>Omnipaxos take another approach to partial connectlvity by changing the consensus protocol and mentions overlay routing as possible alternative.</a:t>
             </a:r>
           </a:p>
           <a:p xmlns:a="http://schemas.openxmlformats.org/drawingml/2006/main">
@@ -911,7 +931,7 @@
           </a:p>
           <a:p xmlns:a="http://schemas.openxmlformats.org/drawingml/2006/main">
             <a:r>
-              <a:t>We compared direct communication with forwarding across five network layouts. For each one, we tested link delays of half a millisecond, five milliseconds, and twenty milliseconds. We repeated every combination thirty times, giving nine hundred trials.</a:t>
+              <a:t>We compared direct communication with forwarding across five network layouts.</a:t>
             </a:r>
           </a:p>
           <a:p xmlns:a="http://schemas.openxmlformats.org/drawingml/2006/main">
@@ -921,7 +941,7 @@
           </a:p>
           <a:p xmlns:a="http://schemas.openxmlformats.org/drawingml/2006/main">
             <a:r>
-              <a:t>The client sent one hundred requests per second. We kept the heartbeat timeout at five hundred milliseconds and disabled PreVote, an optional check before an election.</a:t>
+              <a:t>For each one we tested delays of:</a:t>
             </a:r>
           </a:p>
           <a:p xmlns:a="http://schemas.openxmlformats.org/drawingml/2006/main">
@@ -931,7 +951,17 @@
           </a:p>
           <a:p xmlns:a="http://schemas.openxmlformats.org/drawingml/2006/main">
             <a:r>
-              <a:t>Usually, we let the cluster settle for thirty seconds, cut the selected links, and observed another thirty seconds. T3 used a special restart procedure to create different log histories.</a:t>
+              <a:t>- half a millisecond</a:t>
+            </a:r>
+          </a:p>
+          <a:p xmlns:a="http://schemas.openxmlformats.org/drawingml/2006/main">
+            <a:r>
+              <a:t>- 5 milliseconds</a:t>
+            </a:r>
+          </a:p>
+          <a:p xmlns:a="http://schemas.openxmlformats.org/drawingml/2006/main">
+            <a:r>
+              <a:t>- 20 milliseconds</a:t>
             </a:r>
           </a:p>
           <a:p xmlns:a="http://schemas.openxmlformats.org/drawingml/2006/main">
@@ -941,7 +971,7 @@
           </a:p>
           <a:p xmlns:a="http://schemas.openxmlformats.org/drawingml/2006/main">
             <a:r>
-              <a:t>We ran trials in parallel on AWS, but each individual trial kept its nodes and client on one machine.</a:t>
+              <a:t>We repeated every combination 30 times giving a total of 900 trials.</a:t>
             </a:r>
           </a:p>
           <a:p xmlns:a="http://schemas.openxmlformats.org/drawingml/2006/main">
@@ -951,7 +981,47 @@
           </a:p>
           <a:p xmlns:a="http://schemas.openxmlformats.org/drawingml/2006/main">
             <a:r>
-              <a:t>All nine hundred trials passed our setup and data checks. That means we collected valid measurements, including cases where requests failed.</a:t>
+              <a:t>For each trial the client sends 100 requeste per second. We keep the heartbeat timeout at 500 milliseconds.</a:t>
+            </a:r>
+          </a:p>
+          <a:p xmlns:a="http://schemas.openxmlformats.org/drawingml/2006/main">
+            <a:r>
+              <a:t/>
+            </a:r>
+          </a:p>
+          <a:p xmlns:a="http://schemas.openxmlformats.org/drawingml/2006/main">
+            <a:r>
+              <a:t>For the experiments we wait for 30 seconds for the cluster to warm-up and then cut the selected links to form the desired network partition.</a:t>
+            </a:r>
+          </a:p>
+          <a:p xmlns:a="http://schemas.openxmlformats.org/drawingml/2006/main">
+            <a:r>
+              <a:t/>
+            </a:r>
+          </a:p>
+          <a:p xmlns:a="http://schemas.openxmlformats.org/drawingml/2006/main">
+            <a:r>
+              <a:t>Then we start the observation that lasts for 30 seconds.</a:t>
+            </a:r>
+          </a:p>
+          <a:p xmlns:a="http://schemas.openxmlformats.org/drawingml/2006/main">
+            <a:r>
+              <a:t/>
+            </a:r>
+          </a:p>
+          <a:p xmlns:a="http://schemas.openxmlformats.org/drawingml/2006/main">
+            <a:r>
+              <a:t>Only for T3 we skipped the warm-up phase to test the configuration under inconsistent logs.</a:t>
+            </a:r>
+          </a:p>
+          <a:p xmlns:a="http://schemas.openxmlformats.org/drawingml/2006/main">
+            <a:r>
+              <a:t/>
+            </a:r>
+          </a:p>
+          <a:p xmlns:a="http://schemas.openxmlformats.org/drawingml/2006/main">
+            <a:r>
+              <a:t>We ran these trials on 16 EC2 instances on AWS and each trial had all the nodes anc client on a single machine.</a:t>
             </a:r>
           </a:p>
           <a:p xmlns:a="http://schemas.openxmlformats.org/drawingml/2006/main">
@@ -1091,7 +1161,7 @@
           </a:p>
           <a:p xmlns:a="http://schemas.openxmlformats.org/drawingml/2006/main">
             <a:r>
-              <a:t>In T3, C is isolated and A has an older history of updates, or log. A can reach a majority, but its older log prevents it from winning enough votes. We expect forwarding to let an eligible candidate reach that majority.</a:t>
+              <a:t>In T3, C is isolated and since we skip the warmup phase, A has an older log history and even being connected to a majority of nodes he cannot become a leader. We expeacn forwaerind to let another elegible candidate to reach that majority.</a:t>
             </a:r>
           </a:p>
           <a:p xmlns:a="http://schemas.openxmlformats.org/drawingml/2006/main">
@@ -1131,7 +1201,7 @@
           </a:p>
           <a:p xmlns:a="http://schemas.openxmlformats.org/drawingml/2006/main">
             <a:r>
-              <a:t>Sources: docs/presentation/presentation-script.md; docs/final-report/II2202-report.tex</a:t>
+              <a:t>Source: docs/presentation/presentation-script.md</a:t>
             </a:r>
           </a:p>
         </p:txBody>

--- a/docs/presentation/II2202-final-presentation.pptx
+++ b/docs/presentation/II2202-final-presentation.pptx
@@ -661,7 +661,7 @@
           </a:p>
           <a:p xmlns:a="http://schemas.openxmlformats.org/drawingml/2006/main">
             <a:r>
-              <a:t>Raft is a a leader based consensus protocol that lets a cluster of replicas agree on a shared ordered log.</a:t>
+              <a:t>Raft is a leader-based consensus protocol that lets a cluster of replicas agree on a shared ordered log.</a:t>
             </a:r>
           </a:p>
           <a:p xmlns:a="http://schemas.openxmlformats.org/drawingml/2006/main">
@@ -671,7 +671,7 @@
           </a:p>
           <a:p xmlns:a="http://schemas.openxmlformats.org/drawingml/2006/main">
             <a:r>
-              <a:t>The problem we study is partial network partitions where some link connection fails but nodes are still connected through peers.</a:t>
+              <a:t>We study partial network partitions, where some direct links fail but nodes remain connected through peers.</a:t>
             </a:r>
           </a:p>
           <a:p xmlns:a="http://schemas.openxmlformats.org/drawingml/2006/main">
@@ -681,7 +681,7 @@
           </a:p>
           <a:p xmlns:a="http://schemas.openxmlformats.org/drawingml/2006/main">
             <a:r>
-              <a:t>Raft normal communication protocol does not forward messages and under partitions the system can struggle to commit even tho and alternative path exists through other peers.</a:t>
+              <a:t>Raft's normal communication does not forward messages. Under a partial partition, the system can struggle to commit even though an alternative path exists through other peers.</a:t>
             </a:r>
           </a:p>
           <a:p xmlns:a="http://schemas.openxmlformats.org/drawingml/2006/main">
@@ -691,7 +691,7 @@
           </a:p>
           <a:p xmlns:a="http://schemas.openxmlformats.org/drawingml/2006/main">
             <a:r>
-              <a:t>Out idea is to enable this to enable this forwaring through connected nodes without touching the raft implementation.</a:t>
+              <a:t>Our idea is to enable forwarding through connected nodes without touching the Raft implementation.</a:t>
             </a:r>
           </a:p>
           <a:p xmlns:a="http://schemas.openxmlformats.org/drawingml/2006/main">
@@ -801,7 +801,7 @@
           </a:p>
           <a:p xmlns:a="http://schemas.openxmlformats.org/drawingml/2006/main">
             <a:r>
-              <a:t>Jensen and colleagues suggested the use of an overlay network to help raft under partial partitions as an alternative to PreVote.</a:t>
+              <a:t>Jensen and colleagues suggested the use of an overlay network to help Raft under partial partitions as an alternative to PreVote.</a:t>
             </a:r>
           </a:p>
           <a:p xmlns:a="http://schemas.openxmlformats.org/drawingml/2006/main">
@@ -821,7 +821,7 @@
           </a:p>
           <a:p xmlns:a="http://schemas.openxmlformats.org/drawingml/2006/main">
             <a:r>
-              <a:t>Omnipaxos take another approach to partial connectlvity by changing the consensus protocol and mentions overlay routing as possible alternative.</a:t>
+              <a:t>OmniPaxos takes another approach to partial connectivity by changing the consensus protocol and mentions overlay routing as a possible alternative.</a:t>
             </a:r>
           </a:p>
           <a:p xmlns:a="http://schemas.openxmlformats.org/drawingml/2006/main">
@@ -941,7 +941,7 @@
           </a:p>
           <a:p xmlns:a="http://schemas.openxmlformats.org/drawingml/2006/main">
             <a:r>
-              <a:t>For each one we tested delays of:</a:t>
+              <a:t>For each one, we tested delays of:</a:t>
             </a:r>
           </a:p>
           <a:p xmlns:a="http://schemas.openxmlformats.org/drawingml/2006/main">
@@ -971,7 +971,7 @@
           </a:p>
           <a:p xmlns:a="http://schemas.openxmlformats.org/drawingml/2006/main">
             <a:r>
-              <a:t>We repeated every combination 30 times giving a total of 900 trials.</a:t>
+              <a:t>We repeated every combination 30 times, giving a total of 900 trials.</a:t>
             </a:r>
           </a:p>
           <a:p xmlns:a="http://schemas.openxmlformats.org/drawingml/2006/main">
@@ -981,7 +981,7 @@
           </a:p>
           <a:p xmlns:a="http://schemas.openxmlformats.org/drawingml/2006/main">
             <a:r>
-              <a:t>For each trial the client sends 100 requeste per second. We keep the heartbeat timeout at 500 milliseconds.</a:t>
+              <a:t>For each trial, the client sends 100 requests per second. We keep the heartbeat timeout at 500 milliseconds.</a:t>
             </a:r>
           </a:p>
           <a:p xmlns:a="http://schemas.openxmlformats.org/drawingml/2006/main">
@@ -991,7 +991,7 @@
           </a:p>
           <a:p xmlns:a="http://schemas.openxmlformats.org/drawingml/2006/main">
             <a:r>
-              <a:t>For the experiments we wait for 30 seconds for the cluster to warm-up and then cut the selected links to form the desired network partition.</a:t>
+              <a:t>In each experiment, we wait 30 seconds for the cluster to warm up, then cut the selected links to form the desired network partition.</a:t>
             </a:r>
           </a:p>
           <a:p xmlns:a="http://schemas.openxmlformats.org/drawingml/2006/main">
@@ -1001,7 +1001,7 @@
           </a:p>
           <a:p xmlns:a="http://schemas.openxmlformats.org/drawingml/2006/main">
             <a:r>
-              <a:t>Then we start the observation that lasts for 30 seconds.</a:t>
+              <a:t>Then we start an observation period that lasts 30 seconds.</a:t>
             </a:r>
           </a:p>
           <a:p xmlns:a="http://schemas.openxmlformats.org/drawingml/2006/main">
@@ -1011,7 +1011,7 @@
           </a:p>
           <a:p xmlns:a="http://schemas.openxmlformats.org/drawingml/2006/main">
             <a:r>
-              <a:t>Only for T3 we skipped the warm-up phase to test the configuration under inconsistent logs.</a:t>
+              <a:t>For T3 only, we skip the warm-up phase to test the configuration with different log histories.</a:t>
             </a:r>
           </a:p>
           <a:p xmlns:a="http://schemas.openxmlformats.org/drawingml/2006/main">
@@ -1021,7 +1021,7 @@
           </a:p>
           <a:p xmlns:a="http://schemas.openxmlformats.org/drawingml/2006/main">
             <a:r>
-              <a:t>We ran these trials on 16 EC2 instances on AWS and each trial had all the nodes anc client on a single machine.</a:t>
+              <a:t>We ran these trials on 16 EC2 instances on AWS, and each trial had all the nodes and the client on a single machine.</a:t>
             </a:r>
           </a:p>
           <a:p xmlns:a="http://schemas.openxmlformats.org/drawingml/2006/main">
@@ -1161,7 +1161,7 @@
           </a:p>
           <a:p xmlns:a="http://schemas.openxmlformats.org/drawingml/2006/main">
             <a:r>
-              <a:t>In T3, C is isolated and since we skip the warmup phase, A has an older log history and even being connected to a majority of nodes he cannot become a leader. We expeacn forwaerind to let another elegible candidate to reach that majority.</a:t>
+              <a:t>In T3, C is isolated, and we skip the warm-up phase to preserve different log histories. A has an older log, so even though it can reach a majority of nodes, it cannot win enough votes to become leader. We expect forwarding to let another eligible candidate reach that majority.</a:t>
             </a:r>
           </a:p>
           <a:p xmlns:a="http://schemas.openxmlformats.org/drawingml/2006/main">
@@ -1341,7 +1341,7 @@
           </a:p>
           <a:p xmlns:a="http://schemas.openxmlformats.org/drawingml/2006/main">
             <a:r>
-              <a:t>The T3 forwarding bars are lower because the measurement includes restart and setup before the client starts. Once the client was running, throughput was close to one hundred commits per second. The roughly twenty to twenty-two seconds before the first commit includes that setup, so we cannot treat it as election time alone.</a:t>
+              <a:t>The T3 forwarding bars are lower because the measurement includes restart and setup before the client starts. Once the client was running, throughput was close to one hundred commits per second. The roughly twenty to twenty-two seconds before the first commit include that setup, so we cannot treat it as election time alone.</a:t>
             </a:r>
           </a:p>
           <a:p xmlns:a="http://schemas.openxmlformats.org/drawingml/2006/main">
